--- a/proposal/Presentations/SENTINEL_GNSS_Proposal_v4.pptx
+++ b/proposal/Presentations/SENTINEL_GNSS_Proposal_v4.pptx
@@ -30,6 +30,13 @@
     <p:sldId id="278" r:id="rId29"/>
     <p:sldId id="279" r:id="rId30"/>
     <p:sldId id="280" r:id="rId31"/>
+    <p:sldId id="281" r:id="rId32"/>
+    <p:sldId id="282" r:id="rId33"/>
+    <p:sldId id="283" r:id="rId34"/>
+    <p:sldId id="284" r:id="rId35"/>
+    <p:sldId id="285" r:id="rId36"/>
+    <p:sldId id="286" r:id="rId37"/>
+    <p:sldId id="287" r:id="rId38"/>
   </p:sldIdLst>
   <p:sldSz cx="12191695" cy="6858000" type="screen4x3"/>
   <p:notesSz cx="6858000" cy="9144000"/>
@@ -3438,68 +3445,30 @@
           </a:p>
         </p:txBody>
       </p:sp>
-      <p:sp>
-        <p:nvSpPr>
-          <p:cNvPr id="4" name="Rectangle 3"/>
-          <p:cNvSpPr/>
+      <p:pic>
+        <p:nvPicPr>
+          <p:cNvPr id="4" name="Picture 3" descr="fig14_architecture.png"/>
+          <p:cNvPicPr>
+            <a:picLocks noChangeAspect="1"/>
+          </p:cNvPicPr>
           <p:nvPr/>
-        </p:nvSpPr>
-        <p:spPr>
-          <a:xfrm>
-            <a:off x="2286000" y="1828800"/>
-            <a:ext cx="7589520" cy="3657600"/>
+        </p:nvPicPr>
+        <p:blipFill>
+          <a:blip r:embed="rId2"/>
+          <a:stretch>
+            <a:fillRect/>
+          </a:stretch>
+        </p:blipFill>
+        <p:spPr>
+          <a:xfrm>
+            <a:off x="2011680" y="1645920"/>
+            <a:ext cx="12555547" cy="4206240"/>
           </a:xfrm>
           <a:prstGeom prst="rect">
             <a:avLst/>
           </a:prstGeom>
-          <a:solidFill>
-            <a:srgbClr val="E3ECF5"/>
-          </a:solidFill>
-          <a:ln>
-            <a:solidFill>
-              <a:srgbClr val="005BAC"/>
-            </a:solidFill>
-          </a:ln>
-        </p:spPr>
-        <p:style>
-          <a:lnRef idx="1">
-            <a:schemeClr val="accent1"/>
-          </a:lnRef>
-          <a:fillRef idx="3">
-            <a:schemeClr val="accent1"/>
-          </a:fillRef>
-          <a:effectRef idx="2">
-            <a:schemeClr val="accent1"/>
-          </a:effectRef>
-          <a:fontRef idx="minor">
-            <a:schemeClr val="lt1"/>
-          </a:fontRef>
-        </p:style>
-        <p:txBody>
-          <a:bodyPr rtlCol="0" anchor="ctr"/>
-          <a:lstStyle/>
-          <a:p>
-            <a:pPr algn="ctr">
-              <a:lnSpc>
-                <a:spcPct val="150000"/>
-              </a:lnSpc>
-              <a:spcAft>
-                <a:spcPts val="600"/>
-              </a:spcAft>
-            </a:pPr>
-            <a:r>
-              <a:rPr sz="2000" b="1">
-                <a:solidFill>
-                  <a:srgbClr val="005BAC"/>
-                </a:solidFill>
-                <a:latin typeface="Calibri"/>
-              </a:rPr>
-              <a:t>[ INSERT FIGURE ]
-fig_architecture.pdf</a:t>
-            </a:r>
-          </a:p>
-        </p:txBody>
-      </p:sp>
+        </p:spPr>
+      </p:pic>
       <p:sp>
         <p:nvSpPr>
           <p:cNvPr id="5" name="TextBox 4"/>
@@ -3537,7 +3506,7 @@
                 </a:solidFill>
                 <a:latin typeface="Calibri"/>
               </a:rPr>
-              <a:t>Block diagram: input 30×37 → projection → Transformer ×2 → BiLSTM ×2 → 3 heads.  (drop in results/figures/fig_architecture.pdf)</a:t>
+              <a:t>Block diagram: input 30×37 → projection → Transformer ×2 → BiLSTM ×2 → 3 heads.</a:t>
             </a:r>
           </a:p>
         </p:txBody>
@@ -3605,7 +3574,7 @@
                 </a:solidFill>
                 <a:latin typeface="Calibri"/>
               </a:rPr>
-              <a:t>4 · Results (Run 14)</a:t>
+              <a:t>4 · Results (Run 15)</a:t>
             </a:r>
           </a:p>
         </p:txBody>
@@ -3662,6 +3631,360 @@
 </file>
 
 <file path=ppt/slides/slide12.xml><?xml version="1.0" encoding="utf-8"?>
+<p:sld xmlns:a="http://schemas.openxmlformats.org/drawingml/2006/main" xmlns:p="http://schemas.openxmlformats.org/presentationml/2006/main" xmlns:r="http://schemas.openxmlformats.org/officeDocument/2006/relationships">
+  <p:cSld>
+    <p:bg>
+      <p:bgPr>
+        <a:solidFill>
+          <a:srgbClr val="F5F8FC"/>
+        </a:solidFill>
+        <a:effectLst/>
+      </p:bgPr>
+    </p:bg>
+    <p:spTree>
+      <p:nvGrpSpPr>
+        <p:cNvPr id="1" name=""/>
+        <p:cNvGrpSpPr/>
+        <p:nvPr/>
+      </p:nvGrpSpPr>
+      <p:grpSpPr/>
+      <p:sp>
+        <p:nvSpPr>
+          <p:cNvPr id="2" name="Rectangle 1"/>
+          <p:cNvSpPr/>
+          <p:nvPr/>
+        </p:nvSpPr>
+        <p:spPr>
+          <a:xfrm>
+            <a:off x="548640" y="457200"/>
+            <a:ext cx="164592" cy="822960"/>
+          </a:xfrm>
+          <a:prstGeom prst="rect">
+            <a:avLst/>
+          </a:prstGeom>
+          <a:solidFill>
+            <a:srgbClr val="005BAC"/>
+          </a:solidFill>
+          <a:ln>
+            <a:noFill/>
+          </a:ln>
+        </p:spPr>
+        <p:style>
+          <a:lnRef idx="1">
+            <a:schemeClr val="accent1"/>
+          </a:lnRef>
+          <a:fillRef idx="3">
+            <a:schemeClr val="accent1"/>
+          </a:fillRef>
+          <a:effectRef idx="2">
+            <a:schemeClr val="accent1"/>
+          </a:effectRef>
+          <a:fontRef idx="minor">
+            <a:schemeClr val="lt1"/>
+          </a:fontRef>
+        </p:style>
+        <p:txBody>
+          <a:bodyPr rtlCol="0" anchor="ctr"/>
+          <a:lstStyle/>
+          <a:p>
+            <a:pPr algn="ctr"/>
+          </a:p>
+        </p:txBody>
+      </p:sp>
+      <p:sp>
+        <p:nvSpPr>
+          <p:cNvPr id="3" name="TextBox 2"/>
+          <p:cNvSpPr txBox="1"/>
+          <p:nvPr/>
+        </p:nvSpPr>
+        <p:spPr>
+          <a:xfrm>
+            <a:off x="868680" y="411480"/>
+            <a:ext cx="10789920" cy="914400"/>
+          </a:xfrm>
+          <a:prstGeom prst="rect">
+            <a:avLst/>
+          </a:prstGeom>
+          <a:noFill/>
+        </p:spPr>
+        <p:txBody>
+          <a:bodyPr wrap="square">
+            <a:spAutoFit/>
+          </a:bodyPr>
+          <a:lstStyle/>
+          <a:p>
+            <a:pPr algn="l">
+              <a:lnSpc>
+                <a:spcPct val="150000"/>
+              </a:lnSpc>
+              <a:spcAft>
+                <a:spcPts val="600"/>
+              </a:spcAft>
+            </a:pPr>
+            <a:r>
+              <a:rPr sz="3400" b="1">
+                <a:solidFill>
+                  <a:srgbClr val="003366"/>
+                </a:solidFill>
+                <a:latin typeface="Calibri"/>
+              </a:rPr>
+              <a:t>Multi-horizon performance</a:t>
+            </a:r>
+          </a:p>
+        </p:txBody>
+      </p:sp>
+      <p:pic>
+        <p:nvPicPr>
+          <p:cNvPr id="4" name="Picture 3" descr="fig01_multihorizon.png"/>
+          <p:cNvPicPr>
+            <a:picLocks noChangeAspect="1"/>
+          </p:cNvPicPr>
+          <p:nvPr/>
+        </p:nvPicPr>
+        <p:blipFill>
+          <a:blip r:embed="rId2"/>
+          <a:stretch>
+            <a:fillRect/>
+          </a:stretch>
+        </p:blipFill>
+        <p:spPr>
+          <a:xfrm>
+            <a:off x="2011680" y="1645920"/>
+            <a:ext cx="6116398" cy="4206240"/>
+          </a:xfrm>
+          <a:prstGeom prst="rect">
+            <a:avLst/>
+          </a:prstGeom>
+        </p:spPr>
+      </p:pic>
+      <p:sp>
+        <p:nvSpPr>
+          <p:cNvPr id="5" name="TextBox 4"/>
+          <p:cNvSpPr txBox="1"/>
+          <p:nvPr/>
+        </p:nvSpPr>
+        <p:spPr>
+          <a:xfrm>
+            <a:off x="868680" y="5943600"/>
+            <a:ext cx="10789920" cy="731520"/>
+          </a:xfrm>
+          <a:prstGeom prst="rect">
+            <a:avLst/>
+          </a:prstGeom>
+          <a:noFill/>
+        </p:spPr>
+        <p:txBody>
+          <a:bodyPr wrap="square">
+            <a:spAutoFit/>
+          </a:bodyPr>
+          <a:lstStyle/>
+          <a:p>
+            <a:pPr algn="l">
+              <a:lnSpc>
+                <a:spcPct val="150000"/>
+              </a:lnSpc>
+              <a:spcAft>
+                <a:spcPts val="600"/>
+              </a:spcAft>
+            </a:pPr>
+            <a:r>
+              <a:rPr sz="1500" b="0">
+                <a:solidFill>
+                  <a:srgbClr val="5A5A5A"/>
+                </a:solidFill>
+                <a:latin typeface="Calibri"/>
+              </a:rPr>
+              <a:t>Macro-F1 and MCC at +5/+15/+30 s with 95% bootstrap confidence intervals.</a:t>
+            </a:r>
+          </a:p>
+        </p:txBody>
+      </p:sp>
+    </p:spTree>
+  </p:cSld>
+  <p:clrMapOvr>
+    <a:masterClrMapping/>
+  </p:clrMapOvr>
+</p:sld>
+</file>
+
+<file path=ppt/slides/slide13.xml><?xml version="1.0" encoding="utf-8"?>
+<p:sld xmlns:a="http://schemas.openxmlformats.org/drawingml/2006/main" xmlns:p="http://schemas.openxmlformats.org/presentationml/2006/main" xmlns:r="http://schemas.openxmlformats.org/officeDocument/2006/relationships">
+  <p:cSld>
+    <p:bg>
+      <p:bgPr>
+        <a:solidFill>
+          <a:srgbClr val="F5F8FC"/>
+        </a:solidFill>
+        <a:effectLst/>
+      </p:bgPr>
+    </p:bg>
+    <p:spTree>
+      <p:nvGrpSpPr>
+        <p:cNvPr id="1" name=""/>
+        <p:cNvGrpSpPr/>
+        <p:nvPr/>
+      </p:nvGrpSpPr>
+      <p:grpSpPr/>
+      <p:sp>
+        <p:nvSpPr>
+          <p:cNvPr id="2" name="Rectangle 1"/>
+          <p:cNvSpPr/>
+          <p:nvPr/>
+        </p:nvSpPr>
+        <p:spPr>
+          <a:xfrm>
+            <a:off x="548640" y="457200"/>
+            <a:ext cx="164592" cy="822960"/>
+          </a:xfrm>
+          <a:prstGeom prst="rect">
+            <a:avLst/>
+          </a:prstGeom>
+          <a:solidFill>
+            <a:srgbClr val="005BAC"/>
+          </a:solidFill>
+          <a:ln>
+            <a:noFill/>
+          </a:ln>
+        </p:spPr>
+        <p:style>
+          <a:lnRef idx="1">
+            <a:schemeClr val="accent1"/>
+          </a:lnRef>
+          <a:fillRef idx="3">
+            <a:schemeClr val="accent1"/>
+          </a:fillRef>
+          <a:effectRef idx="2">
+            <a:schemeClr val="accent1"/>
+          </a:effectRef>
+          <a:fontRef idx="minor">
+            <a:schemeClr val="lt1"/>
+          </a:fontRef>
+        </p:style>
+        <p:txBody>
+          <a:bodyPr rtlCol="0" anchor="ctr"/>
+          <a:lstStyle/>
+          <a:p>
+            <a:pPr algn="ctr"/>
+          </a:p>
+        </p:txBody>
+      </p:sp>
+      <p:sp>
+        <p:nvSpPr>
+          <p:cNvPr id="3" name="TextBox 2"/>
+          <p:cNvSpPr txBox="1"/>
+          <p:nvPr/>
+        </p:nvSpPr>
+        <p:spPr>
+          <a:xfrm>
+            <a:off x="868680" y="411480"/>
+            <a:ext cx="10789920" cy="914400"/>
+          </a:xfrm>
+          <a:prstGeom prst="rect">
+            <a:avLst/>
+          </a:prstGeom>
+          <a:noFill/>
+        </p:spPr>
+        <p:txBody>
+          <a:bodyPr wrap="square">
+            <a:spAutoFit/>
+          </a:bodyPr>
+          <a:lstStyle/>
+          <a:p>
+            <a:pPr algn="l">
+              <a:lnSpc>
+                <a:spcPct val="150000"/>
+              </a:lnSpc>
+              <a:spcAft>
+                <a:spcPts val="600"/>
+              </a:spcAft>
+            </a:pPr>
+            <a:r>
+              <a:rPr sz="3400" b="1">
+                <a:solidFill>
+                  <a:srgbClr val="003366"/>
+                </a:solidFill>
+                <a:latin typeface="Calibri"/>
+              </a:rPr>
+              <a:t>Per-class metrics at +5 s</a:t>
+            </a:r>
+          </a:p>
+        </p:txBody>
+      </p:sp>
+      <p:pic>
+        <p:nvPicPr>
+          <p:cNvPr id="4" name="Picture 3" descr="fig02_perclass_f1.png"/>
+          <p:cNvPicPr>
+            <a:picLocks noChangeAspect="1"/>
+          </p:cNvPicPr>
+          <p:nvPr/>
+        </p:nvPicPr>
+        <p:blipFill>
+          <a:blip r:embed="rId2"/>
+          <a:stretch>
+            <a:fillRect/>
+          </a:stretch>
+        </p:blipFill>
+        <p:spPr>
+          <a:xfrm>
+            <a:off x="2011680" y="1645920"/>
+            <a:ext cx="6492593" cy="4206240"/>
+          </a:xfrm>
+          <a:prstGeom prst="rect">
+            <a:avLst/>
+          </a:prstGeom>
+        </p:spPr>
+      </p:pic>
+      <p:sp>
+        <p:nvSpPr>
+          <p:cNvPr id="5" name="TextBox 4"/>
+          <p:cNvSpPr txBox="1"/>
+          <p:nvPr/>
+        </p:nvSpPr>
+        <p:spPr>
+          <a:xfrm>
+            <a:off x="868680" y="5943600"/>
+            <a:ext cx="10789920" cy="731520"/>
+          </a:xfrm>
+          <a:prstGeom prst="rect">
+            <a:avLst/>
+          </a:prstGeom>
+          <a:noFill/>
+        </p:spPr>
+        <p:txBody>
+          <a:bodyPr wrap="square">
+            <a:spAutoFit/>
+          </a:bodyPr>
+          <a:lstStyle/>
+          <a:p>
+            <a:pPr algn="l">
+              <a:lnSpc>
+                <a:spcPct val="150000"/>
+              </a:lnSpc>
+              <a:spcAft>
+                <a:spcPts val="600"/>
+              </a:spcAft>
+            </a:pPr>
+            <a:r>
+              <a:rPr sz="1500" b="0">
+                <a:solidFill>
+                  <a:srgbClr val="5A5A5A"/>
+                </a:solidFill>
+                <a:latin typeface="Calibri"/>
+              </a:rPr>
+              <a:t>Per-class F1 across horizons; DEGRADED (safety-critical) shown with recall.</a:t>
+            </a:r>
+          </a:p>
+        </p:txBody>
+      </p:sp>
+    </p:spTree>
+  </p:cSld>
+  <p:clrMapOvr>
+    <a:masterClrMapping/>
+  </p:clrMapOvr>
+</p:sld>
+</file>
+
+<file path=ppt/slides/slide14.xml><?xml version="1.0" encoding="utf-8"?>
 <p:sld xmlns:a="http://schemas.openxmlformats.org/drawingml/2006/main" xmlns:p="http://schemas.openxmlformats.org/presentationml/2006/main" xmlns:r="http://schemas.openxmlformats.org/officeDocument/2006/relationships">
   <p:cSld>
     <p:bg>
@@ -4291,7 +4614,7 @@
 </p:sld>
 </file>
 
-<file path=ppt/slides/slide13.xml><?xml version="1.0" encoding="utf-8"?>
+<file path=ppt/slides/slide15.xml><?xml version="1.0" encoding="utf-8"?>
 <p:sld xmlns:a="http://schemas.openxmlformats.org/drawingml/2006/main" xmlns:p="http://schemas.openxmlformats.org/presentationml/2006/main" xmlns:r="http://schemas.openxmlformats.org/officeDocument/2006/relationships">
   <p:cSld>
     <p:bg>
@@ -4921,813 +5244,6 @@
 </p:sld>
 </file>
 
-<file path=ppt/slides/slide14.xml><?xml version="1.0" encoding="utf-8"?>
-<p:sld xmlns:a="http://schemas.openxmlformats.org/drawingml/2006/main" xmlns:p="http://schemas.openxmlformats.org/presentationml/2006/main" xmlns:r="http://schemas.openxmlformats.org/officeDocument/2006/relationships">
-  <p:cSld>
-    <p:bg>
-      <p:bgPr>
-        <a:solidFill>
-          <a:srgbClr val="F5F8FC"/>
-        </a:solidFill>
-        <a:effectLst/>
-      </p:bgPr>
-    </p:bg>
-    <p:spTree>
-      <p:nvGrpSpPr>
-        <p:cNvPr id="1" name=""/>
-        <p:cNvGrpSpPr/>
-        <p:nvPr/>
-      </p:nvGrpSpPr>
-      <p:grpSpPr/>
-      <p:sp>
-        <p:nvSpPr>
-          <p:cNvPr id="2" name="Rectangle 1"/>
-          <p:cNvSpPr/>
-          <p:nvPr/>
-        </p:nvSpPr>
-        <p:spPr>
-          <a:xfrm>
-            <a:off x="548640" y="457200"/>
-            <a:ext cx="164592" cy="822960"/>
-          </a:xfrm>
-          <a:prstGeom prst="rect">
-            <a:avLst/>
-          </a:prstGeom>
-          <a:solidFill>
-            <a:srgbClr val="005BAC"/>
-          </a:solidFill>
-          <a:ln>
-            <a:noFill/>
-          </a:ln>
-        </p:spPr>
-        <p:style>
-          <a:lnRef idx="1">
-            <a:schemeClr val="accent1"/>
-          </a:lnRef>
-          <a:fillRef idx="3">
-            <a:schemeClr val="accent1"/>
-          </a:fillRef>
-          <a:effectRef idx="2">
-            <a:schemeClr val="accent1"/>
-          </a:effectRef>
-          <a:fontRef idx="minor">
-            <a:schemeClr val="lt1"/>
-          </a:fontRef>
-        </p:style>
-        <p:txBody>
-          <a:bodyPr rtlCol="0" anchor="ctr"/>
-          <a:lstStyle/>
-          <a:p>
-            <a:pPr algn="ctr"/>
-          </a:p>
-        </p:txBody>
-      </p:sp>
-      <p:sp>
-        <p:nvSpPr>
-          <p:cNvPr id="3" name="TextBox 2"/>
-          <p:cNvSpPr txBox="1"/>
-          <p:nvPr/>
-        </p:nvSpPr>
-        <p:spPr>
-          <a:xfrm>
-            <a:off x="868680" y="411480"/>
-            <a:ext cx="10789920" cy="914400"/>
-          </a:xfrm>
-          <a:prstGeom prst="rect">
-            <a:avLst/>
-          </a:prstGeom>
-          <a:noFill/>
-        </p:spPr>
-        <p:txBody>
-          <a:bodyPr wrap="square">
-            <a:spAutoFit/>
-          </a:bodyPr>
-          <a:lstStyle/>
-          <a:p>
-            <a:pPr algn="l">
-              <a:lnSpc>
-                <a:spcPct val="150000"/>
-              </a:lnSpc>
-              <a:spcAft>
-                <a:spcPts val="600"/>
-              </a:spcAft>
-            </a:pPr>
-            <a:r>
-              <a:rPr sz="3400" b="1">
-                <a:solidFill>
-                  <a:srgbClr val="003366"/>
-                </a:solidFill>
-                <a:latin typeface="Calibri"/>
-              </a:rPr>
-              <a:t>Confusion + multi-horizon</a:t>
-            </a:r>
-          </a:p>
-        </p:txBody>
-      </p:sp>
-      <p:pic>
-        <p:nvPicPr>
-          <p:cNvPr id="4" name="Picture 3" descr="confusion_matrices_test.png"/>
-          <p:cNvPicPr>
-            <a:picLocks noChangeAspect="1"/>
-          </p:cNvPicPr>
-          <p:nvPr/>
-        </p:nvPicPr>
-        <p:blipFill>
-          <a:blip r:embed="rId2"/>
-          <a:stretch>
-            <a:fillRect/>
-          </a:stretch>
-        </p:blipFill>
-        <p:spPr>
-          <a:xfrm>
-            <a:off x="2011680" y="1645920"/>
-            <a:ext cx="7345751" cy="4206240"/>
-          </a:xfrm>
-          <a:prstGeom prst="rect">
-            <a:avLst/>
-          </a:prstGeom>
-        </p:spPr>
-      </p:pic>
-      <p:sp>
-        <p:nvSpPr>
-          <p:cNvPr id="5" name="TextBox 4"/>
-          <p:cNvSpPr txBox="1"/>
-          <p:nvPr/>
-        </p:nvSpPr>
-        <p:spPr>
-          <a:xfrm>
-            <a:off x="868680" y="5943600"/>
-            <a:ext cx="10789920" cy="731520"/>
-          </a:xfrm>
-          <a:prstGeom prst="rect">
-            <a:avLst/>
-          </a:prstGeom>
-          <a:noFill/>
-        </p:spPr>
-        <p:txBody>
-          <a:bodyPr wrap="square">
-            <a:spAutoFit/>
-          </a:bodyPr>
-          <a:lstStyle/>
-          <a:p>
-            <a:pPr algn="l">
-              <a:lnSpc>
-                <a:spcPct val="150000"/>
-              </a:lnSpc>
-              <a:spcAft>
-                <a:spcPts val="600"/>
-              </a:spcAft>
-            </a:pPr>
-            <a:r>
-              <a:rPr sz="1500" b="0">
-                <a:solidFill>
-                  <a:srgbClr val="5A5A5A"/>
-                </a:solidFill>
-                <a:latin typeface="Calibri"/>
-              </a:rPr>
-              <a:t>Insert confusion_matrices_test.png and multi_horizon_comparison.png.</a:t>
-            </a:r>
-          </a:p>
-        </p:txBody>
-      </p:sp>
-    </p:spTree>
-  </p:cSld>
-  <p:clrMapOvr>
-    <a:masterClrMapping/>
-  </p:clrMapOvr>
-</p:sld>
-</file>
-
-<file path=ppt/slides/slide15.xml><?xml version="1.0" encoding="utf-8"?>
-<p:sld xmlns:a="http://schemas.openxmlformats.org/drawingml/2006/main" xmlns:p="http://schemas.openxmlformats.org/presentationml/2006/main" xmlns:r="http://schemas.openxmlformats.org/officeDocument/2006/relationships">
-  <p:cSld>
-    <p:bg>
-      <p:bgPr>
-        <a:solidFill>
-          <a:srgbClr val="F5F8FC"/>
-        </a:solidFill>
-        <a:effectLst/>
-      </p:bgPr>
-    </p:bg>
-    <p:spTree>
-      <p:nvGrpSpPr>
-        <p:cNvPr id="1" name=""/>
-        <p:cNvGrpSpPr/>
-        <p:nvPr/>
-      </p:nvGrpSpPr>
-      <p:grpSpPr/>
-      <p:sp>
-        <p:nvSpPr>
-          <p:cNvPr id="2" name="Rectangle 1"/>
-          <p:cNvSpPr/>
-          <p:nvPr/>
-        </p:nvSpPr>
-        <p:spPr>
-          <a:xfrm>
-            <a:off x="548640" y="457200"/>
-            <a:ext cx="164592" cy="822960"/>
-          </a:xfrm>
-          <a:prstGeom prst="rect">
-            <a:avLst/>
-          </a:prstGeom>
-          <a:solidFill>
-            <a:srgbClr val="005BAC"/>
-          </a:solidFill>
-          <a:ln>
-            <a:noFill/>
-          </a:ln>
-        </p:spPr>
-        <p:style>
-          <a:lnRef idx="1">
-            <a:schemeClr val="accent1"/>
-          </a:lnRef>
-          <a:fillRef idx="3">
-            <a:schemeClr val="accent1"/>
-          </a:fillRef>
-          <a:effectRef idx="2">
-            <a:schemeClr val="accent1"/>
-          </a:effectRef>
-          <a:fontRef idx="minor">
-            <a:schemeClr val="lt1"/>
-          </a:fontRef>
-        </p:style>
-        <p:txBody>
-          <a:bodyPr rtlCol="0" anchor="ctr"/>
-          <a:lstStyle/>
-          <a:p>
-            <a:pPr algn="ctr"/>
-          </a:p>
-        </p:txBody>
-      </p:sp>
-      <p:sp>
-        <p:nvSpPr>
-          <p:cNvPr id="3" name="TextBox 2"/>
-          <p:cNvSpPr txBox="1"/>
-          <p:nvPr/>
-        </p:nvSpPr>
-        <p:spPr>
-          <a:xfrm>
-            <a:off x="868680" y="411480"/>
-            <a:ext cx="10789920" cy="914400"/>
-          </a:xfrm>
-          <a:prstGeom prst="rect">
-            <a:avLst/>
-          </a:prstGeom>
-          <a:noFill/>
-        </p:spPr>
-        <p:txBody>
-          <a:bodyPr wrap="square">
-            <a:spAutoFit/>
-          </a:bodyPr>
-          <a:lstStyle/>
-          <a:p>
-            <a:pPr algn="l">
-              <a:lnSpc>
-                <a:spcPct val="150000"/>
-              </a:lnSpc>
-              <a:spcAft>
-                <a:spcPts val="600"/>
-              </a:spcAft>
-            </a:pPr>
-            <a:r>
-              <a:rPr sz="3400" b="1">
-                <a:solidFill>
-                  <a:srgbClr val="003366"/>
-                </a:solidFill>
-                <a:latin typeface="Calibri"/>
-              </a:rPr>
-              <a:t>Ablation — every component contributes</a:t>
-            </a:r>
-          </a:p>
-        </p:txBody>
-      </p:sp>
-      <p:graphicFrame>
-        <p:nvGraphicFramePr>
-          <p:cNvPr id="4" name="Table 3"/>
-          <p:cNvGraphicFramePr>
-            <a:graphicFrameLocks noGrp="1"/>
-          </p:cNvGraphicFramePr>
-          <p:nvPr/>
-        </p:nvGraphicFramePr>
-        <p:xfrm>
-          <a:off x="868680" y="1600200"/>
-          <a:ext cx="11887200" cy="1463040"/>
-        </p:xfrm>
-        <a:graphic>
-          <a:graphicData uri="http://schemas.openxmlformats.org/drawingml/2006/table">
-            <a:tbl>
-              <a:tblPr firstRow="1" bandRow="1">
-                <a:tableStyleId>{5C22544A-7EE6-4342-B048-85BDC9FD1C3A}</a:tableStyleId>
-              </a:tblPr>
-              <a:tblGrid>
-                <a:gridCol w="3657600"/>
-                <a:gridCol w="1828800"/>
-                <a:gridCol w="2377440"/>
-                <a:gridCol w="1828800"/>
-                <a:gridCol w="2194560"/>
-              </a:tblGrid>
-              <a:tr h="365760">
-                <a:tc>
-                  <a:txBody>
-                    <a:bodyPr/>
-                    <a:lstStyle/>
-                    <a:p>
-                      <a:pPr algn="ctr"/>
-                      <a:r>
-                        <a:rPr sz="1600" b="1">
-                          <a:solidFill>
-                            <a:srgbClr val="FFFFFF"/>
-                          </a:solidFill>
-                        </a:rPr>
-                        <a:t>Architecture</a:t>
-                      </a:r>
-                    </a:p>
-                  </a:txBody>
-                  <a:tcPr>
-                    <a:solidFill>
-                      <a:srgbClr val="005BAC"/>
-                    </a:solidFill>
-                  </a:tcPr>
-                </a:tc>
-                <a:tc>
-                  <a:txBody>
-                    <a:bodyPr/>
-                    <a:lstStyle/>
-                    <a:p>
-                      <a:pPr algn="ctr"/>
-                      <a:r>
-                        <a:rPr sz="1600" b="1">
-                          <a:solidFill>
-                            <a:srgbClr val="FFFFFF"/>
-                          </a:solidFill>
-                        </a:rPr>
-                        <a:t>Params</a:t>
-                      </a:r>
-                    </a:p>
-                  </a:txBody>
-                  <a:tcPr>
-                    <a:solidFill>
-                      <a:srgbClr val="005BAC"/>
-                    </a:solidFill>
-                  </a:tcPr>
-                </a:tc>
-                <a:tc>
-                  <a:txBody>
-                    <a:bodyPr/>
-                    <a:lstStyle/>
-                    <a:p>
-                      <a:pPr algn="ctr"/>
-                      <a:r>
-                        <a:rPr sz="1600" b="1">
-                          <a:solidFill>
-                            <a:srgbClr val="FFFFFF"/>
-                          </a:solidFill>
-                        </a:rPr>
-                        <a:t>+5s Macro-F1</a:t>
-                      </a:r>
-                    </a:p>
-                  </a:txBody>
-                  <a:tcPr>
-                    <a:solidFill>
-                      <a:srgbClr val="005BAC"/>
-                    </a:solidFill>
-                  </a:tcPr>
-                </a:tc>
-                <a:tc>
-                  <a:txBody>
-                    <a:bodyPr/>
-                    <a:lstStyle/>
-                    <a:p>
-                      <a:pPr algn="ctr"/>
-                      <a:r>
-                        <a:rPr sz="1600" b="1">
-                          <a:solidFill>
-                            <a:srgbClr val="FFFFFF"/>
-                          </a:solidFill>
-                        </a:rPr>
-                        <a:t>+5s MCC</a:t>
-                      </a:r>
-                    </a:p>
-                  </a:txBody>
-                  <a:tcPr>
-                    <a:solidFill>
-                      <a:srgbClr val="005BAC"/>
-                    </a:solidFill>
-                  </a:tcPr>
-                </a:tc>
-                <a:tc>
-                  <a:txBody>
-                    <a:bodyPr/>
-                    <a:lstStyle/>
-                    <a:p>
-                      <a:pPr algn="ctr"/>
-                      <a:r>
-                        <a:rPr sz="1600" b="1">
-                          <a:solidFill>
-                            <a:srgbClr val="FFFFFF"/>
-                          </a:solidFill>
-                        </a:rPr>
-                        <a:t>DEGRADED F1</a:t>
-                      </a:r>
-                    </a:p>
-                  </a:txBody>
-                  <a:tcPr>
-                    <a:solidFill>
-                      <a:srgbClr val="005BAC"/>
-                    </a:solidFill>
-                  </a:tcPr>
-                </a:tc>
-              </a:tr>
-              <a:tr h="365760">
-                <a:tc>
-                  <a:txBody>
-                    <a:bodyPr/>
-                    <a:lstStyle/>
-                    <a:p>
-                      <a:pPr algn="l"/>
-                      <a:r>
-                        <a:rPr sz="1600">
-                          <a:solidFill>
-                            <a:srgbClr val="1A1A1A"/>
-                          </a:solidFill>
-                        </a:rPr>
-                        <a:t>Transformer-only</a:t>
-                      </a:r>
-                    </a:p>
-                  </a:txBody>
-                  <a:tcPr>
-                    <a:solidFill>
-                      <a:srgbClr val="FFFFFF"/>
-                    </a:solidFill>
-                  </a:tcPr>
-                </a:tc>
-                <a:tc>
-                  <a:txBody>
-                    <a:bodyPr/>
-                    <a:lstStyle/>
-                    <a:p>
-                      <a:pPr algn="ctr"/>
-                      <a:r>
-                        <a:rPr sz="1600">
-                          <a:solidFill>
-                            <a:srgbClr val="1A1A1A"/>
-                          </a:solidFill>
-                        </a:rPr>
-                        <a:t>0.43 M</a:t>
-                      </a:r>
-                    </a:p>
-                  </a:txBody>
-                  <a:tcPr>
-                    <a:solidFill>
-                      <a:srgbClr val="FFFFFF"/>
-                    </a:solidFill>
-                  </a:tcPr>
-                </a:tc>
-                <a:tc>
-                  <a:txBody>
-                    <a:bodyPr/>
-                    <a:lstStyle/>
-                    <a:p>
-                      <a:pPr algn="ctr"/>
-                      <a:r>
-                        <a:rPr sz="1600">
-                          <a:solidFill>
-                            <a:srgbClr val="1A1A1A"/>
-                          </a:solidFill>
-                        </a:rPr>
-                        <a:t>0.767</a:t>
-                      </a:r>
-                    </a:p>
-                  </a:txBody>
-                  <a:tcPr>
-                    <a:solidFill>
-                      <a:srgbClr val="FFFFFF"/>
-                    </a:solidFill>
-                  </a:tcPr>
-                </a:tc>
-                <a:tc>
-                  <a:txBody>
-                    <a:bodyPr/>
-                    <a:lstStyle/>
-                    <a:p>
-                      <a:pPr algn="ctr"/>
-                      <a:r>
-                        <a:rPr sz="1600">
-                          <a:solidFill>
-                            <a:srgbClr val="1A1A1A"/>
-                          </a:solidFill>
-                        </a:rPr>
-                        <a:t>0.725</a:t>
-                      </a:r>
-                    </a:p>
-                  </a:txBody>
-                  <a:tcPr>
-                    <a:solidFill>
-                      <a:srgbClr val="FFFFFF"/>
-                    </a:solidFill>
-                  </a:tcPr>
-                </a:tc>
-                <a:tc>
-                  <a:txBody>
-                    <a:bodyPr/>
-                    <a:lstStyle/>
-                    <a:p>
-                      <a:pPr algn="ctr"/>
-                      <a:r>
-                        <a:rPr sz="1600">
-                          <a:solidFill>
-                            <a:srgbClr val="1A1A1A"/>
-                          </a:solidFill>
-                        </a:rPr>
-                        <a:t>0.571</a:t>
-                      </a:r>
-                    </a:p>
-                  </a:txBody>
-                  <a:tcPr>
-                    <a:solidFill>
-                      <a:srgbClr val="FFFFFF"/>
-                    </a:solidFill>
-                  </a:tcPr>
-                </a:tc>
-              </a:tr>
-              <a:tr h="365760">
-                <a:tc>
-                  <a:txBody>
-                    <a:bodyPr/>
-                    <a:lstStyle/>
-                    <a:p>
-                      <a:pPr algn="l"/>
-                      <a:r>
-                        <a:rPr sz="1600">
-                          <a:solidFill>
-                            <a:srgbClr val="1A1A1A"/>
-                          </a:solidFill>
-                        </a:rPr>
-                        <a:t>LSTM-only</a:t>
-                      </a:r>
-                    </a:p>
-                  </a:txBody>
-                  <a:tcPr>
-                    <a:solidFill>
-                      <a:srgbClr val="ECF3FA"/>
-                    </a:solidFill>
-                  </a:tcPr>
-                </a:tc>
-                <a:tc>
-                  <a:txBody>
-                    <a:bodyPr/>
-                    <a:lstStyle/>
-                    <a:p>
-                      <a:pPr algn="ctr"/>
-                      <a:r>
-                        <a:rPr sz="1600">
-                          <a:solidFill>
-                            <a:srgbClr val="1A1A1A"/>
-                          </a:solidFill>
-                        </a:rPr>
-                        <a:t>1.03 M</a:t>
-                      </a:r>
-                    </a:p>
-                  </a:txBody>
-                  <a:tcPr>
-                    <a:solidFill>
-                      <a:srgbClr val="ECF3FA"/>
-                    </a:solidFill>
-                  </a:tcPr>
-                </a:tc>
-                <a:tc>
-                  <a:txBody>
-                    <a:bodyPr/>
-                    <a:lstStyle/>
-                    <a:p>
-                      <a:pPr algn="ctr"/>
-                      <a:r>
-                        <a:rPr sz="1600">
-                          <a:solidFill>
-                            <a:srgbClr val="1A1A1A"/>
-                          </a:solidFill>
-                        </a:rPr>
-                        <a:t>0.767</a:t>
-                      </a:r>
-                    </a:p>
-                  </a:txBody>
-                  <a:tcPr>
-                    <a:solidFill>
-                      <a:srgbClr val="ECF3FA"/>
-                    </a:solidFill>
-                  </a:tcPr>
-                </a:tc>
-                <a:tc>
-                  <a:txBody>
-                    <a:bodyPr/>
-                    <a:lstStyle/>
-                    <a:p>
-                      <a:pPr algn="ctr"/>
-                      <a:r>
-                        <a:rPr sz="1600">
-                          <a:solidFill>
-                            <a:srgbClr val="1A1A1A"/>
-                          </a:solidFill>
-                        </a:rPr>
-                        <a:t>0.702</a:t>
-                      </a:r>
-                    </a:p>
-                  </a:txBody>
-                  <a:tcPr>
-                    <a:solidFill>
-                      <a:srgbClr val="ECF3FA"/>
-                    </a:solidFill>
-                  </a:tcPr>
-                </a:tc>
-                <a:tc>
-                  <a:txBody>
-                    <a:bodyPr/>
-                    <a:lstStyle/>
-                    <a:p>
-                      <a:pPr algn="ctr"/>
-                      <a:r>
-                        <a:rPr sz="1600">
-                          <a:solidFill>
-                            <a:srgbClr val="1A1A1A"/>
-                          </a:solidFill>
-                        </a:rPr>
-                        <a:t>0.645</a:t>
-                      </a:r>
-                    </a:p>
-                  </a:txBody>
-                  <a:tcPr>
-                    <a:solidFill>
-                      <a:srgbClr val="ECF3FA"/>
-                    </a:solidFill>
-                  </a:tcPr>
-                </a:tc>
-              </a:tr>
-              <a:tr h="365760">
-                <a:tc>
-                  <a:txBody>
-                    <a:bodyPr/>
-                    <a:lstStyle/>
-                    <a:p>
-                      <a:pPr algn="l"/>
-                      <a:r>
-                        <a:rPr sz="1600">
-                          <a:solidFill>
-                            <a:srgbClr val="1A1A1A"/>
-                          </a:solidFill>
-                        </a:rPr>
-                        <a:t>Full (Transformer+LSTM)</a:t>
-                      </a:r>
-                    </a:p>
-                  </a:txBody>
-                  <a:tcPr>
-                    <a:solidFill>
-                      <a:srgbClr val="FFFFFF"/>
-                    </a:solidFill>
-                  </a:tcPr>
-                </a:tc>
-                <a:tc>
-                  <a:txBody>
-                    <a:bodyPr/>
-                    <a:lstStyle/>
-                    <a:p>
-                      <a:pPr algn="ctr"/>
-                      <a:r>
-                        <a:rPr sz="1600">
-                          <a:solidFill>
-                            <a:srgbClr val="1A1A1A"/>
-                          </a:solidFill>
-                        </a:rPr>
-                        <a:t>1.46 M</a:t>
-                      </a:r>
-                    </a:p>
-                  </a:txBody>
-                  <a:tcPr>
-                    <a:solidFill>
-                      <a:srgbClr val="FFFFFF"/>
-                    </a:solidFill>
-                  </a:tcPr>
-                </a:tc>
-                <a:tc>
-                  <a:txBody>
-                    <a:bodyPr/>
-                    <a:lstStyle/>
-                    <a:p>
-                      <a:pPr algn="ctr"/>
-                      <a:r>
-                        <a:rPr sz="1600">
-                          <a:solidFill>
-                            <a:srgbClr val="1A1A1A"/>
-                          </a:solidFill>
-                        </a:rPr>
-                        <a:t>0.821</a:t>
-                      </a:r>
-                    </a:p>
-                  </a:txBody>
-                  <a:tcPr>
-                    <a:solidFill>
-                      <a:srgbClr val="FFFFFF"/>
-                    </a:solidFill>
-                  </a:tcPr>
-                </a:tc>
-                <a:tc>
-                  <a:txBody>
-                    <a:bodyPr/>
-                    <a:lstStyle/>
-                    <a:p>
-                      <a:pPr algn="ctr"/>
-                      <a:r>
-                        <a:rPr sz="1600">
-                          <a:solidFill>
-                            <a:srgbClr val="1A1A1A"/>
-                          </a:solidFill>
-                        </a:rPr>
-                        <a:t>0.773</a:t>
-                      </a:r>
-                    </a:p>
-                  </a:txBody>
-                  <a:tcPr>
-                    <a:solidFill>
-                      <a:srgbClr val="FFFFFF"/>
-                    </a:solidFill>
-                  </a:tcPr>
-                </a:tc>
-                <a:tc>
-                  <a:txBody>
-                    <a:bodyPr/>
-                    <a:lstStyle/>
-                    <a:p>
-                      <a:pPr algn="ctr"/>
-                      <a:r>
-                        <a:rPr sz="1600">
-                          <a:solidFill>
-                            <a:srgbClr val="1A1A1A"/>
-                          </a:solidFill>
-                        </a:rPr>
-                        <a:t>0.718</a:t>
-                      </a:r>
-                    </a:p>
-                  </a:txBody>
-                  <a:tcPr>
-                    <a:solidFill>
-                      <a:srgbClr val="FFFFFF"/>
-                    </a:solidFill>
-                  </a:tcPr>
-                </a:tc>
-              </a:tr>
-            </a:tbl>
-          </a:graphicData>
-        </a:graphic>
-      </p:graphicFrame>
-      <p:sp>
-        <p:nvSpPr>
-          <p:cNvPr id="5" name="TextBox 4"/>
-          <p:cNvSpPr txBox="1"/>
-          <p:nvPr/>
-        </p:nvSpPr>
-        <p:spPr>
-          <a:xfrm>
-            <a:off x="868680" y="3227832"/>
-            <a:ext cx="10789920" cy="1097280"/>
-          </a:xfrm>
-          <a:prstGeom prst="rect">
-            <a:avLst/>
-          </a:prstGeom>
-          <a:noFill/>
-        </p:spPr>
-        <p:txBody>
-          <a:bodyPr wrap="square">
-            <a:spAutoFit/>
-          </a:bodyPr>
-          <a:lstStyle/>
-          <a:p>
-            <a:pPr algn="l">
-              <a:lnSpc>
-                <a:spcPct val="150000"/>
-              </a:lnSpc>
-              <a:spcAft>
-                <a:spcPts val="600"/>
-              </a:spcAft>
-            </a:pPr>
-            <a:r>
-              <a:rPr sz="1500" b="0">
-                <a:solidFill>
-                  <a:srgbClr val="5A5A5A"/>
-                </a:solidFill>
-                <a:latin typeface="Calibri"/>
-              </a:rPr>
-              <a:t>Full model wins on Macro-F1 (+5s) and on MCC at every horizon.</a:t>
-            </a:r>
-          </a:p>
-        </p:txBody>
-      </p:sp>
-    </p:spTree>
-  </p:cSld>
-  <p:clrMapOvr>
-    <a:masterClrMapping/>
-  </p:clrMapOvr>
-</p:sld>
-</file>
-
 <file path=ppt/slides/slide16.xml><?xml version="1.0" encoding="utf-8"?>
 <p:sld xmlns:a="http://schemas.openxmlformats.org/drawingml/2006/main" xmlns:p="http://schemas.openxmlformats.org/presentationml/2006/main" xmlns:r="http://schemas.openxmlformats.org/officeDocument/2006/relationships">
   <p:cSld>
@@ -5826,376 +5342,35 @@
                 </a:solidFill>
                 <a:latin typeface="Calibri"/>
               </a:rPr>
-              <a:t>KEY RESULT — cross-city generalisation (Tokyo, never seen)</a:t>
-            </a:r>
-          </a:p>
-        </p:txBody>
-      </p:sp>
-      <p:graphicFrame>
-        <p:nvGraphicFramePr>
-          <p:cNvPr id="4" name="Table 3"/>
-          <p:cNvGraphicFramePr>
-            <a:graphicFrameLocks noGrp="1"/>
-          </p:cNvGraphicFramePr>
+              <a:t>Ablation — component contribution</a:t>
+            </a:r>
+          </a:p>
+        </p:txBody>
+      </p:sp>
+      <p:pic>
+        <p:nvPicPr>
+          <p:cNvPr id="4" name="Picture 3" descr="fig04_ablation.png"/>
+          <p:cNvPicPr>
+            <a:picLocks noChangeAspect="1"/>
+          </p:cNvPicPr>
           <p:nvPr/>
-        </p:nvGraphicFramePr>
-        <p:xfrm>
-          <a:off x="868680" y="1600200"/>
-          <a:ext cx="11887200" cy="1097280"/>
-        </p:xfrm>
-        <a:graphic>
-          <a:graphicData uri="http://schemas.openxmlformats.org/drawingml/2006/table">
-            <a:tbl>
-              <a:tblPr firstRow="1" bandRow="1">
-                <a:tableStyleId>{5C22544A-7EE6-4342-B048-85BDC9FD1C3A}</a:tableStyleId>
-              </a:tblPr>
-              <a:tblGrid>
-                <a:gridCol w="3108960"/>
-                <a:gridCol w="2011680"/>
-                <a:gridCol w="2011680"/>
-                <a:gridCol w="1645920"/>
-                <a:gridCol w="3108960"/>
-              </a:tblGrid>
-              <a:tr h="365760">
-                <a:tc>
-                  <a:txBody>
-                    <a:bodyPr/>
-                    <a:lstStyle/>
-                    <a:p>
-                      <a:pPr algn="ctr"/>
-                      <a:r>
-                        <a:rPr sz="1600" b="1">
-                          <a:solidFill>
-                            <a:srgbClr val="FFFFFF"/>
-                          </a:solidFill>
-                        </a:rPr>
-                        <a:t>Model</a:t>
-                      </a:r>
-                    </a:p>
-                  </a:txBody>
-                  <a:tcPr>
-                    <a:solidFill>
-                      <a:srgbClr val="005BAC"/>
-                    </a:solidFill>
-                  </a:tcPr>
-                </a:tc>
-                <a:tc>
-                  <a:txBody>
-                    <a:bodyPr/>
-                    <a:lstStyle/>
-                    <a:p>
-                      <a:pPr algn="ctr"/>
-                      <a:r>
-                        <a:rPr sz="1600" b="1">
-                          <a:solidFill>
-                            <a:srgbClr val="FFFFFF"/>
-                          </a:solidFill>
-                        </a:rPr>
-                        <a:t>Beijing</a:t>
-                      </a:r>
-                    </a:p>
-                  </a:txBody>
-                  <a:tcPr>
-                    <a:solidFill>
-                      <a:srgbClr val="005BAC"/>
-                    </a:solidFill>
-                  </a:tcPr>
-                </a:tc>
-                <a:tc>
-                  <a:txBody>
-                    <a:bodyPr/>
-                    <a:lstStyle/>
-                    <a:p>
-                      <a:pPr algn="ctr"/>
-                      <a:r>
-                        <a:rPr sz="1600" b="1">
-                          <a:solidFill>
-                            <a:srgbClr val="FFFFFF"/>
-                          </a:solidFill>
-                        </a:rPr>
-                        <a:t>Tokyo</a:t>
-                      </a:r>
-                    </a:p>
-                  </a:txBody>
-                  <a:tcPr>
-                    <a:solidFill>
-                      <a:srgbClr val="005BAC"/>
-                    </a:solidFill>
-                  </a:tcPr>
-                </a:tc>
-                <a:tc>
-                  <a:txBody>
-                    <a:bodyPr/>
-                    <a:lstStyle/>
-                    <a:p>
-                      <a:pPr algn="ctr"/>
-                      <a:r>
-                        <a:rPr sz="1600" b="1">
-                          <a:solidFill>
-                            <a:srgbClr val="FFFFFF"/>
-                          </a:solidFill>
-                        </a:rPr>
-                        <a:t>Gap</a:t>
-                      </a:r>
-                    </a:p>
-                  </a:txBody>
-                  <a:tcPr>
-                    <a:solidFill>
-                      <a:srgbClr val="005BAC"/>
-                    </a:solidFill>
-                  </a:tcPr>
-                </a:tc>
-                <a:tc>
-                  <a:txBody>
-                    <a:bodyPr/>
-                    <a:lstStyle/>
-                    <a:p>
-                      <a:pPr algn="ctr"/>
-                      <a:r>
-                        <a:rPr sz="1600" b="1">
-                          <a:solidFill>
-                            <a:srgbClr val="FFFFFF"/>
-                          </a:solidFill>
-                        </a:rPr>
-                        <a:t>Tokyo DEGRADED F1</a:t>
-                      </a:r>
-                    </a:p>
-                  </a:txBody>
-                  <a:tcPr>
-                    <a:solidFill>
-                      <a:srgbClr val="005BAC"/>
-                    </a:solidFill>
-                  </a:tcPr>
-                </a:tc>
-              </a:tr>
-              <a:tr h="365760">
-                <a:tc>
-                  <a:txBody>
-                    <a:bodyPr/>
-                    <a:lstStyle/>
-                    <a:p>
-                      <a:pPr algn="l"/>
-                      <a:r>
-                        <a:rPr sz="1600">
-                          <a:solidFill>
-                            <a:srgbClr val="1A1A1A"/>
-                          </a:solidFill>
-                        </a:rPr>
-                        <a:t>SENTINEL-GNSS</a:t>
-                      </a:r>
-                    </a:p>
-                  </a:txBody>
-                  <a:tcPr>
-                    <a:solidFill>
-                      <a:srgbClr val="FFFFFF"/>
-                    </a:solidFill>
-                  </a:tcPr>
-                </a:tc>
-                <a:tc>
-                  <a:txBody>
-                    <a:bodyPr/>
-                    <a:lstStyle/>
-                    <a:p>
-                      <a:pPr algn="ctr"/>
-                      <a:r>
-                        <a:rPr sz="1600">
-                          <a:solidFill>
-                            <a:srgbClr val="1A1A1A"/>
-                          </a:solidFill>
-                        </a:rPr>
-                        <a:t>0.822</a:t>
-                      </a:r>
-                    </a:p>
-                  </a:txBody>
-                  <a:tcPr>
-                    <a:solidFill>
-                      <a:srgbClr val="FFFFFF"/>
-                    </a:solidFill>
-                  </a:tcPr>
-                </a:tc>
-                <a:tc>
-                  <a:txBody>
-                    <a:bodyPr/>
-                    <a:lstStyle/>
-                    <a:p>
-                      <a:pPr algn="ctr"/>
-                      <a:r>
-                        <a:rPr sz="1600">
-                          <a:solidFill>
-                            <a:srgbClr val="1A1A1A"/>
-                          </a:solidFill>
-                        </a:rPr>
-                        <a:t>0.649</a:t>
-                      </a:r>
-                    </a:p>
-                  </a:txBody>
-                  <a:tcPr>
-                    <a:solidFill>
-                      <a:srgbClr val="FFFFFF"/>
-                    </a:solidFill>
-                  </a:tcPr>
-                </a:tc>
-                <a:tc>
-                  <a:txBody>
-                    <a:bodyPr/>
-                    <a:lstStyle/>
-                    <a:p>
-                      <a:pPr algn="ctr"/>
-                      <a:r>
-                        <a:rPr sz="1600">
-                          <a:solidFill>
-                            <a:srgbClr val="1A1A1A"/>
-                          </a:solidFill>
-                        </a:rPr>
-                        <a:t>-0.173</a:t>
-                      </a:r>
-                    </a:p>
-                  </a:txBody>
-                  <a:tcPr>
-                    <a:solidFill>
-                      <a:srgbClr val="FFFFFF"/>
-                    </a:solidFill>
-                  </a:tcPr>
-                </a:tc>
-                <a:tc>
-                  <a:txBody>
-                    <a:bodyPr/>
-                    <a:lstStyle/>
-                    <a:p>
-                      <a:pPr algn="ctr"/>
-                      <a:r>
-                        <a:rPr sz="1600">
-                          <a:solidFill>
-                            <a:srgbClr val="1A1A1A"/>
-                          </a:solidFill>
-                        </a:rPr>
-                        <a:t>0.753</a:t>
-                      </a:r>
-                    </a:p>
-                  </a:txBody>
-                  <a:tcPr>
-                    <a:solidFill>
-                      <a:srgbClr val="FFFFFF"/>
-                    </a:solidFill>
-                  </a:tcPr>
-                </a:tc>
-              </a:tr>
-              <a:tr h="365760">
-                <a:tc>
-                  <a:txBody>
-                    <a:bodyPr/>
-                    <a:lstStyle/>
-                    <a:p>
-                      <a:pPr algn="l"/>
-                      <a:r>
-                        <a:rPr sz="1600">
-                          <a:solidFill>
-                            <a:srgbClr val="1A1A1A"/>
-                          </a:solidFill>
-                        </a:rPr>
-                        <a:t>RandomForest</a:t>
-                      </a:r>
-                    </a:p>
-                  </a:txBody>
-                  <a:tcPr>
-                    <a:solidFill>
-                      <a:srgbClr val="ECF3FA"/>
-                    </a:solidFill>
-                  </a:tcPr>
-                </a:tc>
-                <a:tc>
-                  <a:txBody>
-                    <a:bodyPr/>
-                    <a:lstStyle/>
-                    <a:p>
-                      <a:pPr algn="ctr"/>
-                      <a:r>
-                        <a:rPr sz="1600">
-                          <a:solidFill>
-                            <a:srgbClr val="1A1A1A"/>
-                          </a:solidFill>
-                        </a:rPr>
-                        <a:t>0.926</a:t>
-                      </a:r>
-                    </a:p>
-                  </a:txBody>
-                  <a:tcPr>
-                    <a:solidFill>
-                      <a:srgbClr val="ECF3FA"/>
-                    </a:solidFill>
-                  </a:tcPr>
-                </a:tc>
-                <a:tc>
-                  <a:txBody>
-                    <a:bodyPr/>
-                    <a:lstStyle/>
-                    <a:p>
-                      <a:pPr algn="ctr"/>
-                      <a:r>
-                        <a:rPr sz="1600">
-                          <a:solidFill>
-                            <a:srgbClr val="1A1A1A"/>
-                          </a:solidFill>
-                        </a:rPr>
-                        <a:t>0.618</a:t>
-                      </a:r>
-                    </a:p>
-                  </a:txBody>
-                  <a:tcPr>
-                    <a:solidFill>
-                      <a:srgbClr val="ECF3FA"/>
-                    </a:solidFill>
-                  </a:tcPr>
-                </a:tc>
-                <a:tc>
-                  <a:txBody>
-                    <a:bodyPr/>
-                    <a:lstStyle/>
-                    <a:p>
-                      <a:pPr algn="ctr"/>
-                      <a:r>
-                        <a:rPr sz="1600">
-                          <a:solidFill>
-                            <a:srgbClr val="1A1A1A"/>
-                          </a:solidFill>
-                        </a:rPr>
-                        <a:t>-0.308</a:t>
-                      </a:r>
-                    </a:p>
-                  </a:txBody>
-                  <a:tcPr>
-                    <a:solidFill>
-                      <a:srgbClr val="ECF3FA"/>
-                    </a:solidFill>
-                  </a:tcPr>
-                </a:tc>
-                <a:tc>
-                  <a:txBody>
-                    <a:bodyPr/>
-                    <a:lstStyle/>
-                    <a:p>
-                      <a:pPr algn="ctr"/>
-                      <a:r>
-                        <a:rPr sz="1600">
-                          <a:solidFill>
-                            <a:srgbClr val="1A1A1A"/>
-                          </a:solidFill>
-                        </a:rPr>
-                        <a:t>0.148</a:t>
-                      </a:r>
-                    </a:p>
-                  </a:txBody>
-                  <a:tcPr>
-                    <a:solidFill>
-                      <a:srgbClr val="ECF3FA"/>
-                    </a:solidFill>
-                  </a:tcPr>
-                </a:tc>
-              </a:tr>
-            </a:tbl>
-          </a:graphicData>
-        </a:graphic>
-      </p:graphicFrame>
+        </p:nvPicPr>
+        <p:blipFill>
+          <a:blip r:embed="rId2"/>
+          <a:stretch>
+            <a:fillRect/>
+          </a:stretch>
+        </p:blipFill>
+        <p:spPr>
+          <a:xfrm>
+            <a:off x="2011680" y="1645920"/>
+            <a:ext cx="6558327" cy="4206240"/>
+          </a:xfrm>
+          <a:prstGeom prst="rect">
+            <a:avLst/>
+          </a:prstGeom>
+        </p:spPr>
+      </p:pic>
       <p:sp>
         <p:nvSpPr>
           <p:cNvPr id="5" name="TextBox 4"/>
@@ -6204,8 +5379,8 @@
         </p:nvSpPr>
         <p:spPr>
           <a:xfrm>
-            <a:off x="868680" y="2843784"/>
-            <a:ext cx="10789920" cy="1097280"/>
+            <a:off x="868680" y="5943600"/>
+            <a:ext cx="10789920" cy="731520"/>
           </a:xfrm>
           <a:prstGeom prst="rect">
             <a:avLst/>
@@ -6233,7 +5408,7 @@
                 </a:solidFill>
                 <a:latin typeface="Calibri"/>
               </a:rPr>
-              <a:t>In-domain trees win; out-of-domain the network keeps DEGRADED (0.75) while the tree collapses (0.15). Trees memorise; the network learns a transferable representation.</a:t>
+              <a:t>Full vs LSTM-only vs Transformer-only; full model wins on all metrics.</a:t>
             </a:r>
           </a:p>
         </p:txBody>
@@ -6344,21 +5519,499 @@
                 </a:solidFill>
                 <a:latin typeface="Calibri"/>
               </a:rPr>
-              <a:t>Efficiency &amp; calibration</a:t>
-            </a:r>
-          </a:p>
-        </p:txBody>
-      </p:sp>
-      <p:sp>
-        <p:nvSpPr>
-          <p:cNvPr id="4" name="TextBox 3"/>
+              <a:t>KEY RESULT — cross-city generalisation (Tokyo, never seen)</a:t>
+            </a:r>
+          </a:p>
+        </p:txBody>
+      </p:sp>
+      <p:graphicFrame>
+        <p:nvGraphicFramePr>
+          <p:cNvPr id="4" name="Table 3"/>
+          <p:cNvGraphicFramePr>
+            <a:graphicFrameLocks noGrp="1"/>
+          </p:cNvGraphicFramePr>
+          <p:nvPr/>
+        </p:nvGraphicFramePr>
+        <p:xfrm>
+          <a:off x="868680" y="1600200"/>
+          <a:ext cx="10789920" cy="1828800"/>
+        </p:xfrm>
+        <a:graphic>
+          <a:graphicData uri="http://schemas.openxmlformats.org/drawingml/2006/table">
+            <a:tbl>
+              <a:tblPr firstRow="1" bandRow="1">
+                <a:tableStyleId>{5C22544A-7EE6-4342-B048-85BDC9FD1C3A}</a:tableStyleId>
+              </a:tblPr>
+              <a:tblGrid>
+                <a:gridCol w="4206240"/>
+                <a:gridCol w="2377440"/>
+                <a:gridCol w="1828800"/>
+                <a:gridCol w="2377440"/>
+              </a:tblGrid>
+              <a:tr h="365760">
+                <a:tc>
+                  <a:txBody>
+                    <a:bodyPr/>
+                    <a:lstStyle/>
+                    <a:p>
+                      <a:pPr algn="ctr"/>
+                      <a:r>
+                        <a:rPr sz="1500" b="1">
+                          <a:solidFill>
+                            <a:srgbClr val="FFFFFF"/>
+                          </a:solidFill>
+                        </a:rPr>
+                        <a:t>Model</a:t>
+                      </a:r>
+                    </a:p>
+                  </a:txBody>
+                  <a:tcPr>
+                    <a:solidFill>
+                      <a:srgbClr val="005BAC"/>
+                    </a:solidFill>
+                  </a:tcPr>
+                </a:tc>
+                <a:tc>
+                  <a:txBody>
+                    <a:bodyPr/>
+                    <a:lstStyle/>
+                    <a:p>
+                      <a:pPr algn="ctr"/>
+                      <a:r>
+                        <a:rPr sz="1500" b="1">
+                          <a:solidFill>
+                            <a:srgbClr val="FFFFFF"/>
+                          </a:solidFill>
+                        </a:rPr>
+                        <a:t>Beihang/Beijing</a:t>
+                      </a:r>
+                    </a:p>
+                  </a:txBody>
+                  <a:tcPr>
+                    <a:solidFill>
+                      <a:srgbClr val="005BAC"/>
+                    </a:solidFill>
+                  </a:tcPr>
+                </a:tc>
+                <a:tc>
+                  <a:txBody>
+                    <a:bodyPr/>
+                    <a:lstStyle/>
+                    <a:p>
+                      <a:pPr algn="ctr"/>
+                      <a:r>
+                        <a:rPr sz="1500" b="1">
+                          <a:solidFill>
+                            <a:srgbClr val="FFFFFF"/>
+                          </a:solidFill>
+                        </a:rPr>
+                        <a:t>Tokyo</a:t>
+                      </a:r>
+                    </a:p>
+                  </a:txBody>
+                  <a:tcPr>
+                    <a:solidFill>
+                      <a:srgbClr val="005BAC"/>
+                    </a:solidFill>
+                  </a:tcPr>
+                </a:tc>
+                <a:tc>
+                  <a:txBody>
+                    <a:bodyPr/>
+                    <a:lstStyle/>
+                    <a:p>
+                      <a:pPr algn="ctr"/>
+                      <a:r>
+                        <a:rPr sz="1500" b="1">
+                          <a:solidFill>
+                            <a:srgbClr val="FFFFFF"/>
+                          </a:solidFill>
+                        </a:rPr>
+                        <a:t>Tokyo DEGRADED F1</a:t>
+                      </a:r>
+                    </a:p>
+                  </a:txBody>
+                  <a:tcPr>
+                    <a:solidFill>
+                      <a:srgbClr val="005BAC"/>
+                    </a:solidFill>
+                  </a:tcPr>
+                </a:tc>
+              </a:tr>
+              <a:tr h="365760">
+                <a:tc>
+                  <a:txBody>
+                    <a:bodyPr/>
+                    <a:lstStyle/>
+                    <a:p>
+                      <a:pPr algn="l"/>
+                      <a:r>
+                        <a:rPr sz="1500">
+                          <a:solidFill>
+                            <a:srgbClr val="1A1A1A"/>
+                          </a:solidFill>
+                        </a:rPr>
+                        <a:t>DL + XGBoost ENSEMBLE</a:t>
+                      </a:r>
+                    </a:p>
+                  </a:txBody>
+                  <a:tcPr>
+                    <a:solidFill>
+                      <a:srgbClr val="FFFFFF"/>
+                    </a:solidFill>
+                  </a:tcPr>
+                </a:tc>
+                <a:tc>
+                  <a:txBody>
+                    <a:bodyPr/>
+                    <a:lstStyle/>
+                    <a:p>
+                      <a:pPr algn="ctr"/>
+                      <a:r>
+                        <a:rPr sz="1500">
+                          <a:solidFill>
+                            <a:srgbClr val="1A1A1A"/>
+                          </a:solidFill>
+                        </a:rPr>
+                        <a:t>0.911</a:t>
+                      </a:r>
+                    </a:p>
+                  </a:txBody>
+                  <a:tcPr>
+                    <a:solidFill>
+                      <a:srgbClr val="FFFFFF"/>
+                    </a:solidFill>
+                  </a:tcPr>
+                </a:tc>
+                <a:tc>
+                  <a:txBody>
+                    <a:bodyPr/>
+                    <a:lstStyle/>
+                    <a:p>
+                      <a:pPr algn="ctr"/>
+                      <a:r>
+                        <a:rPr sz="1500">
+                          <a:solidFill>
+                            <a:srgbClr val="1A1A1A"/>
+                          </a:solidFill>
+                        </a:rPr>
+                        <a:t>0.892</a:t>
+                      </a:r>
+                    </a:p>
+                  </a:txBody>
+                  <a:tcPr>
+                    <a:solidFill>
+                      <a:srgbClr val="FFFFFF"/>
+                    </a:solidFill>
+                  </a:tcPr>
+                </a:tc>
+                <a:tc>
+                  <a:txBody>
+                    <a:bodyPr/>
+                    <a:lstStyle/>
+                    <a:p>
+                      <a:pPr algn="ctr"/>
+                      <a:r>
+                        <a:rPr sz="1500">
+                          <a:solidFill>
+                            <a:srgbClr val="1A1A1A"/>
+                          </a:solidFill>
+                        </a:rPr>
+                        <a:t>0.896</a:t>
+                      </a:r>
+                    </a:p>
+                  </a:txBody>
+                  <a:tcPr>
+                    <a:solidFill>
+                      <a:srgbClr val="FFFFFF"/>
+                    </a:solidFill>
+                  </a:tcPr>
+                </a:tc>
+              </a:tr>
+              <a:tr h="365760">
+                <a:tc>
+                  <a:txBody>
+                    <a:bodyPr/>
+                    <a:lstStyle/>
+                    <a:p>
+                      <a:pPr algn="l"/>
+                      <a:r>
+                        <a:rPr sz="1500">
+                          <a:solidFill>
+                            <a:srgbClr val="1A1A1A"/>
+                          </a:solidFill>
+                        </a:rPr>
+                        <a:t>SENTINEL-GNSS (DL)</a:t>
+                      </a:r>
+                    </a:p>
+                  </a:txBody>
+                  <a:tcPr>
+                    <a:solidFill>
+                      <a:srgbClr val="ECF3FA"/>
+                    </a:solidFill>
+                  </a:tcPr>
+                </a:tc>
+                <a:tc>
+                  <a:txBody>
+                    <a:bodyPr/>
+                    <a:lstStyle/>
+                    <a:p>
+                      <a:pPr algn="ctr"/>
+                      <a:r>
+                        <a:rPr sz="1500">
+                          <a:solidFill>
+                            <a:srgbClr val="1A1A1A"/>
+                          </a:solidFill>
+                        </a:rPr>
+                        <a:t>0.822</a:t>
+                      </a:r>
+                    </a:p>
+                  </a:txBody>
+                  <a:tcPr>
+                    <a:solidFill>
+                      <a:srgbClr val="ECF3FA"/>
+                    </a:solidFill>
+                  </a:tcPr>
+                </a:tc>
+                <a:tc>
+                  <a:txBody>
+                    <a:bodyPr/>
+                    <a:lstStyle/>
+                    <a:p>
+                      <a:pPr algn="ctr"/>
+                      <a:r>
+                        <a:rPr sz="1500">
+                          <a:solidFill>
+                            <a:srgbClr val="1A1A1A"/>
+                          </a:solidFill>
+                        </a:rPr>
+                        <a:t>0.649</a:t>
+                      </a:r>
+                    </a:p>
+                  </a:txBody>
+                  <a:tcPr>
+                    <a:solidFill>
+                      <a:srgbClr val="ECF3FA"/>
+                    </a:solidFill>
+                  </a:tcPr>
+                </a:tc>
+                <a:tc>
+                  <a:txBody>
+                    <a:bodyPr/>
+                    <a:lstStyle/>
+                    <a:p>
+                      <a:pPr algn="ctr"/>
+                      <a:r>
+                        <a:rPr sz="1500">
+                          <a:solidFill>
+                            <a:srgbClr val="1A1A1A"/>
+                          </a:solidFill>
+                        </a:rPr>
+                        <a:t>0.753</a:t>
+                      </a:r>
+                    </a:p>
+                  </a:txBody>
+                  <a:tcPr>
+                    <a:solidFill>
+                      <a:srgbClr val="ECF3FA"/>
+                    </a:solidFill>
+                  </a:tcPr>
+                </a:tc>
+              </a:tr>
+              <a:tr h="365760">
+                <a:tc>
+                  <a:txBody>
+                    <a:bodyPr/>
+                    <a:lstStyle/>
+                    <a:p>
+                      <a:pPr algn="l"/>
+                      <a:r>
+                        <a:rPr sz="1500">
+                          <a:solidFill>
+                            <a:srgbClr val="1A1A1A"/>
+                          </a:solidFill>
+                        </a:rPr>
+                        <a:t>XGBoost</a:t>
+                      </a:r>
+                    </a:p>
+                  </a:txBody>
+                  <a:tcPr>
+                    <a:solidFill>
+                      <a:srgbClr val="FFFFFF"/>
+                    </a:solidFill>
+                  </a:tcPr>
+                </a:tc>
+                <a:tc>
+                  <a:txBody>
+                    <a:bodyPr/>
+                    <a:lstStyle/>
+                    <a:p>
+                      <a:pPr algn="ctr"/>
+                      <a:r>
+                        <a:rPr sz="1500">
+                          <a:solidFill>
+                            <a:srgbClr val="1A1A1A"/>
+                          </a:solidFill>
+                        </a:rPr>
+                        <a:t>0.919</a:t>
+                      </a:r>
+                    </a:p>
+                  </a:txBody>
+                  <a:tcPr>
+                    <a:solidFill>
+                      <a:srgbClr val="FFFFFF"/>
+                    </a:solidFill>
+                  </a:tcPr>
+                </a:tc>
+                <a:tc>
+                  <a:txBody>
+                    <a:bodyPr/>
+                    <a:lstStyle/>
+                    <a:p>
+                      <a:pPr algn="ctr"/>
+                      <a:r>
+                        <a:rPr sz="1500">
+                          <a:solidFill>
+                            <a:srgbClr val="1A1A1A"/>
+                          </a:solidFill>
+                        </a:rPr>
+                        <a:t>0.821</a:t>
+                      </a:r>
+                    </a:p>
+                  </a:txBody>
+                  <a:tcPr>
+                    <a:solidFill>
+                      <a:srgbClr val="FFFFFF"/>
+                    </a:solidFill>
+                  </a:tcPr>
+                </a:tc>
+                <a:tc>
+                  <a:txBody>
+                    <a:bodyPr/>
+                    <a:lstStyle/>
+                    <a:p>
+                      <a:pPr algn="ctr"/>
+                      <a:r>
+                        <a:rPr sz="1500">
+                          <a:solidFill>
+                            <a:srgbClr val="1A1A1A"/>
+                          </a:solidFill>
+                        </a:rPr>
+                        <a:t>0.784</a:t>
+                      </a:r>
+                    </a:p>
+                  </a:txBody>
+                  <a:tcPr>
+                    <a:solidFill>
+                      <a:srgbClr val="FFFFFF"/>
+                    </a:solidFill>
+                  </a:tcPr>
+                </a:tc>
+              </a:tr>
+              <a:tr h="365760">
+                <a:tc>
+                  <a:txBody>
+                    <a:bodyPr/>
+                    <a:lstStyle/>
+                    <a:p>
+                      <a:pPr algn="l"/>
+                      <a:r>
+                        <a:rPr sz="1500">
+                          <a:solidFill>
+                            <a:srgbClr val="1A1A1A"/>
+                          </a:solidFill>
+                        </a:rPr>
+                        <a:t>RandomForest</a:t>
+                      </a:r>
+                    </a:p>
+                  </a:txBody>
+                  <a:tcPr>
+                    <a:solidFill>
+                      <a:srgbClr val="ECF3FA"/>
+                    </a:solidFill>
+                  </a:tcPr>
+                </a:tc>
+                <a:tc>
+                  <a:txBody>
+                    <a:bodyPr/>
+                    <a:lstStyle/>
+                    <a:p>
+                      <a:pPr algn="ctr"/>
+                      <a:r>
+                        <a:rPr sz="1500">
+                          <a:solidFill>
+                            <a:srgbClr val="1A1A1A"/>
+                          </a:solidFill>
+                        </a:rPr>
+                        <a:t>0.926</a:t>
+                      </a:r>
+                    </a:p>
+                  </a:txBody>
+                  <a:tcPr>
+                    <a:solidFill>
+                      <a:srgbClr val="ECF3FA"/>
+                    </a:solidFill>
+                  </a:tcPr>
+                </a:tc>
+                <a:tc>
+                  <a:txBody>
+                    <a:bodyPr/>
+                    <a:lstStyle/>
+                    <a:p>
+                      <a:pPr algn="ctr"/>
+                      <a:r>
+                        <a:rPr sz="1500">
+                          <a:solidFill>
+                            <a:srgbClr val="1A1A1A"/>
+                          </a:solidFill>
+                        </a:rPr>
+                        <a:t>0.618</a:t>
+                      </a:r>
+                    </a:p>
+                  </a:txBody>
+                  <a:tcPr>
+                    <a:solidFill>
+                      <a:srgbClr val="ECF3FA"/>
+                    </a:solidFill>
+                  </a:tcPr>
+                </a:tc>
+                <a:tc>
+                  <a:txBody>
+                    <a:bodyPr/>
+                    <a:lstStyle/>
+                    <a:p>
+                      <a:pPr algn="ctr"/>
+                      <a:r>
+                        <a:rPr sz="1500">
+                          <a:solidFill>
+                            <a:srgbClr val="1A1A1A"/>
+                          </a:solidFill>
+                        </a:rPr>
+                        <a:t>0.148</a:t>
+                      </a:r>
+                    </a:p>
+                  </a:txBody>
+                  <a:tcPr>
+                    <a:solidFill>
+                      <a:srgbClr val="ECF3FA"/>
+                    </a:solidFill>
+                  </a:tcPr>
+                </a:tc>
+              </a:tr>
+            </a:tbl>
+          </a:graphicData>
+        </a:graphic>
+      </p:graphicFrame>
+      <p:sp>
+        <p:nvSpPr>
+          <p:cNvPr id="5" name="TextBox 4"/>
           <p:cNvSpPr txBox="1"/>
           <p:nvPr/>
         </p:nvSpPr>
         <p:spPr>
           <a:xfrm>
-            <a:off x="868680" y="1554480"/>
-            <a:ext cx="10607040" cy="4937760"/>
+            <a:off x="868680" y="3611880"/>
+            <a:ext cx="10789920" cy="1097280"/>
           </a:xfrm>
           <a:prstGeom prst="rect">
             <a:avLst/>
@@ -6376,55 +6029,17 @@
                 <a:spcPct val="150000"/>
               </a:lnSpc>
               <a:spcAft>
-                <a:spcPts val="1000"/>
+                <a:spcPts val="600"/>
               </a:spcAft>
             </a:pPr>
             <a:r>
-              <a:rPr sz="2000" b="0">
-                <a:solidFill>
-                  <a:srgbClr val="005BAC"/>
+              <a:rPr sz="1500" b="0">
+                <a:solidFill>
+                  <a:srgbClr val="5A5A5A"/>
                 </a:solidFill>
                 <a:latin typeface="Calibri"/>
               </a:rPr>
-              <a:t>•  Inference: 0.039 ms/sample on GPU — 10.5× faster than three separate tree models.</a:t>
-            </a:r>
-          </a:p>
-          <a:p>
-            <a:pPr algn="l">
-              <a:lnSpc>
-                <a:spcPct val="150000"/>
-              </a:lnSpc>
-              <a:spcAft>
-                <a:spcPts val="1000"/>
-              </a:spcAft>
-            </a:pPr>
-            <a:r>
-              <a:rPr sz="2000" b="0">
-                <a:solidFill>
-                  <a:srgbClr val="1A1A1A"/>
-                </a:solidFill>
-                <a:latin typeface="Calibri"/>
-              </a:rPr>
-              <a:t>•  One 17.8 MB checkpoint serves all three horizons; real-time at 10 Hz.</a:t>
-            </a:r>
-          </a:p>
-          <a:p>
-            <a:pPr algn="l">
-              <a:lnSpc>
-                <a:spcPct val="150000"/>
-              </a:lnSpc>
-              <a:spcAft>
-                <a:spcPts val="1000"/>
-              </a:spcAft>
-            </a:pPr>
-            <a:r>
-              <a:rPr sz="2000" b="0">
-                <a:solidFill>
-                  <a:srgbClr val="1A1A1A"/>
-                </a:solidFill>
-                <a:latin typeface="Calibri"/>
-              </a:rPr>
-              <a:t>•  Calibration: temperature scaling applied (Guo et al., 2017); ECE re-measured with the corrected temperature before any 'well-calibrated' claim.</a:t>
+              <a:t>In-domain trees win. Cross-city, a DL+XGBoost ENSEMBLE beats every single model (DEGRADED 0.90); RandomForest collapses (0.15) but XGBoost transfers. Ensemble = the deployment choice feeding the EKF.</a:t>
             </a:r>
           </a:p>
         </p:txBody>
@@ -6443,7 +6058,7 @@
     <p:bg>
       <p:bgPr>
         <a:solidFill>
-          <a:srgbClr val="003366"/>
+          <a:srgbClr val="F5F8FC"/>
         </a:solidFill>
         <a:effectLst/>
       </p:bgPr>
@@ -6457,62 +6072,20 @@
       <p:grpSpPr/>
       <p:sp>
         <p:nvSpPr>
-          <p:cNvPr id="2" name="TextBox 1"/>
-          <p:cNvSpPr txBox="1"/>
-          <p:nvPr/>
-        </p:nvSpPr>
-        <p:spPr>
-          <a:xfrm>
-            <a:off x="822960" y="2743200"/>
-            <a:ext cx="10515600" cy="1371600"/>
-          </a:xfrm>
-          <a:prstGeom prst="rect">
-            <a:avLst/>
-          </a:prstGeom>
-          <a:noFill/>
-        </p:spPr>
-        <p:txBody>
-          <a:bodyPr wrap="square">
-            <a:spAutoFit/>
-          </a:bodyPr>
-          <a:lstStyle/>
-          <a:p>
-            <a:pPr algn="l">
-              <a:lnSpc>
-                <a:spcPct val="150000"/>
-              </a:lnSpc>
-              <a:spcAft>
-                <a:spcPts val="600"/>
-              </a:spcAft>
-            </a:pPr>
-            <a:r>
-              <a:rPr sz="4600" b="1">
-                <a:solidFill>
-                  <a:srgbClr val="FFFFFF"/>
-                </a:solidFill>
-                <a:latin typeface="Calibri"/>
-              </a:rPr>
-              <a:t>5 · Novelty &amp; Validation</a:t>
-            </a:r>
-          </a:p>
-        </p:txBody>
-      </p:sp>
-      <p:sp>
-        <p:nvSpPr>
-          <p:cNvPr id="3" name="Rectangle 2"/>
+          <p:cNvPr id="2" name="Rectangle 1"/>
           <p:cNvSpPr/>
           <p:nvPr/>
         </p:nvSpPr>
         <p:spPr>
           <a:xfrm>
-            <a:off x="868680" y="3886200"/>
-            <a:ext cx="2926080" cy="73152"/>
+            <a:off x="548640" y="457200"/>
+            <a:ext cx="164592" cy="822960"/>
           </a:xfrm>
           <a:prstGeom prst="rect">
             <a:avLst/>
           </a:prstGeom>
           <a:solidFill>
-            <a:srgbClr val="00A0E9"/>
+            <a:srgbClr val="005BAC"/>
           </a:solidFill>
           <a:ln>
             <a:noFill/>
@@ -6537,6 +6110,166 @@
           <a:lstStyle/>
           <a:p>
             <a:pPr algn="ctr"/>
+          </a:p>
+        </p:txBody>
+      </p:sp>
+      <p:sp>
+        <p:nvSpPr>
+          <p:cNvPr id="3" name="TextBox 2"/>
+          <p:cNvSpPr txBox="1"/>
+          <p:nvPr/>
+        </p:nvSpPr>
+        <p:spPr>
+          <a:xfrm>
+            <a:off x="868680" y="411480"/>
+            <a:ext cx="10789920" cy="914400"/>
+          </a:xfrm>
+          <a:prstGeom prst="rect">
+            <a:avLst/>
+          </a:prstGeom>
+          <a:noFill/>
+        </p:spPr>
+        <p:txBody>
+          <a:bodyPr wrap="square">
+            <a:spAutoFit/>
+          </a:bodyPr>
+          <a:lstStyle/>
+          <a:p>
+            <a:pPr algn="l">
+              <a:lnSpc>
+                <a:spcPct val="150000"/>
+              </a:lnSpc>
+              <a:spcAft>
+                <a:spcPts val="600"/>
+              </a:spcAft>
+            </a:pPr>
+            <a:r>
+              <a:rPr sz="3400" b="1">
+                <a:solidFill>
+                  <a:srgbClr val="003366"/>
+                </a:solidFill>
+                <a:latin typeface="Calibri"/>
+              </a:rPr>
+              <a:t>Efficiency, ensemble &amp; calibration</a:t>
+            </a:r>
+          </a:p>
+        </p:txBody>
+      </p:sp>
+      <p:sp>
+        <p:nvSpPr>
+          <p:cNvPr id="4" name="TextBox 3"/>
+          <p:cNvSpPr txBox="1"/>
+          <p:nvPr/>
+        </p:nvSpPr>
+        <p:spPr>
+          <a:xfrm>
+            <a:off x="868680" y="1554480"/>
+            <a:ext cx="10607040" cy="4937760"/>
+          </a:xfrm>
+          <a:prstGeom prst="rect">
+            <a:avLst/>
+          </a:prstGeom>
+          <a:noFill/>
+        </p:spPr>
+        <p:txBody>
+          <a:bodyPr wrap="square">
+            <a:spAutoFit/>
+          </a:bodyPr>
+          <a:lstStyle/>
+          <a:p>
+            <a:pPr algn="l">
+              <a:lnSpc>
+                <a:spcPct val="150000"/>
+              </a:lnSpc>
+              <a:spcAft>
+                <a:spcPts val="1000"/>
+              </a:spcAft>
+            </a:pPr>
+            <a:r>
+              <a:rPr sz="2000" b="0">
+                <a:solidFill>
+                  <a:srgbClr val="005BAC"/>
+                </a:solidFill>
+                <a:latin typeface="Calibri"/>
+              </a:rPr>
+              <a:t>•  Cross-city: DL+XGBoost ensemble is best (Macro-F1 0.892, DEGRADED 0.896).</a:t>
+            </a:r>
+          </a:p>
+          <a:p>
+            <a:pPr algn="l">
+              <a:lnSpc>
+                <a:spcPct val="150000"/>
+              </a:lnSpc>
+              <a:spcAft>
+                <a:spcPts val="1000"/>
+              </a:spcAft>
+            </a:pPr>
+            <a:r>
+              <a:rPr sz="2000" b="0">
+                <a:solidFill>
+                  <a:srgbClr val="1A1A1A"/>
+                </a:solidFill>
+                <a:latin typeface="Calibri"/>
+              </a:rPr>
+              <a:t>•  Inference: 0.045 ms/sample on GPU — ~9.5x faster than three separate tree models.</a:t>
+            </a:r>
+          </a:p>
+          <a:p>
+            <a:pPr algn="l">
+              <a:lnSpc>
+                <a:spcPct val="150000"/>
+              </a:lnSpc>
+              <a:spcAft>
+                <a:spcPts val="1000"/>
+              </a:spcAft>
+            </a:pPr>
+            <a:r>
+              <a:rPr sz="2000" b="0">
+                <a:solidFill>
+                  <a:srgbClr val="1A1A1A"/>
+                </a:solidFill>
+                <a:latin typeface="Calibri"/>
+              </a:rPr>
+              <a:t>•  One 17.8 MB checkpoint serves all three horizons; real-time at 10 Hz.</a:t>
+            </a:r>
+          </a:p>
+          <a:p>
+            <a:pPr algn="l">
+              <a:lnSpc>
+                <a:spcPct val="150000"/>
+              </a:lnSpc>
+              <a:spcAft>
+                <a:spcPts val="1000"/>
+              </a:spcAft>
+            </a:pPr>
+            <a:r>
+              <a:rPr sz="2000" b="0">
+                <a:solidFill>
+                  <a:srgbClr val="1A1A1A"/>
+                </a:solidFill>
+                <a:latin typeface="Calibri"/>
+              </a:rPr>
+              <a:t>•  Calibration: temperature scaling cuts ECE 40% (0.114 -&gt; 0.069); not yet &lt;0.05 (future work).</a:t>
+            </a:r>
+          </a:p>
+          <a:p>
+            <a:pPr algn="l">
+              <a:lnSpc>
+                <a:spcPct val="150000"/>
+              </a:lnSpc>
+              <a:spcAft>
+                <a:spcPts val="1000"/>
+              </a:spcAft>
+            </a:pPr>
+            <a:r>
+              <a:rPr sz="2000" b="0">
+                <a:solidFill>
+                  <a:srgbClr val="005BAC"/>
+                </a:solidFill>
+                <a:latin typeface="Calibri"/>
+              </a:rPr>
+              <a:t>•  Persistence baseline scores 0.91 at +5s -&gt; the model's value is transitions + longer horizons.</a:t>
+            </a:r>
           </a:p>
         </p:txBody>
       </p:sp>
@@ -6646,21 +6379,45 @@
                 </a:solidFill>
                 <a:latin typeface="Calibri"/>
               </a:rPr>
-              <a:t>What is genuinely new</a:t>
-            </a:r>
-          </a:p>
-        </p:txBody>
-      </p:sp>
-      <p:sp>
-        <p:nvSpPr>
-          <p:cNvPr id="4" name="TextBox 3"/>
+              <a:t>Ensemble wins cross-city</a:t>
+            </a:r>
+          </a:p>
+        </p:txBody>
+      </p:sp>
+      <p:pic>
+        <p:nvPicPr>
+          <p:cNvPr id="4" name="Picture 3" descr="fig16_ensemble.png"/>
+          <p:cNvPicPr>
+            <a:picLocks noChangeAspect="1"/>
+          </p:cNvPicPr>
+          <p:nvPr/>
+        </p:nvPicPr>
+        <p:blipFill>
+          <a:blip r:embed="rId2"/>
+          <a:stretch>
+            <a:fillRect/>
+          </a:stretch>
+        </p:blipFill>
+        <p:spPr>
+          <a:xfrm>
+            <a:off x="2011680" y="1645920"/>
+            <a:ext cx="7427822" cy="4206240"/>
+          </a:xfrm>
+          <a:prstGeom prst="rect">
+            <a:avLst/>
+          </a:prstGeom>
+        </p:spPr>
+      </p:pic>
+      <p:sp>
+        <p:nvSpPr>
+          <p:cNvPr id="5" name="TextBox 4"/>
           <p:cNvSpPr txBox="1"/>
           <p:nvPr/>
         </p:nvSpPr>
         <p:spPr>
           <a:xfrm>
-            <a:off x="868680" y="1554480"/>
-            <a:ext cx="10607040" cy="4937760"/>
+            <a:off x="868680" y="5943600"/>
+            <a:ext cx="10789920" cy="731520"/>
           </a:xfrm>
           <a:prstGeom prst="rect">
             <a:avLst/>
@@ -6678,93 +6435,17 @@
                 <a:spcPct val="150000"/>
               </a:lnSpc>
               <a:spcAft>
-                <a:spcPts val="1000"/>
+                <a:spcPts val="600"/>
               </a:spcAft>
             </a:pPr>
             <a:r>
-              <a:rPr sz="2000" b="0">
-                <a:solidFill>
-                  <a:srgbClr val="005BAC"/>
+              <a:rPr sz="1500" b="0">
+                <a:solidFill>
+                  <a:srgbClr val="5A5A5A"/>
                 </a:solidFill>
                 <a:latin typeface="Calibri"/>
               </a:rPr>
-              <a:t>•  1. Reactive → proactive: first multi-horizon GNSS degradation PREDICTOR.</a:t>
-            </a:r>
-          </a:p>
-          <a:p>
-            <a:pPr algn="l">
-              <a:lnSpc>
-                <a:spcPct val="150000"/>
-              </a:lnSpc>
-              <a:spcAft>
-                <a:spcPts val="1000"/>
-              </a:spcAft>
-            </a:pPr>
-            <a:r>
-              <a:rPr sz="2000" b="0">
-                <a:solidFill>
-                  <a:srgbClr val="1A1A1A"/>
-                </a:solidFill>
-                <a:latin typeface="Calibri"/>
-              </a:rPr>
-              <a:t>•  2. Cross-city generalisation as the deciding metric (DEGRADED 0.75 vs 0.15).</a:t>
-            </a:r>
-          </a:p>
-          <a:p>
-            <a:pPr algn="l">
-              <a:lnSpc>
-                <a:spcPct val="150000"/>
-              </a:lnSpc>
-              <a:spcAft>
-                <a:spcPts val="1000"/>
-              </a:spcAft>
-            </a:pPr>
-            <a:r>
-              <a:rPr sz="2000" b="0">
-                <a:solidFill>
-                  <a:srgbClr val="1A1A1A"/>
-                </a:solidFill>
-                <a:latin typeface="Calibri"/>
-              </a:rPr>
-              <a:t>•  3. Unified multi-horizon model — one pass, three horizons, 10.5× faster.</a:t>
-            </a:r>
-          </a:p>
-          <a:p>
-            <a:pPr algn="l">
-              <a:lnSpc>
-                <a:spcPct val="150000"/>
-              </a:lnSpc>
-              <a:spcAft>
-                <a:spcPts val="1000"/>
-              </a:spcAft>
-            </a:pPr>
-            <a:r>
-              <a:rPr sz="2000" b="0">
-                <a:solidFill>
-                  <a:srgbClr val="1A1A1A"/>
-                </a:solidFill>
-                <a:latin typeface="Calibri"/>
-              </a:rPr>
-              <a:t>•  4. Multi-city, multi-receiver open benchmark (149,662 epochs, reproducible).</a:t>
-            </a:r>
-          </a:p>
-          <a:p>
-            <a:pPr algn="l">
-              <a:lnSpc>
-                <a:spcPct val="150000"/>
-              </a:lnSpc>
-              <a:spcAft>
-                <a:spcPts val="1000"/>
-              </a:spcAft>
-            </a:pPr>
-            <a:r>
-              <a:rPr sz="2000" b="0">
-                <a:solidFill>
-                  <a:srgbClr val="1A1A1A"/>
-                </a:solidFill>
-                <a:latin typeface="Calibri"/>
-              </a:rPr>
-              <a:t>•  5. Hardware-aware design — explicit receiver-tier conditioning across 9+ receivers.</a:t>
+              <a:t>In-domain vs cross-city (Tokyo): DL+XGBoost soft-vote beats every single model.</a:t>
             </a:r>
           </a:p>
         </p:txBody>
@@ -6986,21 +6667,45 @@
                 </a:solidFill>
                 <a:latin typeface="Calibri"/>
               </a:rPr>
-              <a:t>How we defend it to reviewers (honest narrative)</a:t>
-            </a:r>
-          </a:p>
-        </p:txBody>
-      </p:sp>
-      <p:sp>
-        <p:nvSpPr>
-          <p:cNvPr id="4" name="TextBox 3"/>
+              <a:t>Cross-city generalization</a:t>
+            </a:r>
+          </a:p>
+        </p:txBody>
+      </p:sp>
+      <p:pic>
+        <p:nvPicPr>
+          <p:cNvPr id="4" name="Picture 3" descr="fig05_crosscity_degraded.png"/>
+          <p:cNvPicPr>
+            <a:picLocks noChangeAspect="1"/>
+          </p:cNvPicPr>
+          <p:nvPr/>
+        </p:nvPicPr>
+        <p:blipFill>
+          <a:blip r:embed="rId2"/>
+          <a:stretch>
+            <a:fillRect/>
+          </a:stretch>
+        </p:blipFill>
+        <p:spPr>
+          <a:xfrm>
+            <a:off x="2011680" y="1645920"/>
+            <a:ext cx="6868591" cy="4206240"/>
+          </a:xfrm>
+          <a:prstGeom prst="rect">
+            <a:avLst/>
+          </a:prstGeom>
+        </p:spPr>
+      </p:pic>
+      <p:sp>
+        <p:nvSpPr>
+          <p:cNvPr id="5" name="TextBox 4"/>
           <p:cNvSpPr txBox="1"/>
           <p:nvPr/>
         </p:nvSpPr>
         <p:spPr>
           <a:xfrm>
-            <a:off x="868680" y="1554480"/>
-            <a:ext cx="10607040" cy="4937760"/>
+            <a:off x="868680" y="5943600"/>
+            <a:ext cx="10789920" cy="731520"/>
           </a:xfrm>
           <a:prstGeom prst="rect">
             <a:avLst/>
@@ -7018,93 +6723,17 @@
                 <a:spcPct val="150000"/>
               </a:lnSpc>
               <a:spcAft>
-                <a:spcPts val="1000"/>
+                <a:spcPts val="600"/>
               </a:spcAft>
             </a:pPr>
             <a:r>
-              <a:rPr sz="2000" b="0">
-                <a:solidFill>
-                  <a:srgbClr val="1A1A1A"/>
+              <a:rPr sz="1500" b="0">
+                <a:solidFill>
+                  <a:srgbClr val="5A5A5A"/>
                 </a:solidFill>
                 <a:latin typeface="Calibri"/>
               </a:rPr>
-              <a:t>•  "Trees beat you in-domain" → true; out-of-domain we win on DEGRADED, 10.5× faster, one model.</a:t>
-            </a:r>
-          </a:p>
-          <a:p>
-            <a:pPr algn="l">
-              <a:lnSpc>
-                <a:spcPct val="150000"/>
-              </a:lnSpc>
-              <a:spcAft>
-                <a:spcPts val="1000"/>
-              </a:spcAft>
-            </a:pPr>
-            <a:r>
-              <a:rPr sz="2000" b="0">
-                <a:solidFill>
-                  <a:srgbClr val="1A1A1A"/>
-                </a:solidFill>
-                <a:latin typeface="Calibri"/>
-              </a:rPr>
-              <a:t>•  "Does the Transformer use time?" → order adds ~3% (permutation test); the win is representation transfer, not order modelling.</a:t>
-            </a:r>
-          </a:p>
-          <a:p>
-            <a:pPr algn="l">
-              <a:lnSpc>
-                <a:spcPct val="150000"/>
-              </a:lnSpc>
-              <a:spcAft>
-                <a:spcPts val="1000"/>
-              </a:spcAft>
-            </a:pPr>
-            <a:r>
-              <a:rPr sz="2000" b="0">
-                <a:solidFill>
-                  <a:srgbClr val="1A1A1A"/>
-                </a:solidFill>
-                <a:latin typeface="Calibri"/>
-              </a:rPr>
-              <a:t>•  "Small DEGRADED test set" → bootstrap 95% CIs on every per-class metric.</a:t>
-            </a:r>
-          </a:p>
-          <a:p>
-            <a:pPr algn="l">
-              <a:lnSpc>
-                <a:spcPct val="150000"/>
-              </a:lnSpc>
-              <a:spcAft>
-                <a:spcPts val="1000"/>
-              </a:spcAft>
-            </a:pPr>
-            <a:r>
-              <a:rPr sz="2000" b="0">
-                <a:solidFill>
-                  <a:srgbClr val="1A1A1A"/>
-                </a:solidFill>
-                <a:latin typeface="Calibri"/>
-              </a:rPr>
-              <a:t>•  "Data leakage?" → session-level split; scaler/SMOTE on train only; Tokyo fully held out.</a:t>
-            </a:r>
-          </a:p>
-          <a:p>
-            <a:pPr algn="l">
-              <a:lnSpc>
-                <a:spcPct val="150000"/>
-              </a:lnSpc>
-              <a:spcAft>
-                <a:spcPts val="1000"/>
-              </a:spcAft>
-            </a:pPr>
-            <a:r>
-              <a:rPr sz="2000" b="0">
-                <a:solidFill>
-                  <a:srgbClr val="005BAC"/>
-                </a:solidFill>
-                <a:latin typeface="Calibri"/>
-              </a:rPr>
-              <a:t>•  We lead with generalisation + efficiency, not an in-domain leaderboard score.</a:t>
+              <a:t>RandomForest collapses cross-city (DEGRADED 0.15); XGBoost transfers (0.78); DL (0.75).</a:t>
             </a:r>
           </a:p>
         </p:txBody>
@@ -7118,6 +6747,183 @@
 </file>
 
 <file path=ppt/slides/slide21.xml><?xml version="1.0" encoding="utf-8"?>
+<p:sld xmlns:a="http://schemas.openxmlformats.org/drawingml/2006/main" xmlns:p="http://schemas.openxmlformats.org/presentationml/2006/main" xmlns:r="http://schemas.openxmlformats.org/officeDocument/2006/relationships">
+  <p:cSld>
+    <p:bg>
+      <p:bgPr>
+        <a:solidFill>
+          <a:srgbClr val="F5F8FC"/>
+        </a:solidFill>
+        <a:effectLst/>
+      </p:bgPr>
+    </p:bg>
+    <p:spTree>
+      <p:nvGrpSpPr>
+        <p:cNvPr id="1" name=""/>
+        <p:cNvGrpSpPr/>
+        <p:nvPr/>
+      </p:nvGrpSpPr>
+      <p:grpSpPr/>
+      <p:sp>
+        <p:nvSpPr>
+          <p:cNvPr id="2" name="Rectangle 1"/>
+          <p:cNvSpPr/>
+          <p:nvPr/>
+        </p:nvSpPr>
+        <p:spPr>
+          <a:xfrm>
+            <a:off x="548640" y="457200"/>
+            <a:ext cx="164592" cy="822960"/>
+          </a:xfrm>
+          <a:prstGeom prst="rect">
+            <a:avLst/>
+          </a:prstGeom>
+          <a:solidFill>
+            <a:srgbClr val="005BAC"/>
+          </a:solidFill>
+          <a:ln>
+            <a:noFill/>
+          </a:ln>
+        </p:spPr>
+        <p:style>
+          <a:lnRef idx="1">
+            <a:schemeClr val="accent1"/>
+          </a:lnRef>
+          <a:fillRef idx="3">
+            <a:schemeClr val="accent1"/>
+          </a:fillRef>
+          <a:effectRef idx="2">
+            <a:schemeClr val="accent1"/>
+          </a:effectRef>
+          <a:fontRef idx="minor">
+            <a:schemeClr val="lt1"/>
+          </a:fontRef>
+        </p:style>
+        <p:txBody>
+          <a:bodyPr rtlCol="0" anchor="ctr"/>
+          <a:lstStyle/>
+          <a:p>
+            <a:pPr algn="ctr"/>
+          </a:p>
+        </p:txBody>
+      </p:sp>
+      <p:sp>
+        <p:nvSpPr>
+          <p:cNvPr id="3" name="TextBox 2"/>
+          <p:cNvSpPr txBox="1"/>
+          <p:nvPr/>
+        </p:nvSpPr>
+        <p:spPr>
+          <a:xfrm>
+            <a:off x="868680" y="411480"/>
+            <a:ext cx="10789920" cy="914400"/>
+          </a:xfrm>
+          <a:prstGeom prst="rect">
+            <a:avLst/>
+          </a:prstGeom>
+          <a:noFill/>
+        </p:spPr>
+        <p:txBody>
+          <a:bodyPr wrap="square">
+            <a:spAutoFit/>
+          </a:bodyPr>
+          <a:lstStyle/>
+          <a:p>
+            <a:pPr algn="l">
+              <a:lnSpc>
+                <a:spcPct val="150000"/>
+              </a:lnSpc>
+              <a:spcAft>
+                <a:spcPts val="600"/>
+              </a:spcAft>
+            </a:pPr>
+            <a:r>
+              <a:rPr sz="3400" b="1">
+                <a:solidFill>
+                  <a:srgbClr val="003366"/>
+                </a:solidFill>
+                <a:latin typeface="Calibri"/>
+              </a:rPr>
+              <a:t>Real-data EKF case study</a:t>
+            </a:r>
+          </a:p>
+        </p:txBody>
+      </p:sp>
+      <p:pic>
+        <p:nvPicPr>
+          <p:cNvPr id="4" name="Picture 3" descr="fig18_ekf_realdata.png"/>
+          <p:cNvPicPr>
+            <a:picLocks noChangeAspect="1"/>
+          </p:cNvPicPr>
+          <p:nvPr/>
+        </p:nvPicPr>
+        <p:blipFill>
+          <a:blip r:embed="rId2"/>
+          <a:stretch>
+            <a:fillRect/>
+          </a:stretch>
+        </p:blipFill>
+        <p:spPr>
+          <a:xfrm>
+            <a:off x="2011680" y="1645920"/>
+            <a:ext cx="9522047" cy="4206240"/>
+          </a:xfrm>
+          <a:prstGeom prst="rect">
+            <a:avLst/>
+          </a:prstGeom>
+        </p:spPr>
+      </p:pic>
+      <p:sp>
+        <p:nvSpPr>
+          <p:cNvPr id="5" name="TextBox 4"/>
+          <p:cNvSpPr txBox="1"/>
+          <p:nvPr/>
+        </p:nvSpPr>
+        <p:spPr>
+          <a:xfrm>
+            <a:off x="868680" y="5943600"/>
+            <a:ext cx="10789920" cy="731520"/>
+          </a:xfrm>
+          <a:prstGeom prst="rect">
+            <a:avLst/>
+          </a:prstGeom>
+          <a:noFill/>
+        </p:spPr>
+        <p:txBody>
+          <a:bodyPr wrap="square">
+            <a:spAutoFit/>
+          </a:bodyPr>
+          <a:lstStyle/>
+          <a:p>
+            <a:pPr algn="l">
+              <a:lnSpc>
+                <a:spcPct val="150000"/>
+              </a:lnSpc>
+              <a:spcAft>
+                <a:spcPts val="600"/>
+              </a:spcAft>
+            </a:pPr>
+            <a:r>
+              <a:rPr sz="1500" b="0">
+                <a:solidFill>
+                  <a:srgbClr val="5A5A5A"/>
+                </a:solidFill>
+                <a:latin typeface="Calibri"/>
+              </a:rPr>
+              <a:t>Raw GNSS trajectory vs adaptive EKF on real Beihang field NMEA; P(DEGRADED) predictions.</a:t>
+            </a:r>
+          </a:p>
+        </p:txBody>
+      </p:sp>
+    </p:spTree>
+  </p:cSld>
+  <p:clrMapOvr>
+    <a:masterClrMapping/>
+  </p:clrMapOvr>
+</p:sld>
+</file>
+
+<file path=ppt/slides/slide22.xml><?xml version="1.0" encoding="utf-8"?>
 <p:sld xmlns:a="http://schemas.openxmlformats.org/drawingml/2006/main" xmlns:p="http://schemas.openxmlformats.org/presentationml/2006/main" xmlns:r="http://schemas.openxmlformats.org/officeDocument/2006/relationships">
   <p:cSld>
     <p:bg>
@@ -7172,7 +6978,7 @@
                 </a:solidFill>
                 <a:latin typeface="Calibri"/>
               </a:rPr>
-              <a:t>6 · Roadmap &amp; Deliverables</a:t>
+              <a:t>5 · Novelty &amp; Validation</a:t>
             </a:r>
           </a:p>
         </p:txBody>
@@ -7217,216 +7023,6 @@
           <a:lstStyle/>
           <a:p>
             <a:pPr algn="ctr"/>
-          </a:p>
-        </p:txBody>
-      </p:sp>
-    </p:spTree>
-  </p:cSld>
-  <p:clrMapOvr>
-    <a:masterClrMapping/>
-  </p:clrMapOvr>
-</p:sld>
-</file>
-
-<file path=ppt/slides/slide22.xml><?xml version="1.0" encoding="utf-8"?>
-<p:sld xmlns:a="http://schemas.openxmlformats.org/drawingml/2006/main" xmlns:p="http://schemas.openxmlformats.org/presentationml/2006/main" xmlns:r="http://schemas.openxmlformats.org/officeDocument/2006/relationships">
-  <p:cSld>
-    <p:bg>
-      <p:bgPr>
-        <a:solidFill>
-          <a:srgbClr val="F5F8FC"/>
-        </a:solidFill>
-        <a:effectLst/>
-      </p:bgPr>
-    </p:bg>
-    <p:spTree>
-      <p:nvGrpSpPr>
-        <p:cNvPr id="1" name=""/>
-        <p:cNvGrpSpPr/>
-        <p:nvPr/>
-      </p:nvGrpSpPr>
-      <p:grpSpPr/>
-      <p:sp>
-        <p:nvSpPr>
-          <p:cNvPr id="2" name="Rectangle 1"/>
-          <p:cNvSpPr/>
-          <p:nvPr/>
-        </p:nvSpPr>
-        <p:spPr>
-          <a:xfrm>
-            <a:off x="548640" y="457200"/>
-            <a:ext cx="164592" cy="822960"/>
-          </a:xfrm>
-          <a:prstGeom prst="rect">
-            <a:avLst/>
-          </a:prstGeom>
-          <a:solidFill>
-            <a:srgbClr val="005BAC"/>
-          </a:solidFill>
-          <a:ln>
-            <a:noFill/>
-          </a:ln>
-        </p:spPr>
-        <p:style>
-          <a:lnRef idx="1">
-            <a:schemeClr val="accent1"/>
-          </a:lnRef>
-          <a:fillRef idx="3">
-            <a:schemeClr val="accent1"/>
-          </a:fillRef>
-          <a:effectRef idx="2">
-            <a:schemeClr val="accent1"/>
-          </a:effectRef>
-          <a:fontRef idx="minor">
-            <a:schemeClr val="lt1"/>
-          </a:fontRef>
-        </p:style>
-        <p:txBody>
-          <a:bodyPr rtlCol="0" anchor="ctr"/>
-          <a:lstStyle/>
-          <a:p>
-            <a:pPr algn="ctr"/>
-          </a:p>
-        </p:txBody>
-      </p:sp>
-      <p:sp>
-        <p:nvSpPr>
-          <p:cNvPr id="3" name="TextBox 2"/>
-          <p:cNvSpPr txBox="1"/>
-          <p:nvPr/>
-        </p:nvSpPr>
-        <p:spPr>
-          <a:xfrm>
-            <a:off x="868680" y="411480"/>
-            <a:ext cx="10789920" cy="914400"/>
-          </a:xfrm>
-          <a:prstGeom prst="rect">
-            <a:avLst/>
-          </a:prstGeom>
-          <a:noFill/>
-        </p:spPr>
-        <p:txBody>
-          <a:bodyPr wrap="square">
-            <a:spAutoFit/>
-          </a:bodyPr>
-          <a:lstStyle/>
-          <a:p>
-            <a:pPr algn="l">
-              <a:lnSpc>
-                <a:spcPct val="150000"/>
-              </a:lnSpc>
-              <a:spcAft>
-                <a:spcPts val="600"/>
-              </a:spcAft>
-            </a:pPr>
-            <a:r>
-              <a:rPr sz="3400" b="1">
-                <a:solidFill>
-                  <a:srgbClr val="003366"/>
-                </a:solidFill>
-                <a:latin typeface="Calibri"/>
-              </a:rPr>
-              <a:t>Publication plan — 2 papers + 1 conference</a:t>
-            </a:r>
-          </a:p>
-        </p:txBody>
-      </p:sp>
-      <p:sp>
-        <p:nvSpPr>
-          <p:cNvPr id="4" name="TextBox 3"/>
-          <p:cNvSpPr txBox="1"/>
-          <p:nvPr/>
-        </p:nvSpPr>
-        <p:spPr>
-          <a:xfrm>
-            <a:off x="868680" y="1554480"/>
-            <a:ext cx="10607040" cy="4937760"/>
-          </a:xfrm>
-          <a:prstGeom prst="rect">
-            <a:avLst/>
-          </a:prstGeom>
-          <a:noFill/>
-        </p:spPr>
-        <p:txBody>
-          <a:bodyPr wrap="square">
-            <a:spAutoFit/>
-          </a:bodyPr>
-          <a:lstStyle/>
-          <a:p>
-            <a:pPr algn="l">
-              <a:lnSpc>
-                <a:spcPct val="150000"/>
-              </a:lnSpc>
-              <a:spcAft>
-                <a:spcPts val="1000"/>
-              </a:spcAft>
-            </a:pPr>
-            <a:r>
-              <a:rPr sz="2000" b="0">
-                <a:solidFill>
-                  <a:srgbClr val="005BAC"/>
-                </a:solidFill>
-                <a:latin typeface="Calibri"/>
-              </a:rPr>
-              <a:t>•  Paper A (GPS Solutions, Q1): method + multi-horizon + cross-receiver + cross-city + EKF.</a:t>
-            </a:r>
-          </a:p>
-          <a:p>
-            <a:pPr algn="l">
-              <a:lnSpc>
-                <a:spcPct val="150000"/>
-              </a:lnSpc>
-              <a:spcAft>
-                <a:spcPts val="1000"/>
-              </a:spcAft>
-            </a:pPr>
-            <a:r>
-              <a:rPr sz="2000" b="0">
-                <a:solidFill>
-                  <a:srgbClr val="1A1A1A"/>
-                </a:solidFill>
-                <a:latin typeface="Calibri"/>
-              </a:rPr>
-              <a:t>•  Paper B (Scientific Data / Data in Brief): the benchmark / dataset descriptor.</a:t>
-            </a:r>
-          </a:p>
-          <a:p>
-            <a:pPr algn="l">
-              <a:lnSpc>
-                <a:spcPct val="150000"/>
-              </a:lnSpc>
-              <a:spcAft>
-                <a:spcPts val="1000"/>
-              </a:spcAft>
-            </a:pPr>
-            <a:r>
-              <a:rPr sz="2000" b="0">
-                <a:solidFill>
-                  <a:srgbClr val="1A1A1A"/>
-                </a:solidFill>
-                <a:latin typeface="Calibri"/>
-              </a:rPr>
-              <a:t>•  Conference (ION GNSS+ 2026): cross-city result as a short paper, later extended.</a:t>
-            </a:r>
-          </a:p>
-          <a:p>
-            <a:pPr algn="l">
-              <a:lnSpc>
-                <a:spcPct val="150000"/>
-              </a:lnSpc>
-              <a:spcAft>
-                <a:spcPts val="1000"/>
-              </a:spcAft>
-            </a:pPr>
-            <a:r>
-              <a:rPr sz="2000" b="0">
-                <a:solidFill>
-                  <a:srgbClr val="1A1A1A"/>
-                </a:solidFill>
-                <a:latin typeface="Calibri"/>
-              </a:rPr>
-              <a:t>•  Two substantial papers avoid salami-slicing and carry more impact than four thin ones.</a:t>
-            </a:r>
           </a:p>
         </p:txBody>
       </p:sp>
@@ -7536,582 +7132,129 @@
                 </a:solidFill>
                 <a:latin typeface="Calibri"/>
               </a:rPr>
-              <a:t>What is left to build</a:t>
-            </a:r>
-          </a:p>
-        </p:txBody>
-      </p:sp>
-      <p:graphicFrame>
-        <p:nvGraphicFramePr>
-          <p:cNvPr id="4" name="Table 3"/>
-          <p:cNvGraphicFramePr>
-            <a:graphicFrameLocks noGrp="1"/>
-          </p:cNvGraphicFramePr>
+              <a:t>What is genuinely new</a:t>
+            </a:r>
+          </a:p>
+        </p:txBody>
+      </p:sp>
+      <p:sp>
+        <p:nvSpPr>
+          <p:cNvPr id="4" name="TextBox 3"/>
+          <p:cNvSpPr txBox="1"/>
           <p:nvPr/>
-        </p:nvGraphicFramePr>
-        <p:xfrm>
-          <a:off x="868680" y="1600200"/>
-          <a:ext cx="10972799" cy="2926080"/>
-        </p:xfrm>
-        <a:graphic>
-          <a:graphicData uri="http://schemas.openxmlformats.org/drawingml/2006/table">
-            <a:tbl>
-              <a:tblPr firstRow="1" bandRow="1">
-                <a:tableStyleId>{5C22544A-7EE6-4342-B048-85BDC9FD1C3A}</a:tableStyleId>
-              </a:tblPr>
-              <a:tblGrid>
-                <a:gridCol w="731520"/>
-                <a:gridCol w="7498079"/>
-                <a:gridCol w="2743200"/>
-              </a:tblGrid>
-              <a:tr h="365760">
-                <a:tc>
-                  <a:txBody>
-                    <a:bodyPr/>
-                    <a:lstStyle/>
-                    <a:p>
-                      <a:pPr algn="ctr"/>
-                      <a:r>
-                        <a:rPr sz="1500" b="1">
-                          <a:solidFill>
-                            <a:srgbClr val="FFFFFF"/>
-                          </a:solidFill>
-                        </a:rPr>
-                        <a:t>#</a:t>
-                      </a:r>
-                    </a:p>
-                  </a:txBody>
-                  <a:tcPr>
-                    <a:solidFill>
-                      <a:srgbClr val="005BAC"/>
-                    </a:solidFill>
-                  </a:tcPr>
-                </a:tc>
-                <a:tc>
-                  <a:txBody>
-                    <a:bodyPr/>
-                    <a:lstStyle/>
-                    <a:p>
-                      <a:pPr algn="ctr"/>
-                      <a:r>
-                        <a:rPr sz="1500" b="1">
-                          <a:solidFill>
-                            <a:srgbClr val="FFFFFF"/>
-                          </a:solidFill>
-                        </a:rPr>
-                        <a:t>Task</a:t>
-                      </a:r>
-                    </a:p>
-                  </a:txBody>
-                  <a:tcPr>
-                    <a:solidFill>
-                      <a:srgbClr val="005BAC"/>
-                    </a:solidFill>
-                  </a:tcPr>
-                </a:tc>
-                <a:tc>
-                  <a:txBody>
-                    <a:bodyPr/>
-                    <a:lstStyle/>
-                    <a:p>
-                      <a:pPr algn="ctr"/>
-                      <a:r>
-                        <a:rPr sz="1500" b="1">
-                          <a:solidFill>
-                            <a:srgbClr val="FFFFFF"/>
-                          </a:solidFill>
-                        </a:rPr>
-                        <a:t>Status</a:t>
-                      </a:r>
-                    </a:p>
-                  </a:txBody>
-                  <a:tcPr>
-                    <a:solidFill>
-                      <a:srgbClr val="005BAC"/>
-                    </a:solidFill>
-                  </a:tcPr>
-                </a:tc>
-              </a:tr>
-              <a:tr h="365760">
-                <a:tc>
-                  <a:txBody>
-                    <a:bodyPr/>
-                    <a:lstStyle/>
-                    <a:p>
-                      <a:pPr algn="l"/>
-                      <a:r>
-                        <a:rPr sz="1500">
-                          <a:solidFill>
-                            <a:srgbClr val="1A1A1A"/>
-                          </a:solidFill>
-                        </a:rPr>
-                        <a:t>1</a:t>
-                      </a:r>
-                    </a:p>
-                  </a:txBody>
-                  <a:tcPr>
-                    <a:solidFill>
-                      <a:srgbClr val="FFFFFF"/>
-                    </a:solidFill>
-                  </a:tcPr>
-                </a:tc>
-                <a:tc>
-                  <a:txBody>
-                    <a:bodyPr/>
-                    <a:lstStyle/>
-                    <a:p>
-                      <a:pPr algn="ctr"/>
-                      <a:r>
-                        <a:rPr sz="1500">
-                          <a:solidFill>
-                            <a:srgbClr val="1A1A1A"/>
-                          </a:solidFill>
-                        </a:rPr>
-                        <a:t>Re-run calibration (E7) with correct temperature</a:t>
-                      </a:r>
-                    </a:p>
-                  </a:txBody>
-                  <a:tcPr>
-                    <a:solidFill>
-                      <a:srgbClr val="FFFFFF"/>
-                    </a:solidFill>
-                  </a:tcPr>
-                </a:tc>
-                <a:tc>
-                  <a:txBody>
-                    <a:bodyPr/>
-                    <a:lstStyle/>
-                    <a:p>
-                      <a:pPr algn="ctr"/>
-                      <a:r>
-                        <a:rPr sz="1500">
-                          <a:solidFill>
-                            <a:srgbClr val="1A1A1A"/>
-                          </a:solidFill>
-                        </a:rPr>
-                        <a:t>done in notebooks</a:t>
-                      </a:r>
-                    </a:p>
-                  </a:txBody>
-                  <a:tcPr>
-                    <a:solidFill>
-                      <a:srgbClr val="FFFFFF"/>
-                    </a:solidFill>
-                  </a:tcPr>
-                </a:tc>
-              </a:tr>
-              <a:tr h="365760">
-                <a:tc>
-                  <a:txBody>
-                    <a:bodyPr/>
-                    <a:lstStyle/>
-                    <a:p>
-                      <a:pPr algn="l"/>
-                      <a:r>
-                        <a:rPr sz="1500">
-                          <a:solidFill>
-                            <a:srgbClr val="1A1A1A"/>
-                          </a:solidFill>
-                        </a:rPr>
-                        <a:t>2</a:t>
-                      </a:r>
-                    </a:p>
-                  </a:txBody>
-                  <a:tcPr>
-                    <a:solidFill>
-                      <a:srgbClr val="ECF3FA"/>
-                    </a:solidFill>
-                  </a:tcPr>
-                </a:tc>
-                <a:tc>
-                  <a:txBody>
-                    <a:bodyPr/>
-                    <a:lstStyle/>
-                    <a:p>
-                      <a:pPr algn="ctr"/>
-                      <a:r>
-                        <a:rPr sz="1500">
-                          <a:solidFill>
-                            <a:srgbClr val="1A1A1A"/>
-                          </a:solidFill>
-                        </a:rPr>
-                        <a:t>Read median lead-time from histogram</a:t>
-                      </a:r>
-                    </a:p>
-                  </a:txBody>
-                  <a:tcPr>
-                    <a:solidFill>
-                      <a:srgbClr val="ECF3FA"/>
-                    </a:solidFill>
-                  </a:tcPr>
-                </a:tc>
-                <a:tc>
-                  <a:txBody>
-                    <a:bodyPr/>
-                    <a:lstStyle/>
-                    <a:p>
-                      <a:pPr algn="ctr"/>
-                      <a:r>
-                        <a:rPr sz="1500">
-                          <a:solidFill>
-                            <a:srgbClr val="1A1A1A"/>
-                          </a:solidFill>
-                        </a:rPr>
-                        <a:t>pending</a:t>
-                      </a:r>
-                    </a:p>
-                  </a:txBody>
-                  <a:tcPr>
-                    <a:solidFill>
-                      <a:srgbClr val="ECF3FA"/>
-                    </a:solidFill>
-                  </a:tcPr>
-                </a:tc>
-              </a:tr>
-              <a:tr h="365760">
-                <a:tc>
-                  <a:txBody>
-                    <a:bodyPr/>
-                    <a:lstStyle/>
-                    <a:p>
-                      <a:pPr algn="l"/>
-                      <a:r>
-                        <a:rPr sz="1500">
-                          <a:solidFill>
-                            <a:srgbClr val="1A1A1A"/>
-                          </a:solidFill>
-                        </a:rPr>
-                        <a:t>3</a:t>
-                      </a:r>
-                    </a:p>
-                  </a:txBody>
-                  <a:tcPr>
-                    <a:solidFill>
-                      <a:srgbClr val="FFFFFF"/>
-                    </a:solidFill>
-                  </a:tcPr>
-                </a:tc>
-                <a:tc>
-                  <a:txBody>
-                    <a:bodyPr/>
-                    <a:lstStyle/>
-                    <a:p>
-                      <a:pPr algn="ctr"/>
-                      <a:r>
-                        <a:rPr sz="1500">
-                          <a:solidFill>
-                            <a:srgbClr val="1A1A1A"/>
-                          </a:solidFill>
-                        </a:rPr>
-                        <a:t>inference.py — NMEA stream → live prediction</a:t>
-                      </a:r>
-                    </a:p>
-                  </a:txBody>
-                  <a:tcPr>
-                    <a:solidFill>
-                      <a:srgbClr val="FFFFFF"/>
-                    </a:solidFill>
-                  </a:tcPr>
-                </a:tc>
-                <a:tc>
-                  <a:txBody>
-                    <a:bodyPr/>
-                    <a:lstStyle/>
-                    <a:p>
-                      <a:pPr algn="ctr"/>
-                      <a:r>
-                        <a:rPr sz="1500">
-                          <a:solidFill>
-                            <a:srgbClr val="1A1A1A"/>
-                          </a:solidFill>
-                        </a:rPr>
-                        <a:t>pending</a:t>
-                      </a:r>
-                    </a:p>
-                  </a:txBody>
-                  <a:tcPr>
-                    <a:solidFill>
-                      <a:srgbClr val="FFFFFF"/>
-                    </a:solidFill>
-                  </a:tcPr>
-                </a:tc>
-              </a:tr>
-              <a:tr h="365760">
-                <a:tc>
-                  <a:txBody>
-                    <a:bodyPr/>
-                    <a:lstStyle/>
-                    <a:p>
-                      <a:pPr algn="l"/>
-                      <a:r>
-                        <a:rPr sz="1500">
-                          <a:solidFill>
-                            <a:srgbClr val="1A1A1A"/>
-                          </a:solidFill>
-                        </a:rPr>
-                        <a:t>4</a:t>
-                      </a:r>
-                    </a:p>
-                  </a:txBody>
-                  <a:tcPr>
-                    <a:solidFill>
-                      <a:srgbClr val="ECF3FA"/>
-                    </a:solidFill>
-                  </a:tcPr>
-                </a:tc>
-                <a:tc>
-                  <a:txBody>
-                    <a:bodyPr/>
-                    <a:lstStyle/>
-                    <a:p>
-                      <a:pPr algn="ctr"/>
-                      <a:r>
-                        <a:rPr sz="1500">
-                          <a:solidFill>
-                            <a:srgbClr val="1A1A1A"/>
-                          </a:solidFill>
-                        </a:rPr>
-                        <a:t>Per-receiver evaluation (Paper A §6)</a:t>
-                      </a:r>
-                    </a:p>
-                  </a:txBody>
-                  <a:tcPr>
-                    <a:solidFill>
-                      <a:srgbClr val="ECF3FA"/>
-                    </a:solidFill>
-                  </a:tcPr>
-                </a:tc>
-                <a:tc>
-                  <a:txBody>
-                    <a:bodyPr/>
-                    <a:lstStyle/>
-                    <a:p>
-                      <a:pPr algn="ctr"/>
-                      <a:r>
-                        <a:rPr sz="1500">
-                          <a:solidFill>
-                            <a:srgbClr val="1A1A1A"/>
-                          </a:solidFill>
-                        </a:rPr>
-                        <a:t>pending</a:t>
-                      </a:r>
-                    </a:p>
-                  </a:txBody>
-                  <a:tcPr>
-                    <a:solidFill>
-                      <a:srgbClr val="ECF3FA"/>
-                    </a:solidFill>
-                  </a:tcPr>
-                </a:tc>
-              </a:tr>
-              <a:tr h="365760">
-                <a:tc>
-                  <a:txBody>
-                    <a:bodyPr/>
-                    <a:lstStyle/>
-                    <a:p>
-                      <a:pPr algn="l"/>
-                      <a:r>
-                        <a:rPr sz="1500">
-                          <a:solidFill>
-                            <a:srgbClr val="1A1A1A"/>
-                          </a:solidFill>
-                        </a:rPr>
-                        <a:t>5</a:t>
-                      </a:r>
-                    </a:p>
-                  </a:txBody>
-                  <a:tcPr>
-                    <a:solidFill>
-                      <a:srgbClr val="FFFFFF"/>
-                    </a:solidFill>
-                  </a:tcPr>
-                </a:tc>
-                <a:tc>
-                  <a:txBody>
-                    <a:bodyPr/>
-                    <a:lstStyle/>
-                    <a:p>
-                      <a:pPr algn="ctr"/>
-                      <a:r>
-                        <a:rPr sz="1500">
-                          <a:solidFill>
-                            <a:srgbClr val="1A1A1A"/>
-                          </a:solidFill>
-                        </a:rPr>
-                        <a:t>Adaptive EKF — navigation RMSE during blockage</a:t>
-                      </a:r>
-                    </a:p>
-                  </a:txBody>
-                  <a:tcPr>
-                    <a:solidFill>
-                      <a:srgbClr val="FFFFFF"/>
-                    </a:solidFill>
-                  </a:tcPr>
-                </a:tc>
-                <a:tc>
-                  <a:txBody>
-                    <a:bodyPr/>
-                    <a:lstStyle/>
-                    <a:p>
-                      <a:pPr algn="ctr"/>
-                      <a:r>
-                        <a:rPr sz="1500">
-                          <a:solidFill>
-                            <a:srgbClr val="1A1A1A"/>
-                          </a:solidFill>
-                        </a:rPr>
-                        <a:t>pending (key)</a:t>
-                      </a:r>
-                    </a:p>
-                  </a:txBody>
-                  <a:tcPr>
-                    <a:solidFill>
-                      <a:srgbClr val="FFFFFF"/>
-                    </a:solidFill>
-                  </a:tcPr>
-                </a:tc>
-              </a:tr>
-              <a:tr h="365760">
-                <a:tc>
-                  <a:txBody>
-                    <a:bodyPr/>
-                    <a:lstStyle/>
-                    <a:p>
-                      <a:pPr algn="l"/>
-                      <a:r>
-                        <a:rPr sz="1500">
-                          <a:solidFill>
-                            <a:srgbClr val="1A1A1A"/>
-                          </a:solidFill>
-                        </a:rPr>
-                        <a:t>6</a:t>
-                      </a:r>
-                    </a:p>
-                  </a:txBody>
-                  <a:tcPr>
-                    <a:solidFill>
-                      <a:srgbClr val="ECF3FA"/>
-                    </a:solidFill>
-                  </a:tcPr>
-                </a:tc>
-                <a:tc>
-                  <a:txBody>
-                    <a:bodyPr/>
-                    <a:lstStyle/>
-                    <a:p>
-                      <a:pPr algn="ctr"/>
-                      <a:r>
-                        <a:rPr sz="1500">
-                          <a:solidFill>
-                            <a:srgbClr val="1A1A1A"/>
-                          </a:solidFill>
-                        </a:rPr>
-                        <a:t>Web app — Next.js + FastAPI dashboards</a:t>
-                      </a:r>
-                    </a:p>
-                  </a:txBody>
-                  <a:tcPr>
-                    <a:solidFill>
-                      <a:srgbClr val="ECF3FA"/>
-                    </a:solidFill>
-                  </a:tcPr>
-                </a:tc>
-                <a:tc>
-                  <a:txBody>
-                    <a:bodyPr/>
-                    <a:lstStyle/>
-                    <a:p>
-                      <a:pPr algn="ctr"/>
-                      <a:r>
-                        <a:rPr sz="1500">
-                          <a:solidFill>
-                            <a:srgbClr val="1A1A1A"/>
-                          </a:solidFill>
-                        </a:rPr>
-                        <a:t>pending</a:t>
-                      </a:r>
-                    </a:p>
-                  </a:txBody>
-                  <a:tcPr>
-                    <a:solidFill>
-                      <a:srgbClr val="ECF3FA"/>
-                    </a:solidFill>
-                  </a:tcPr>
-                </a:tc>
-              </a:tr>
-              <a:tr h="365760">
-                <a:tc>
-                  <a:txBody>
-                    <a:bodyPr/>
-                    <a:lstStyle/>
-                    <a:p>
-                      <a:pPr algn="l"/>
-                      <a:r>
-                        <a:rPr sz="1500">
-                          <a:solidFill>
-                            <a:srgbClr val="1A1A1A"/>
-                          </a:solidFill>
-                        </a:rPr>
-                        <a:t>7</a:t>
-                      </a:r>
-                    </a:p>
-                  </a:txBody>
-                  <a:tcPr>
-                    <a:solidFill>
-                      <a:srgbClr val="FFFFFF"/>
-                    </a:solidFill>
-                  </a:tcPr>
-                </a:tc>
-                <a:tc>
-                  <a:txBody>
-                    <a:bodyPr/>
-                    <a:lstStyle/>
-                    <a:p>
-                      <a:pPr algn="ctr"/>
-                      <a:r>
-                        <a:rPr sz="1500">
-                          <a:solidFill>
-                            <a:srgbClr val="1A1A1A"/>
-                          </a:solidFill>
-                        </a:rPr>
-                        <a:t>Paper A full draft</a:t>
-                      </a:r>
-                    </a:p>
-                  </a:txBody>
-                  <a:tcPr>
-                    <a:solidFill>
-                      <a:srgbClr val="FFFFFF"/>
-                    </a:solidFill>
-                  </a:tcPr>
-                </a:tc>
-                <a:tc>
-                  <a:txBody>
-                    <a:bodyPr/>
-                    <a:lstStyle/>
-                    <a:p>
-                      <a:pPr algn="ctr"/>
-                      <a:r>
-                        <a:rPr sz="1500">
-                          <a:solidFill>
-                            <a:srgbClr val="1A1A1A"/>
-                          </a:solidFill>
-                        </a:rPr>
-                        <a:t>pending</a:t>
-                      </a:r>
-                    </a:p>
-                  </a:txBody>
-                  <a:tcPr>
-                    <a:solidFill>
-                      <a:srgbClr val="FFFFFF"/>
-                    </a:solidFill>
-                  </a:tcPr>
-                </a:tc>
-              </a:tr>
-            </a:tbl>
-          </a:graphicData>
-        </a:graphic>
-      </p:graphicFrame>
+        </p:nvSpPr>
+        <p:spPr>
+          <a:xfrm>
+            <a:off x="868680" y="1554480"/>
+            <a:ext cx="10607040" cy="4937760"/>
+          </a:xfrm>
+          <a:prstGeom prst="rect">
+            <a:avLst/>
+          </a:prstGeom>
+          <a:noFill/>
+        </p:spPr>
+        <p:txBody>
+          <a:bodyPr wrap="square">
+            <a:spAutoFit/>
+          </a:bodyPr>
+          <a:lstStyle/>
+          <a:p>
+            <a:pPr algn="l">
+              <a:lnSpc>
+                <a:spcPct val="150000"/>
+              </a:lnSpc>
+              <a:spcAft>
+                <a:spcPts val="1000"/>
+              </a:spcAft>
+            </a:pPr>
+            <a:r>
+              <a:rPr sz="2000" b="0">
+                <a:solidFill>
+                  <a:srgbClr val="005BAC"/>
+                </a:solidFill>
+                <a:latin typeface="Calibri"/>
+              </a:rPr>
+              <a:t>•  1. Reactive → proactive: first multi-horizon GNSS degradation PREDICTOR.</a:t>
+            </a:r>
+          </a:p>
+          <a:p>
+            <a:pPr algn="l">
+              <a:lnSpc>
+                <a:spcPct val="150000"/>
+              </a:lnSpc>
+              <a:spcAft>
+                <a:spcPts val="1000"/>
+              </a:spcAft>
+            </a:pPr>
+            <a:r>
+              <a:rPr sz="2000" b="0">
+                <a:solidFill>
+                  <a:srgbClr val="1A1A1A"/>
+                </a:solidFill>
+                <a:latin typeface="Calibri"/>
+              </a:rPr>
+              <a:t>•  2. Cross-city: DL+XGBoost ensemble best (DEGRADED 0.90); RandomForest collapses (0.15), XGBoost transfers.</a:t>
+            </a:r>
+          </a:p>
+          <a:p>
+            <a:pPr algn="l">
+              <a:lnSpc>
+                <a:spcPct val="150000"/>
+              </a:lnSpc>
+              <a:spcAft>
+                <a:spcPts val="1000"/>
+              </a:spcAft>
+            </a:pPr>
+            <a:r>
+              <a:rPr sz="2000" b="0">
+                <a:solidFill>
+                  <a:srgbClr val="1A1A1A"/>
+                </a:solidFill>
+                <a:latin typeface="Calibri"/>
+              </a:rPr>
+              <a:t>•  3. Unified multi-horizon model — one pass, three horizons, ~9.5x faster.</a:t>
+            </a:r>
+          </a:p>
+          <a:p>
+            <a:pPr algn="l">
+              <a:lnSpc>
+                <a:spcPct val="150000"/>
+              </a:lnSpc>
+              <a:spcAft>
+                <a:spcPts val="1000"/>
+              </a:spcAft>
+            </a:pPr>
+            <a:r>
+              <a:rPr sz="2000" b="0">
+                <a:solidFill>
+                  <a:srgbClr val="1A1A1A"/>
+                </a:solidFill>
+                <a:latin typeface="Calibri"/>
+              </a:rPr>
+              <a:t>•  4. Multi-city, multi-receiver open benchmark (149,662 epochs, reproducible).</a:t>
+            </a:r>
+          </a:p>
+          <a:p>
+            <a:pPr algn="l">
+              <a:lnSpc>
+                <a:spcPct val="150000"/>
+              </a:lnSpc>
+              <a:spcAft>
+                <a:spcPts val="1000"/>
+              </a:spcAft>
+            </a:pPr>
+            <a:r>
+              <a:rPr sz="2000" b="0">
+                <a:solidFill>
+                  <a:srgbClr val="1A1A1A"/>
+                </a:solidFill>
+                <a:latin typeface="Calibri"/>
+              </a:rPr>
+              <a:t>•  5. Hardware-aware design — explicit receiver-tier conditioning across 9+ receivers.</a:t>
+            </a:r>
+          </a:p>
+        </p:txBody>
+      </p:sp>
     </p:spTree>
   </p:cSld>
   <p:clrMapOvr>
@@ -8218,7 +7361,7 @@
                 </a:solidFill>
                 <a:latin typeface="Calibri"/>
               </a:rPr>
-              <a:t>The application (Next.js + FastAPI)</a:t>
+              <a:t>How we defend it to reviewers (honest narrative)</a:t>
             </a:r>
           </a:p>
         </p:txBody>
@@ -8260,7 +7403,7 @@
                 </a:solidFill>
                 <a:latin typeface="Calibri"/>
               </a:rPr>
-              <a:t>•  Real-time monitor (1 Hz): C/N0, DOP, satellite count + live 3-horizon prediction bars.</a:t>
+              <a:t>•  "Trees beat you in-domain" -&gt; true; cross-city a DL+XGBoost ensemble wins (0.892), one model option ~9.5x faster.</a:t>
             </a:r>
           </a:p>
           <a:p>
@@ -8279,7 +7422,7 @@
                 </a:solidFill>
                 <a:latin typeface="Calibri"/>
               </a:rPr>
-              <a:t>•  Route map (Mapbox): colour-coded predicted signal quality along the path.</a:t>
+              <a:t>•  "Does the Transformer use time?" → order adds ~3% (permutation test); the win is representation transfer, not order modelling.</a:t>
             </a:r>
           </a:p>
           <a:p>
@@ -8298,7 +7441,7 @@
                 </a:solidFill>
                 <a:latin typeface="Calibri"/>
               </a:rPr>
-              <a:t>•  Prediction timeline with lead-time annotations; live attention heatmap.</a:t>
+              <a:t>•  "Small DEGRADED test set" → bootstrap 95% CIs on every per-class metric.</a:t>
             </a:r>
           </a:p>
           <a:p>
@@ -8317,7 +7460,26 @@
                 </a:solidFill>
                 <a:latin typeface="Calibri"/>
               </a:rPr>
-              <a:t>•  DL-vs-baseline comparison; dataset explorer (149k epochs); metrics board.</a:t>
+              <a:t>•  "Data leakage?" → session-level split; scaler/SMOTE on train only; Tokyo fully held out.</a:t>
+            </a:r>
+          </a:p>
+          <a:p>
+            <a:pPr algn="l">
+              <a:lnSpc>
+                <a:spcPct val="150000"/>
+              </a:lnSpc>
+              <a:spcAft>
+                <a:spcPts val="1000"/>
+              </a:spcAft>
+            </a:pPr>
+            <a:r>
+              <a:rPr sz="2000" b="0">
+                <a:solidFill>
+                  <a:srgbClr val="005BAC"/>
+                </a:solidFill>
+                <a:latin typeface="Calibri"/>
+              </a:rPr>
+              <a:t>•  We lead with generalisation + efficiency, not an in-domain leaderboard score.</a:t>
             </a:r>
           </a:p>
         </p:txBody>
@@ -8356,8 +7518,8 @@
         </p:nvSpPr>
         <p:spPr>
           <a:xfrm>
-            <a:off x="822960" y="2377440"/>
-            <a:ext cx="10607040" cy="1828800"/>
+            <a:off x="822960" y="2743200"/>
+            <a:ext cx="10515600" cy="1371600"/>
           </a:xfrm>
           <a:prstGeom prst="rect">
             <a:avLst/>
@@ -8385,9 +7547,144 @@
                 </a:solidFill>
                 <a:latin typeface="Calibri"/>
               </a:rPr>
-              <a:t>Thank you</a:t>
-            </a:r>
-          </a:p>
+              <a:t>6 · Roadmap &amp; Deliverables</a:t>
+            </a:r>
+          </a:p>
+        </p:txBody>
+      </p:sp>
+      <p:sp>
+        <p:nvSpPr>
+          <p:cNvPr id="3" name="Rectangle 2"/>
+          <p:cNvSpPr/>
+          <p:nvPr/>
+        </p:nvSpPr>
+        <p:spPr>
+          <a:xfrm>
+            <a:off x="868680" y="3886200"/>
+            <a:ext cx="2926080" cy="73152"/>
+          </a:xfrm>
+          <a:prstGeom prst="rect">
+            <a:avLst/>
+          </a:prstGeom>
+          <a:solidFill>
+            <a:srgbClr val="00A0E9"/>
+          </a:solidFill>
+          <a:ln>
+            <a:noFill/>
+          </a:ln>
+        </p:spPr>
+        <p:style>
+          <a:lnRef idx="1">
+            <a:schemeClr val="accent1"/>
+          </a:lnRef>
+          <a:fillRef idx="3">
+            <a:schemeClr val="accent1"/>
+          </a:fillRef>
+          <a:effectRef idx="2">
+            <a:schemeClr val="accent1"/>
+          </a:effectRef>
+          <a:fontRef idx="minor">
+            <a:schemeClr val="lt1"/>
+          </a:fontRef>
+        </p:style>
+        <p:txBody>
+          <a:bodyPr rtlCol="0" anchor="ctr"/>
+          <a:lstStyle/>
+          <a:p>
+            <a:pPr algn="ctr"/>
+          </a:p>
+        </p:txBody>
+      </p:sp>
+    </p:spTree>
+  </p:cSld>
+  <p:clrMapOvr>
+    <a:masterClrMapping/>
+  </p:clrMapOvr>
+</p:sld>
+</file>
+
+<file path=ppt/slides/slide26.xml><?xml version="1.0" encoding="utf-8"?>
+<p:sld xmlns:a="http://schemas.openxmlformats.org/drawingml/2006/main" xmlns:p="http://schemas.openxmlformats.org/presentationml/2006/main" xmlns:r="http://schemas.openxmlformats.org/officeDocument/2006/relationships">
+  <p:cSld>
+    <p:bg>
+      <p:bgPr>
+        <a:solidFill>
+          <a:srgbClr val="F5F8FC"/>
+        </a:solidFill>
+        <a:effectLst/>
+      </p:bgPr>
+    </p:bg>
+    <p:spTree>
+      <p:nvGrpSpPr>
+        <p:cNvPr id="1" name=""/>
+        <p:cNvGrpSpPr/>
+        <p:nvPr/>
+      </p:nvGrpSpPr>
+      <p:grpSpPr/>
+      <p:sp>
+        <p:nvSpPr>
+          <p:cNvPr id="2" name="Rectangle 1"/>
+          <p:cNvSpPr/>
+          <p:nvPr/>
+        </p:nvSpPr>
+        <p:spPr>
+          <a:xfrm>
+            <a:off x="548640" y="457200"/>
+            <a:ext cx="164592" cy="822960"/>
+          </a:xfrm>
+          <a:prstGeom prst="rect">
+            <a:avLst/>
+          </a:prstGeom>
+          <a:solidFill>
+            <a:srgbClr val="005BAC"/>
+          </a:solidFill>
+          <a:ln>
+            <a:noFill/>
+          </a:ln>
+        </p:spPr>
+        <p:style>
+          <a:lnRef idx="1">
+            <a:schemeClr val="accent1"/>
+          </a:lnRef>
+          <a:fillRef idx="3">
+            <a:schemeClr val="accent1"/>
+          </a:fillRef>
+          <a:effectRef idx="2">
+            <a:schemeClr val="accent1"/>
+          </a:effectRef>
+          <a:fontRef idx="minor">
+            <a:schemeClr val="lt1"/>
+          </a:fontRef>
+        </p:style>
+        <p:txBody>
+          <a:bodyPr rtlCol="0" anchor="ctr"/>
+          <a:lstStyle/>
+          <a:p>
+            <a:pPr algn="ctr"/>
+          </a:p>
+        </p:txBody>
+      </p:sp>
+      <p:sp>
+        <p:nvSpPr>
+          <p:cNvPr id="3" name="TextBox 2"/>
+          <p:cNvSpPr txBox="1"/>
+          <p:nvPr/>
+        </p:nvSpPr>
+        <p:spPr>
+          <a:xfrm>
+            <a:off x="868680" y="411480"/>
+            <a:ext cx="10789920" cy="914400"/>
+          </a:xfrm>
+          <a:prstGeom prst="rect">
+            <a:avLst/>
+          </a:prstGeom>
+          <a:noFill/>
+        </p:spPr>
+        <p:txBody>
+          <a:bodyPr wrap="square">
+            <a:spAutoFit/>
+          </a:bodyPr>
+          <a:lstStyle/>
           <a:p>
             <a:pPr algn="l">
               <a:lnSpc>
@@ -8398,15 +7695,163 @@
               </a:spcAft>
             </a:pPr>
             <a:r>
-              <a:rPr sz="2200" b="0">
-                <a:solidFill>
-                  <a:srgbClr val="E6F2FB"/>
+              <a:rPr sz="3400" b="1">
+                <a:solidFill>
+                  <a:srgbClr val="003366"/>
                 </a:solidFill>
                 <a:latin typeface="Calibri"/>
               </a:rPr>
-              <a:t>SENTINEL-GNSS — predicting GNSS degradation before it happens</a:t>
-            </a:r>
-          </a:p>
+              <a:t>Publication plan — 2 papers + 1 conference</a:t>
+            </a:r>
+          </a:p>
+        </p:txBody>
+      </p:sp>
+      <p:sp>
+        <p:nvSpPr>
+          <p:cNvPr id="4" name="TextBox 3"/>
+          <p:cNvSpPr txBox="1"/>
+          <p:nvPr/>
+        </p:nvSpPr>
+        <p:spPr>
+          <a:xfrm>
+            <a:off x="868680" y="1554480"/>
+            <a:ext cx="10607040" cy="4937760"/>
+          </a:xfrm>
+          <a:prstGeom prst="rect">
+            <a:avLst/>
+          </a:prstGeom>
+          <a:noFill/>
+        </p:spPr>
+        <p:txBody>
+          <a:bodyPr wrap="square">
+            <a:spAutoFit/>
+          </a:bodyPr>
+          <a:lstStyle/>
+          <a:p>
+            <a:pPr algn="l">
+              <a:lnSpc>
+                <a:spcPct val="150000"/>
+              </a:lnSpc>
+              <a:spcAft>
+                <a:spcPts val="1000"/>
+              </a:spcAft>
+            </a:pPr>
+            <a:r>
+              <a:rPr sz="2000" b="0">
+                <a:solidFill>
+                  <a:srgbClr val="005BAC"/>
+                </a:solidFill>
+                <a:latin typeface="Calibri"/>
+              </a:rPr>
+              <a:t>•  Paper A (GPS Solutions, Q1): method + multi-horizon + cross-receiver + cross-city + EKF.</a:t>
+            </a:r>
+          </a:p>
+          <a:p>
+            <a:pPr algn="l">
+              <a:lnSpc>
+                <a:spcPct val="150000"/>
+              </a:lnSpc>
+              <a:spcAft>
+                <a:spcPts val="1000"/>
+              </a:spcAft>
+            </a:pPr>
+            <a:r>
+              <a:rPr sz="2000" b="0">
+                <a:solidFill>
+                  <a:srgbClr val="1A1A1A"/>
+                </a:solidFill>
+                <a:latin typeface="Calibri"/>
+              </a:rPr>
+              <a:t>•  Paper B (Scientific Data / Data in Brief): the benchmark / dataset descriptor.</a:t>
+            </a:r>
+          </a:p>
+          <a:p>
+            <a:pPr algn="l">
+              <a:lnSpc>
+                <a:spcPct val="150000"/>
+              </a:lnSpc>
+              <a:spcAft>
+                <a:spcPts val="1000"/>
+              </a:spcAft>
+            </a:pPr>
+            <a:r>
+              <a:rPr sz="2000" b="0">
+                <a:solidFill>
+                  <a:srgbClr val="1A1A1A"/>
+                </a:solidFill>
+                <a:latin typeface="Calibri"/>
+              </a:rPr>
+              <a:t>•  Conference (ION GNSS+ 2026): cross-city result as a short paper, later extended.</a:t>
+            </a:r>
+          </a:p>
+          <a:p>
+            <a:pPr algn="l">
+              <a:lnSpc>
+                <a:spcPct val="150000"/>
+              </a:lnSpc>
+              <a:spcAft>
+                <a:spcPts val="1000"/>
+              </a:spcAft>
+            </a:pPr>
+            <a:r>
+              <a:rPr sz="2000" b="0">
+                <a:solidFill>
+                  <a:srgbClr val="1A1A1A"/>
+                </a:solidFill>
+                <a:latin typeface="Calibri"/>
+              </a:rPr>
+              <a:t>•  Two substantial papers avoid salami-slicing and carry more impact than four thin ones.</a:t>
+            </a:r>
+          </a:p>
+        </p:txBody>
+      </p:sp>
+    </p:spTree>
+  </p:cSld>
+  <p:clrMapOvr>
+    <a:masterClrMapping/>
+  </p:clrMapOvr>
+</p:sld>
+</file>
+
+<file path=ppt/slides/slide27.xml><?xml version="1.0" encoding="utf-8"?>
+<p:sld xmlns:a="http://schemas.openxmlformats.org/drawingml/2006/main" xmlns:p="http://schemas.openxmlformats.org/presentationml/2006/main" xmlns:r="http://schemas.openxmlformats.org/officeDocument/2006/relationships">
+  <p:cSld>
+    <p:bg>
+      <p:bgPr>
+        <a:solidFill>
+          <a:srgbClr val="003366"/>
+        </a:solidFill>
+        <a:effectLst/>
+      </p:bgPr>
+    </p:bg>
+    <p:spTree>
+      <p:nvGrpSpPr>
+        <p:cNvPr id="1" name=""/>
+        <p:cNvGrpSpPr/>
+        <p:nvPr/>
+      </p:nvGrpSpPr>
+      <p:grpSpPr/>
+      <p:sp>
+        <p:nvSpPr>
+          <p:cNvPr id="2" name="TextBox 1"/>
+          <p:cNvSpPr txBox="1"/>
+          <p:nvPr/>
+        </p:nvSpPr>
+        <p:spPr>
+          <a:xfrm>
+            <a:off x="822960" y="2743200"/>
+            <a:ext cx="10515600" cy="1371600"/>
+          </a:xfrm>
+          <a:prstGeom prst="rect">
+            <a:avLst/>
+          </a:prstGeom>
+          <a:noFill/>
+        </p:spPr>
+        <p:txBody>
+          <a:bodyPr wrap="square">
+            <a:spAutoFit/>
+          </a:bodyPr>
+          <a:lstStyle/>
           <a:p>
             <a:pPr algn="l">
               <a:lnSpc>
@@ -8417,15 +7862,150 @@
               </a:spcAft>
             </a:pPr>
             <a:r>
-              <a:rPr sz="1800" b="0">
+              <a:rPr sz="4600" b="1">
                 <a:solidFill>
                   <a:srgbClr val="FFFFFF"/>
                 </a:solidFill>
                 <a:latin typeface="Calibri"/>
               </a:rPr>
-              <a:t>Team Pilot Project · Beihang University</a:t>
-            </a:r>
-          </a:p>
+              <a:t>6 · Future Work &amp; Deployment</a:t>
+            </a:r>
+          </a:p>
+        </p:txBody>
+      </p:sp>
+      <p:sp>
+        <p:nvSpPr>
+          <p:cNvPr id="3" name="Rectangle 2"/>
+          <p:cNvSpPr/>
+          <p:nvPr/>
+        </p:nvSpPr>
+        <p:spPr>
+          <a:xfrm>
+            <a:off x="868680" y="3886200"/>
+            <a:ext cx="2926080" cy="73152"/>
+          </a:xfrm>
+          <a:prstGeom prst="rect">
+            <a:avLst/>
+          </a:prstGeom>
+          <a:solidFill>
+            <a:srgbClr val="00A0E9"/>
+          </a:solidFill>
+          <a:ln>
+            <a:noFill/>
+          </a:ln>
+        </p:spPr>
+        <p:style>
+          <a:lnRef idx="1">
+            <a:schemeClr val="accent1"/>
+          </a:lnRef>
+          <a:fillRef idx="3">
+            <a:schemeClr val="accent1"/>
+          </a:fillRef>
+          <a:effectRef idx="2">
+            <a:schemeClr val="accent1"/>
+          </a:effectRef>
+          <a:fontRef idx="minor">
+            <a:schemeClr val="lt1"/>
+          </a:fontRef>
+        </p:style>
+        <p:txBody>
+          <a:bodyPr rtlCol="0" anchor="ctr"/>
+          <a:lstStyle/>
+          <a:p>
+            <a:pPr algn="ctr"/>
+          </a:p>
+        </p:txBody>
+      </p:sp>
+    </p:spTree>
+  </p:cSld>
+  <p:clrMapOvr>
+    <a:masterClrMapping/>
+  </p:clrMapOvr>
+</p:sld>
+</file>
+
+<file path=ppt/slides/slide28.xml><?xml version="1.0" encoding="utf-8"?>
+<p:sld xmlns:a="http://schemas.openxmlformats.org/drawingml/2006/main" xmlns:p="http://schemas.openxmlformats.org/presentationml/2006/main" xmlns:r="http://schemas.openxmlformats.org/officeDocument/2006/relationships">
+  <p:cSld>
+    <p:bg>
+      <p:bgPr>
+        <a:solidFill>
+          <a:srgbClr val="F5F8FC"/>
+        </a:solidFill>
+        <a:effectLst/>
+      </p:bgPr>
+    </p:bg>
+    <p:spTree>
+      <p:nvGrpSpPr>
+        <p:cNvPr id="1" name=""/>
+        <p:cNvGrpSpPr/>
+        <p:nvPr/>
+      </p:nvGrpSpPr>
+      <p:grpSpPr/>
+      <p:sp>
+        <p:nvSpPr>
+          <p:cNvPr id="2" name="Rectangle 1"/>
+          <p:cNvSpPr/>
+          <p:nvPr/>
+        </p:nvSpPr>
+        <p:spPr>
+          <a:xfrm>
+            <a:off x="548640" y="457200"/>
+            <a:ext cx="164592" cy="822960"/>
+          </a:xfrm>
+          <a:prstGeom prst="rect">
+            <a:avLst/>
+          </a:prstGeom>
+          <a:solidFill>
+            <a:srgbClr val="005BAC"/>
+          </a:solidFill>
+          <a:ln>
+            <a:noFill/>
+          </a:ln>
+        </p:spPr>
+        <p:style>
+          <a:lnRef idx="1">
+            <a:schemeClr val="accent1"/>
+          </a:lnRef>
+          <a:fillRef idx="3">
+            <a:schemeClr val="accent1"/>
+          </a:fillRef>
+          <a:effectRef idx="2">
+            <a:schemeClr val="accent1"/>
+          </a:effectRef>
+          <a:fontRef idx="minor">
+            <a:schemeClr val="lt1"/>
+          </a:fontRef>
+        </p:style>
+        <p:txBody>
+          <a:bodyPr rtlCol="0" anchor="ctr"/>
+          <a:lstStyle/>
+          <a:p>
+            <a:pPr algn="ctr"/>
+          </a:p>
+        </p:txBody>
+      </p:sp>
+      <p:sp>
+        <p:nvSpPr>
+          <p:cNvPr id="3" name="TextBox 2"/>
+          <p:cNvSpPr txBox="1"/>
+          <p:nvPr/>
+        </p:nvSpPr>
+        <p:spPr>
+          <a:xfrm>
+            <a:off x="868680" y="411480"/>
+            <a:ext cx="10789920" cy="914400"/>
+          </a:xfrm>
+          <a:prstGeom prst="rect">
+            <a:avLst/>
+          </a:prstGeom>
+          <a:noFill/>
+        </p:spPr>
+        <p:txBody>
+          <a:bodyPr wrap="square">
+            <a:spAutoFit/>
+          </a:bodyPr>
+          <a:lstStyle/>
           <a:p>
             <a:pPr algn="l">
               <a:lnSpc>
@@ -8436,13 +8016,360 @@
               </a:spcAft>
             </a:pPr>
             <a:r>
-              <a:rPr sz="1500" b="0">
-                <a:solidFill>
-                  <a:srgbClr val="CFE3F5"/>
+              <a:rPr sz="3400" b="1">
+                <a:solidFill>
+                  <a:srgbClr val="003366"/>
                 </a:solidFill>
                 <a:latin typeface="Calibri"/>
               </a:rPr>
-              <a:t>github.com/Jorshuare/AI-Based-Prediction-for-GNSS-Signal-Degradation</a:t>
+              <a:t>Real-data EKF: from simulation to deployed navigation</a:t>
+            </a:r>
+          </a:p>
+        </p:txBody>
+      </p:sp>
+      <p:sp>
+        <p:nvSpPr>
+          <p:cNvPr id="4" name="TextBox 3"/>
+          <p:cNvSpPr txBox="1"/>
+          <p:nvPr/>
+        </p:nvSpPr>
+        <p:spPr>
+          <a:xfrm>
+            <a:off x="868680" y="1554480"/>
+            <a:ext cx="10607040" cy="4937760"/>
+          </a:xfrm>
+          <a:prstGeom prst="rect">
+            <a:avLst/>
+          </a:prstGeom>
+          <a:noFill/>
+        </p:spPr>
+        <p:txBody>
+          <a:bodyPr wrap="square">
+            <a:spAutoFit/>
+          </a:bodyPr>
+          <a:lstStyle/>
+          <a:p>
+            <a:pPr algn="l">
+              <a:lnSpc>
+                <a:spcPct val="150000"/>
+              </a:lnSpc>
+              <a:spcAft>
+                <a:spcPts val="1000"/>
+              </a:spcAft>
+            </a:pPr>
+            <a:r>
+              <a:rPr sz="2000" b="0">
+                <a:solidFill>
+                  <a:srgbClr val="1A1A1A"/>
+                </a:solidFill>
+                <a:latin typeface="Calibri"/>
+              </a:rPr>
+              <a:t>•  Current: adaptive EKF tested on controlled blockage simulation (33.8% RMSE gain).</a:t>
+            </a:r>
+          </a:p>
+          <a:p>
+            <a:pPr algn="l">
+              <a:lnSpc>
+                <a:spcPct val="150000"/>
+              </a:lnSpc>
+              <a:spcAft>
+                <a:spcPts val="1000"/>
+              </a:spcAft>
+            </a:pPr>
+            <a:r>
+              <a:rPr sz="2000" b="0">
+                <a:solidFill>
+                  <a:srgbClr val="1A1A1A"/>
+                </a:solidFill>
+                <a:latin typeface="Calibri"/>
+              </a:rPr>
+              <a:t>•  Next: integrate UrbanNav Tokyo ground-truth (reference.csv, cm-level SPAN-INS).</a:t>
+            </a:r>
+          </a:p>
+          <a:p>
+            <a:pPr algn="l">
+              <a:lnSpc>
+                <a:spcPct val="150000"/>
+              </a:lnSpc>
+              <a:spcAft>
+                <a:spcPts val="1000"/>
+              </a:spcAft>
+            </a:pPr>
+            <a:r>
+              <a:rPr sz="2000" b="0">
+                <a:solidFill>
+                  <a:srgbClr val="1A1A1A"/>
+                </a:solidFill>
+                <a:latin typeface="Calibri"/>
+              </a:rPr>
+              <a:t>•  Compute rover single-point positions (RTKLIB SPP from rover.obs), align with reference.</a:t>
+            </a:r>
+          </a:p>
+          <a:p>
+            <a:pPr algn="l">
+              <a:lnSpc>
+                <a:spcPct val="150000"/>
+              </a:lnSpc>
+              <a:spcAft>
+                <a:spcPts val="1000"/>
+              </a:spcAft>
+            </a:pPr>
+            <a:r>
+              <a:rPr sz="2000" b="0">
+                <a:solidFill>
+                  <a:srgbClr val="1A1A1A"/>
+                </a:solidFill>
+                <a:latin typeface="Calibri"/>
+              </a:rPr>
+              <a:t>•  Real-data case study: demonstrate 5–15% RMSE gain on actual urban degradation events.</a:t>
+            </a:r>
+          </a:p>
+          <a:p>
+            <a:pPr algn="l">
+              <a:lnSpc>
+                <a:spcPct val="150000"/>
+              </a:lnSpc>
+              <a:spcAft>
+                <a:spcPts val="1000"/>
+              </a:spcAft>
+            </a:pPr>
+            <a:r>
+              <a:rPr sz="2000" b="0">
+                <a:solidFill>
+                  <a:srgbClr val="005BAC"/>
+                </a:solidFill>
+                <a:latin typeface="Calibri"/>
+              </a:rPr>
+              <a:t>•  Phase 2: per-receiver EKF tuning; multi-constellation (GPS+BeiDou+Galileo).</a:t>
+            </a:r>
+          </a:p>
+        </p:txBody>
+      </p:sp>
+    </p:spTree>
+  </p:cSld>
+  <p:clrMapOvr>
+    <a:masterClrMapping/>
+  </p:clrMapOvr>
+</p:sld>
+</file>
+
+<file path=ppt/slides/slide29.xml><?xml version="1.0" encoding="utf-8"?>
+<p:sld xmlns:a="http://schemas.openxmlformats.org/drawingml/2006/main" xmlns:p="http://schemas.openxmlformats.org/presentationml/2006/main" xmlns:r="http://schemas.openxmlformats.org/officeDocument/2006/relationships">
+  <p:cSld>
+    <p:bg>
+      <p:bgPr>
+        <a:solidFill>
+          <a:srgbClr val="F5F8FC"/>
+        </a:solidFill>
+        <a:effectLst/>
+      </p:bgPr>
+    </p:bg>
+    <p:spTree>
+      <p:nvGrpSpPr>
+        <p:cNvPr id="1" name=""/>
+        <p:cNvGrpSpPr/>
+        <p:nvPr/>
+      </p:nvGrpSpPr>
+      <p:grpSpPr/>
+      <p:sp>
+        <p:nvSpPr>
+          <p:cNvPr id="2" name="Rectangle 1"/>
+          <p:cNvSpPr/>
+          <p:nvPr/>
+        </p:nvSpPr>
+        <p:spPr>
+          <a:xfrm>
+            <a:off x="548640" y="457200"/>
+            <a:ext cx="164592" cy="822960"/>
+          </a:xfrm>
+          <a:prstGeom prst="rect">
+            <a:avLst/>
+          </a:prstGeom>
+          <a:solidFill>
+            <a:srgbClr val="005BAC"/>
+          </a:solidFill>
+          <a:ln>
+            <a:noFill/>
+          </a:ln>
+        </p:spPr>
+        <p:style>
+          <a:lnRef idx="1">
+            <a:schemeClr val="accent1"/>
+          </a:lnRef>
+          <a:fillRef idx="3">
+            <a:schemeClr val="accent1"/>
+          </a:fillRef>
+          <a:effectRef idx="2">
+            <a:schemeClr val="accent1"/>
+          </a:effectRef>
+          <a:fontRef idx="minor">
+            <a:schemeClr val="lt1"/>
+          </a:fontRef>
+        </p:style>
+        <p:txBody>
+          <a:bodyPr rtlCol="0" anchor="ctr"/>
+          <a:lstStyle/>
+          <a:p>
+            <a:pPr algn="ctr"/>
+          </a:p>
+        </p:txBody>
+      </p:sp>
+      <p:sp>
+        <p:nvSpPr>
+          <p:cNvPr id="3" name="TextBox 2"/>
+          <p:cNvSpPr txBox="1"/>
+          <p:nvPr/>
+        </p:nvSpPr>
+        <p:spPr>
+          <a:xfrm>
+            <a:off x="868680" y="411480"/>
+            <a:ext cx="10789920" cy="914400"/>
+          </a:xfrm>
+          <a:prstGeom prst="rect">
+            <a:avLst/>
+          </a:prstGeom>
+          <a:noFill/>
+        </p:spPr>
+        <p:txBody>
+          <a:bodyPr wrap="square">
+            <a:spAutoFit/>
+          </a:bodyPr>
+          <a:lstStyle/>
+          <a:p>
+            <a:pPr algn="l">
+              <a:lnSpc>
+                <a:spcPct val="150000"/>
+              </a:lnSpc>
+              <a:spcAft>
+                <a:spcPts val="600"/>
+              </a:spcAft>
+            </a:pPr>
+            <a:r>
+              <a:rPr sz="3400" b="1">
+                <a:solidFill>
+                  <a:srgbClr val="003366"/>
+                </a:solidFill>
+                <a:latin typeface="Calibri"/>
+              </a:rPr>
+              <a:t>Ensemble model deployment &amp; inference pipeline</a:t>
+            </a:r>
+          </a:p>
+        </p:txBody>
+      </p:sp>
+      <p:sp>
+        <p:nvSpPr>
+          <p:cNvPr id="4" name="TextBox 3"/>
+          <p:cNvSpPr txBox="1"/>
+          <p:nvPr/>
+        </p:nvSpPr>
+        <p:spPr>
+          <a:xfrm>
+            <a:off x="868680" y="1554480"/>
+            <a:ext cx="10607040" cy="4937760"/>
+          </a:xfrm>
+          <a:prstGeom prst="rect">
+            <a:avLst/>
+          </a:prstGeom>
+          <a:noFill/>
+        </p:spPr>
+        <p:txBody>
+          <a:bodyPr wrap="square">
+            <a:spAutoFit/>
+          </a:bodyPr>
+          <a:lstStyle/>
+          <a:p>
+            <a:pPr algn="l">
+              <a:lnSpc>
+                <a:spcPct val="150000"/>
+              </a:lnSpc>
+              <a:spcAft>
+                <a:spcPts val="1000"/>
+              </a:spcAft>
+            </a:pPr>
+            <a:r>
+              <a:rPr sz="2000" b="0">
+                <a:solidFill>
+                  <a:srgbClr val="1A1A1A"/>
+                </a:solidFill>
+                <a:latin typeface="Calibri"/>
+              </a:rPr>
+              <a:t>•  Save trained XGBoost model (joblib) during training for reproducibility.</a:t>
+            </a:r>
+          </a:p>
+          <a:p>
+            <a:pPr algn="l">
+              <a:lnSpc>
+                <a:spcPct val="150000"/>
+              </a:lnSpc>
+              <a:spcAft>
+                <a:spcPts val="1000"/>
+              </a:spcAft>
+            </a:pPr>
+            <a:r>
+              <a:rPr sz="2000" b="0">
+                <a:solidFill>
+                  <a:srgbClr val="1A1A1A"/>
+                </a:solidFill>
+                <a:latin typeface="Calibri"/>
+              </a:rPr>
+              <a:t>•  inference.py supports --ensemble flag: load DL + XGB, soft-vote probabilities.</a:t>
+            </a:r>
+          </a:p>
+          <a:p>
+            <a:pPr algn="l">
+              <a:lnSpc>
+                <a:spcPct val="150000"/>
+              </a:lnSpc>
+              <a:spcAft>
+                <a:spcPts val="1000"/>
+              </a:spcAft>
+            </a:pPr>
+            <a:r>
+              <a:rPr sz="2000" b="0">
+                <a:solidFill>
+                  <a:srgbClr val="1A1A1A"/>
+                </a:solidFill>
+                <a:latin typeface="Calibri"/>
+              </a:rPr>
+              <a:t>•  End-to-end: NMEA stream → features → P(DEGRADED) +5/15/30s → EKF trajectory.</a:t>
+            </a:r>
+          </a:p>
+          <a:p>
+            <a:pPr algn="l">
+              <a:lnSpc>
+                <a:spcPct val="150000"/>
+              </a:lnSpc>
+              <a:spcAft>
+                <a:spcPts val="1000"/>
+              </a:spcAft>
+            </a:pPr>
+            <a:r>
+              <a:rPr sz="2000" b="0">
+                <a:solidFill>
+                  <a:srgbClr val="1A1A1A"/>
+                </a:solidFill>
+                <a:latin typeface="Calibri"/>
+              </a:rPr>
+              <a:t>•  Real-time capable: 0.045 ms/sample on GPU; 10 Hz stream at &lt;1% CPU.</a:t>
+            </a:r>
+          </a:p>
+          <a:p>
+            <a:pPr algn="l">
+              <a:lnSpc>
+                <a:spcPct val="150000"/>
+              </a:lnSpc>
+              <a:spcAft>
+                <a:spcPts val="1000"/>
+              </a:spcAft>
+            </a:pPr>
+            <a:r>
+              <a:rPr sz="2000" b="0">
+                <a:solidFill>
+                  <a:srgbClr val="005BAC"/>
+                </a:solidFill>
+                <a:latin typeface="Calibri"/>
+              </a:rPr>
+              <a:t>•  Phase 2b: raw per-satellite C/N₀ streams; +60s horizon retraining.</a:t>
             </a:r>
           </a:p>
         </p:txBody>
@@ -8672,6 +8599,589 @@
                 <a:latin typeface="Calibri"/>
               </a:rPr>
               <a:t>•  Our question is harder: will the signal degrade in the next 5 / 15 / 30 seconds?</a:t>
+            </a:r>
+          </a:p>
+        </p:txBody>
+      </p:sp>
+    </p:spTree>
+  </p:cSld>
+  <p:clrMapOvr>
+    <a:masterClrMapping/>
+  </p:clrMapOvr>
+</p:sld>
+</file>
+
+<file path=ppt/slides/slide30.xml><?xml version="1.0" encoding="utf-8"?>
+<p:sld xmlns:a="http://schemas.openxmlformats.org/drawingml/2006/main" xmlns:p="http://schemas.openxmlformats.org/presentationml/2006/main" xmlns:r="http://schemas.openxmlformats.org/officeDocument/2006/relationships">
+  <p:cSld>
+    <p:bg>
+      <p:bgPr>
+        <a:solidFill>
+          <a:srgbClr val="F5F8FC"/>
+        </a:solidFill>
+        <a:effectLst/>
+      </p:bgPr>
+    </p:bg>
+    <p:spTree>
+      <p:nvGrpSpPr>
+        <p:cNvPr id="1" name=""/>
+        <p:cNvGrpSpPr/>
+        <p:nvPr/>
+      </p:nvGrpSpPr>
+      <p:grpSpPr/>
+      <p:sp>
+        <p:nvSpPr>
+          <p:cNvPr id="2" name="Rectangle 1"/>
+          <p:cNvSpPr/>
+          <p:nvPr/>
+        </p:nvSpPr>
+        <p:spPr>
+          <a:xfrm>
+            <a:off x="548640" y="457200"/>
+            <a:ext cx="164592" cy="822960"/>
+          </a:xfrm>
+          <a:prstGeom prst="rect">
+            <a:avLst/>
+          </a:prstGeom>
+          <a:solidFill>
+            <a:srgbClr val="005BAC"/>
+          </a:solidFill>
+          <a:ln>
+            <a:noFill/>
+          </a:ln>
+        </p:spPr>
+        <p:style>
+          <a:lnRef idx="1">
+            <a:schemeClr val="accent1"/>
+          </a:lnRef>
+          <a:fillRef idx="3">
+            <a:schemeClr val="accent1"/>
+          </a:fillRef>
+          <a:effectRef idx="2">
+            <a:schemeClr val="accent1"/>
+          </a:effectRef>
+          <a:fontRef idx="minor">
+            <a:schemeClr val="lt1"/>
+          </a:fontRef>
+        </p:style>
+        <p:txBody>
+          <a:bodyPr rtlCol="0" anchor="ctr"/>
+          <a:lstStyle/>
+          <a:p>
+            <a:pPr algn="ctr"/>
+          </a:p>
+        </p:txBody>
+      </p:sp>
+      <p:sp>
+        <p:nvSpPr>
+          <p:cNvPr id="3" name="TextBox 2"/>
+          <p:cNvSpPr txBox="1"/>
+          <p:nvPr/>
+        </p:nvSpPr>
+        <p:spPr>
+          <a:xfrm>
+            <a:off x="868680" y="411480"/>
+            <a:ext cx="10789920" cy="914400"/>
+          </a:xfrm>
+          <a:prstGeom prst="rect">
+            <a:avLst/>
+          </a:prstGeom>
+          <a:noFill/>
+        </p:spPr>
+        <p:txBody>
+          <a:bodyPr wrap="square">
+            <a:spAutoFit/>
+          </a:bodyPr>
+          <a:lstStyle/>
+          <a:p>
+            <a:pPr algn="l">
+              <a:lnSpc>
+                <a:spcPct val="150000"/>
+              </a:lnSpc>
+              <a:spcAft>
+                <a:spcPts val="600"/>
+              </a:spcAft>
+            </a:pPr>
+            <a:r>
+              <a:rPr sz="3400" b="1">
+                <a:solidFill>
+                  <a:srgbClr val="003366"/>
+                </a:solidFill>
+                <a:latin typeface="Calibri"/>
+              </a:rPr>
+              <a:t>Web dashboard (Next.js + FastAPI)</a:t>
+            </a:r>
+          </a:p>
+        </p:txBody>
+      </p:sp>
+      <p:sp>
+        <p:nvSpPr>
+          <p:cNvPr id="4" name="TextBox 3"/>
+          <p:cNvSpPr txBox="1"/>
+          <p:nvPr/>
+        </p:nvSpPr>
+        <p:spPr>
+          <a:xfrm>
+            <a:off x="868680" y="1554480"/>
+            <a:ext cx="10607040" cy="4937760"/>
+          </a:xfrm>
+          <a:prstGeom prst="rect">
+            <a:avLst/>
+          </a:prstGeom>
+          <a:noFill/>
+        </p:spPr>
+        <p:txBody>
+          <a:bodyPr wrap="square">
+            <a:spAutoFit/>
+          </a:bodyPr>
+          <a:lstStyle/>
+          <a:p>
+            <a:pPr algn="l">
+              <a:lnSpc>
+                <a:spcPct val="150000"/>
+              </a:lnSpc>
+              <a:spcAft>
+                <a:spcPts val="1000"/>
+              </a:spcAft>
+            </a:pPr>
+            <a:r>
+              <a:rPr sz="2000" b="0">
+                <a:solidFill>
+                  <a:srgbClr val="1A1A1A"/>
+                </a:solidFill>
+                <a:latin typeface="Calibri"/>
+              </a:rPr>
+              <a:t>•  Real-time monitor: C/N₀, DOP, sat count + live 3-horizon prediction bars.</a:t>
+            </a:r>
+          </a:p>
+          <a:p>
+            <a:pPr algn="l">
+              <a:lnSpc>
+                <a:spcPct val="150000"/>
+              </a:lnSpc>
+              <a:spcAft>
+                <a:spcPts val="1000"/>
+              </a:spcAft>
+            </a:pPr>
+            <a:r>
+              <a:rPr sz="2000" b="0">
+                <a:solidFill>
+                  <a:srgbClr val="1A1A1A"/>
+                </a:solidFill>
+                <a:latin typeface="Calibri"/>
+              </a:rPr>
+              <a:t>•  Route map (Mapbox): colour-coded predicted signal quality along the planned path.</a:t>
+            </a:r>
+          </a:p>
+          <a:p>
+            <a:pPr algn="l">
+              <a:lnSpc>
+                <a:spcPct val="150000"/>
+              </a:lnSpc>
+              <a:spcAft>
+                <a:spcPts val="1000"/>
+              </a:spcAft>
+            </a:pPr>
+            <a:r>
+              <a:rPr sz="2000" b="0">
+                <a:solidFill>
+                  <a:srgbClr val="1A1A1A"/>
+                </a:solidFill>
+                <a:latin typeface="Calibri"/>
+              </a:rPr>
+              <a:t>•  Prediction timeline with lead-time annotations; attention heatmap for interpretability.</a:t>
+            </a:r>
+          </a:p>
+          <a:p>
+            <a:pPr algn="l">
+              <a:lnSpc>
+                <a:spcPct val="150000"/>
+              </a:lnSpc>
+              <a:spcAft>
+                <a:spcPts val="1000"/>
+              </a:spcAft>
+            </a:pPr>
+            <a:r>
+              <a:rPr sz="2000" b="0">
+                <a:solidFill>
+                  <a:srgbClr val="1A1A1A"/>
+                </a:solidFill>
+                <a:latin typeface="Calibri"/>
+              </a:rPr>
+              <a:t>•  DL-vs-baseline comparison; dataset explorer (149k epochs); metrics/performance board.</a:t>
+            </a:r>
+          </a:p>
+          <a:p>
+            <a:pPr algn="l">
+              <a:lnSpc>
+                <a:spcPct val="150000"/>
+              </a:lnSpc>
+              <a:spcAft>
+                <a:spcPts val="1000"/>
+              </a:spcAft>
+            </a:pPr>
+            <a:r>
+              <a:rPr sz="2000" b="0">
+                <a:solidFill>
+                  <a:srgbClr val="005BAC"/>
+                </a:solidFill>
+                <a:latin typeface="Calibri"/>
+              </a:rPr>
+              <a:t>•  Phase 2: integrate actual vehicle IMU; Kalman-filter fusion visualization.</a:t>
+            </a:r>
+          </a:p>
+        </p:txBody>
+      </p:sp>
+    </p:spTree>
+  </p:cSld>
+  <p:clrMapOvr>
+    <a:masterClrMapping/>
+  </p:clrMapOvr>
+</p:sld>
+</file>
+
+<file path=ppt/slides/slide31.xml><?xml version="1.0" encoding="utf-8"?>
+<p:sld xmlns:a="http://schemas.openxmlformats.org/drawingml/2006/main" xmlns:p="http://schemas.openxmlformats.org/presentationml/2006/main" xmlns:r="http://schemas.openxmlformats.org/officeDocument/2006/relationships">
+  <p:cSld>
+    <p:bg>
+      <p:bgPr>
+        <a:solidFill>
+          <a:srgbClr val="F5F8FC"/>
+        </a:solidFill>
+        <a:effectLst/>
+      </p:bgPr>
+    </p:bg>
+    <p:spTree>
+      <p:nvGrpSpPr>
+        <p:cNvPr id="1" name=""/>
+        <p:cNvGrpSpPr/>
+        <p:nvPr/>
+      </p:nvGrpSpPr>
+      <p:grpSpPr/>
+      <p:sp>
+        <p:nvSpPr>
+          <p:cNvPr id="2" name="Rectangle 1"/>
+          <p:cNvSpPr/>
+          <p:nvPr/>
+        </p:nvSpPr>
+        <p:spPr>
+          <a:xfrm>
+            <a:off x="548640" y="457200"/>
+            <a:ext cx="164592" cy="822960"/>
+          </a:xfrm>
+          <a:prstGeom prst="rect">
+            <a:avLst/>
+          </a:prstGeom>
+          <a:solidFill>
+            <a:srgbClr val="005BAC"/>
+          </a:solidFill>
+          <a:ln>
+            <a:noFill/>
+          </a:ln>
+        </p:spPr>
+        <p:style>
+          <a:lnRef idx="1">
+            <a:schemeClr val="accent1"/>
+          </a:lnRef>
+          <a:fillRef idx="3">
+            <a:schemeClr val="accent1"/>
+          </a:fillRef>
+          <a:effectRef idx="2">
+            <a:schemeClr val="accent1"/>
+          </a:effectRef>
+          <a:fontRef idx="minor">
+            <a:schemeClr val="lt1"/>
+          </a:fontRef>
+        </p:style>
+        <p:txBody>
+          <a:bodyPr rtlCol="0" anchor="ctr"/>
+          <a:lstStyle/>
+          <a:p>
+            <a:pPr algn="ctr"/>
+          </a:p>
+        </p:txBody>
+      </p:sp>
+      <p:sp>
+        <p:nvSpPr>
+          <p:cNvPr id="3" name="TextBox 2"/>
+          <p:cNvSpPr txBox="1"/>
+          <p:nvPr/>
+        </p:nvSpPr>
+        <p:spPr>
+          <a:xfrm>
+            <a:off x="868680" y="411480"/>
+            <a:ext cx="10789920" cy="914400"/>
+          </a:xfrm>
+          <a:prstGeom prst="rect">
+            <a:avLst/>
+          </a:prstGeom>
+          <a:noFill/>
+        </p:spPr>
+        <p:txBody>
+          <a:bodyPr wrap="square">
+            <a:spAutoFit/>
+          </a:bodyPr>
+          <a:lstStyle/>
+          <a:p>
+            <a:pPr algn="l">
+              <a:lnSpc>
+                <a:spcPct val="150000"/>
+              </a:lnSpc>
+              <a:spcAft>
+                <a:spcPts val="600"/>
+              </a:spcAft>
+            </a:pPr>
+            <a:r>
+              <a:rPr sz="3400" b="1">
+                <a:solidFill>
+                  <a:srgbClr val="003366"/>
+                </a:solidFill>
+                <a:latin typeface="Calibri"/>
+              </a:rPr>
+              <a:t>Publication &amp; reproducibility</a:t>
+            </a:r>
+          </a:p>
+        </p:txBody>
+      </p:sp>
+      <p:sp>
+        <p:nvSpPr>
+          <p:cNvPr id="4" name="TextBox 3"/>
+          <p:cNvSpPr txBox="1"/>
+          <p:nvPr/>
+        </p:nvSpPr>
+        <p:spPr>
+          <a:xfrm>
+            <a:off x="868680" y="1554480"/>
+            <a:ext cx="10607040" cy="4937760"/>
+          </a:xfrm>
+          <a:prstGeom prst="rect">
+            <a:avLst/>
+          </a:prstGeom>
+          <a:noFill/>
+        </p:spPr>
+        <p:txBody>
+          <a:bodyPr wrap="square">
+            <a:spAutoFit/>
+          </a:bodyPr>
+          <a:lstStyle/>
+          <a:p>
+            <a:pPr algn="l">
+              <a:lnSpc>
+                <a:spcPct val="150000"/>
+              </a:lnSpc>
+              <a:spcAft>
+                <a:spcPts val="1000"/>
+              </a:spcAft>
+            </a:pPr>
+            <a:r>
+              <a:rPr sz="2000" b="0">
+                <a:solidFill>
+                  <a:srgbClr val="005BAC"/>
+                </a:solidFill>
+                <a:latin typeface="Calibri"/>
+              </a:rPr>
+              <a:t>•  Paper A (GPS Solutions, Q1): method + multi-horizon + cross-receiver + cross-city.</a:t>
+            </a:r>
+          </a:p>
+          <a:p>
+            <a:pPr algn="l">
+              <a:lnSpc>
+                <a:spcPct val="150000"/>
+              </a:lnSpc>
+              <a:spcAft>
+                <a:spcPts val="1000"/>
+              </a:spcAft>
+            </a:pPr>
+            <a:r>
+              <a:rPr sz="2000" b="0">
+                <a:solidFill>
+                  <a:srgbClr val="1A1A1A"/>
+                </a:solidFill>
+                <a:latin typeface="Calibri"/>
+              </a:rPr>
+              <a:t>•  Paper B (Journal of Navigation): model comparison → ensemble selection → EKF integration.</a:t>
+            </a:r>
+          </a:p>
+          <a:p>
+            <a:pPr algn="l">
+              <a:lnSpc>
+                <a:spcPct val="150000"/>
+              </a:lnSpc>
+              <a:spcAft>
+                <a:spcPts val="1000"/>
+              </a:spcAft>
+            </a:pPr>
+            <a:r>
+              <a:rPr sz="2000" b="0">
+                <a:solidFill>
+                  <a:srgbClr val="1A1A1A"/>
+                </a:solidFill>
+                <a:latin typeface="Calibri"/>
+              </a:rPr>
+              <a:t>•  Conference (ION GNSS+ 2026): cross-city generalization result as a systems paper.</a:t>
+            </a:r>
+          </a:p>
+          <a:p>
+            <a:pPr algn="l">
+              <a:lnSpc>
+                <a:spcPct val="150000"/>
+              </a:lnSpc>
+              <a:spcAft>
+                <a:spcPts val="1000"/>
+              </a:spcAft>
+            </a:pPr>
+            <a:r>
+              <a:rPr sz="2000" b="0">
+                <a:solidFill>
+                  <a:srgbClr val="1A1A1A"/>
+                </a:solidFill>
+                <a:latin typeface="Calibri"/>
+              </a:rPr>
+              <a:t>•  Data + code release: GitHub + Zenodo (reproducible; citable DOI).</a:t>
+            </a:r>
+          </a:p>
+          <a:p>
+            <a:pPr algn="l">
+              <a:lnSpc>
+                <a:spcPct val="150000"/>
+              </a:lnSpc>
+              <a:spcAft>
+                <a:spcPts val="1000"/>
+              </a:spcAft>
+            </a:pPr>
+            <a:r>
+              <a:rPr sz="2000" b="0">
+                <a:solidFill>
+                  <a:srgbClr val="1A1A1A"/>
+                </a:solidFill>
+                <a:latin typeface="Calibri"/>
+              </a:rPr>
+              <a:t>•  All results / figures / models in results/ (zipped &amp; versioned).</a:t>
+            </a:r>
+          </a:p>
+        </p:txBody>
+      </p:sp>
+    </p:spTree>
+  </p:cSld>
+  <p:clrMapOvr>
+    <a:masterClrMapping/>
+  </p:clrMapOvr>
+</p:sld>
+</file>
+
+<file path=ppt/slides/slide32.xml><?xml version="1.0" encoding="utf-8"?>
+<p:sld xmlns:a="http://schemas.openxmlformats.org/drawingml/2006/main" xmlns:p="http://schemas.openxmlformats.org/presentationml/2006/main" xmlns:r="http://schemas.openxmlformats.org/officeDocument/2006/relationships">
+  <p:cSld>
+    <p:bg>
+      <p:bgPr>
+        <a:solidFill>
+          <a:srgbClr val="003366"/>
+        </a:solidFill>
+        <a:effectLst/>
+      </p:bgPr>
+    </p:bg>
+    <p:spTree>
+      <p:nvGrpSpPr>
+        <p:cNvPr id="1" name=""/>
+        <p:cNvGrpSpPr/>
+        <p:nvPr/>
+      </p:nvGrpSpPr>
+      <p:grpSpPr/>
+      <p:sp>
+        <p:nvSpPr>
+          <p:cNvPr id="2" name="TextBox 1"/>
+          <p:cNvSpPr txBox="1"/>
+          <p:nvPr/>
+        </p:nvSpPr>
+        <p:spPr>
+          <a:xfrm>
+            <a:off x="822960" y="2377440"/>
+            <a:ext cx="10607040" cy="1828800"/>
+          </a:xfrm>
+          <a:prstGeom prst="rect">
+            <a:avLst/>
+          </a:prstGeom>
+          <a:noFill/>
+        </p:spPr>
+        <p:txBody>
+          <a:bodyPr wrap="square">
+            <a:spAutoFit/>
+          </a:bodyPr>
+          <a:lstStyle/>
+          <a:p>
+            <a:pPr algn="l">
+              <a:lnSpc>
+                <a:spcPct val="150000"/>
+              </a:lnSpc>
+              <a:spcAft>
+                <a:spcPts val="600"/>
+              </a:spcAft>
+            </a:pPr>
+            <a:r>
+              <a:rPr sz="4600" b="1">
+                <a:solidFill>
+                  <a:srgbClr val="FFFFFF"/>
+                </a:solidFill>
+                <a:latin typeface="Calibri"/>
+              </a:rPr>
+              <a:t>Thank you</a:t>
+            </a:r>
+          </a:p>
+          <a:p>
+            <a:pPr algn="l">
+              <a:lnSpc>
+                <a:spcPct val="150000"/>
+              </a:lnSpc>
+              <a:spcAft>
+                <a:spcPts val="600"/>
+              </a:spcAft>
+            </a:pPr>
+            <a:r>
+              <a:rPr sz="2200" b="0">
+                <a:solidFill>
+                  <a:srgbClr val="E6F2FB"/>
+                </a:solidFill>
+                <a:latin typeface="Calibri"/>
+              </a:rPr>
+              <a:t>SENTINEL-GNSS — predicting GNSS degradation before it happens</a:t>
+            </a:r>
+          </a:p>
+          <a:p>
+            <a:pPr algn="l">
+              <a:lnSpc>
+                <a:spcPct val="150000"/>
+              </a:lnSpc>
+              <a:spcAft>
+                <a:spcPts val="600"/>
+              </a:spcAft>
+            </a:pPr>
+            <a:r>
+              <a:rPr sz="1800" b="0">
+                <a:solidFill>
+                  <a:srgbClr val="FFFFFF"/>
+                </a:solidFill>
+                <a:latin typeface="Calibri"/>
+              </a:rPr>
+              <a:t>Team Pilot Project · Beihang University</a:t>
+            </a:r>
+          </a:p>
+          <a:p>
+            <a:pPr algn="l">
+              <a:lnSpc>
+                <a:spcPct val="150000"/>
+              </a:lnSpc>
+              <a:spcAft>
+                <a:spcPts val="600"/>
+              </a:spcAft>
+            </a:pPr>
+            <a:r>
+              <a:rPr sz="1500" b="0">
+                <a:solidFill>
+                  <a:srgbClr val="CFE3F5"/>
+                </a:solidFill>
+                <a:latin typeface="Calibri"/>
+              </a:rPr>
+              <a:t>github.com/Jorshuare/AI-Based-Prediction-for-GNSS-Signal-Degradation</a:t>
             </a:r>
           </a:p>
         </p:txBody>
@@ -9499,7 +10009,7 @@
                             <a:srgbClr val="1A1A1A"/>
                           </a:solidFill>
                         </a:rPr>
-                        <a:t>Beijing</a:t>
+                        <a:t>Beihang</a:t>
                       </a:r>
                     </a:p>
                   </a:txBody>

--- a/proposal/Presentations/SENTINEL_GNSS_Proposal_v4.pptx
+++ b/proposal/Presentations/SENTINEL_GNSS_Proposal_v4.pptx
@@ -37,6 +37,11 @@
     <p:sldId id="285" r:id="rId36"/>
     <p:sldId id="286" r:id="rId37"/>
     <p:sldId id="287" r:id="rId38"/>
+    <p:sldId id="288" r:id="rId39"/>
+    <p:sldId id="289" r:id="rId40"/>
+    <p:sldId id="290" r:id="rId41"/>
+    <p:sldId id="291" r:id="rId42"/>
+    <p:sldId id="292" r:id="rId43"/>
   </p:sldIdLst>
   <p:sldSz cx="12191695" cy="6858000" type="screen4x3"/>
   <p:notesSz cx="6858000" cy="9144000"/>
@@ -7547,7 +7552,7 @@
                 </a:solidFill>
                 <a:latin typeface="Calibri"/>
               </a:rPr>
-              <a:t>6 · Roadmap &amp; Deliverables</a:t>
+              <a:t>5.5 · EKF: From Prediction to Position</a:t>
             </a:r>
           </a:p>
         </p:txBody>
@@ -7701,7 +7706,7 @@
                 </a:solidFill>
                 <a:latin typeface="Calibri"/>
               </a:rPr>
-              <a:t>Publication plan — 2 papers + 1 conference</a:t>
+              <a:t>How EKF Works: Predict-Update Cycle</a:t>
             </a:r>
           </a:p>
         </p:txBody>
@@ -7743,7 +7748,7 @@
                 </a:solidFill>
                 <a:latin typeface="Calibri"/>
               </a:rPr>
-              <a:t>•  Paper A (GPS Solutions, Q1): method + multi-horizon + cross-receiver + cross-city + EKF.</a:t>
+              <a:t>•  Extended Kalman Filter fuses two sources of information:</a:t>
             </a:r>
           </a:p>
           <a:p>
@@ -7762,7 +7767,7 @@
                 </a:solidFill>
                 <a:latin typeface="Calibri"/>
               </a:rPr>
-              <a:t>•  Paper B (Scientific Data / Data in Brief): the benchmark / dataset descriptor.</a:t>
+              <a:t>•  1. GNSS position measurement (noisy, but absolute positioning)</a:t>
             </a:r>
           </a:p>
           <a:p>
@@ -7781,7 +7786,7 @@
                 </a:solidFill>
                 <a:latin typeface="Calibri"/>
               </a:rPr>
-              <a:t>•  Conference (ION GNSS+ 2026): cross-city result as a short paper, later extended.</a:t>
+              <a:t>•  2. Motion model (dead-reckoning via velocity, but drifts over time)</a:t>
             </a:r>
           </a:p>
           <a:p>
@@ -7796,11 +7801,68 @@
             <a:r>
               <a:rPr sz="2000" b="0">
                 <a:solidFill>
+                  <a:srgbClr val="005BAC"/>
+                </a:solidFill>
+                <a:latin typeface="Calibri"/>
+              </a:rPr>
+              <a:t>•  The EKF pre-emptively adapts its trust in GNSS based on predicted degradation:</a:t>
+            </a:r>
+          </a:p>
+          <a:p>
+            <a:pPr algn="l">
+              <a:lnSpc>
+                <a:spcPct val="150000"/>
+              </a:lnSpc>
+              <a:spcAft>
+                <a:spcPts val="1000"/>
+              </a:spcAft>
+            </a:pPr>
+            <a:r>
+              <a:rPr sz="2000" b="0">
+                <a:solidFill>
                   <a:srgbClr val="1A1A1A"/>
                 </a:solidFill>
                 <a:latin typeface="Calibri"/>
               </a:rPr>
-              <a:t>•  Two substantial papers avoid salami-slicing and carry more impact than four thin ones.</a:t>
+              <a:t>•     • When P(DEGRADED) is high → inflate measurement noise R → lean on motion model</a:t>
+            </a:r>
+          </a:p>
+          <a:p>
+            <a:pPr algn="l">
+              <a:lnSpc>
+                <a:spcPct val="150000"/>
+              </a:lnSpc>
+              <a:spcAft>
+                <a:spcPts val="1000"/>
+              </a:spcAft>
+            </a:pPr>
+            <a:r>
+              <a:rPr sz="2000" b="0">
+                <a:solidFill>
+                  <a:srgbClr val="1A1A1A"/>
+                </a:solidFill>
+                <a:latin typeface="Calibri"/>
+              </a:rPr>
+              <a:t>•     • When P(DEGRADED) is low → normal R → use GNSS to correct drift</a:t>
+            </a:r>
+          </a:p>
+          <a:p>
+            <a:pPr algn="l">
+              <a:lnSpc>
+                <a:spcPct val="150000"/>
+              </a:lnSpc>
+              <a:spcAft>
+                <a:spcPts val="1000"/>
+              </a:spcAft>
+            </a:pPr>
+            <a:r>
+              <a:rPr sz="2000" b="0">
+                <a:solidFill>
+                  <a:srgbClr val="1A1A1A"/>
+                </a:solidFill>
+                <a:latin typeface="Calibri"/>
+              </a:rPr>
+              <a:t>•  Result: smoother trajectory during blockage, faster recovery when GNSS returns.</a:t>
             </a:r>
           </a:p>
         </p:txBody>
@@ -7819,7 +7881,7 @@
     <p:bg>
       <p:bgPr>
         <a:solidFill>
-          <a:srgbClr val="003366"/>
+          <a:srgbClr val="F5F8FC"/>
         </a:solidFill>
         <a:effectLst/>
       </p:bgPr>
@@ -7833,62 +7895,20 @@
       <p:grpSpPr/>
       <p:sp>
         <p:nvSpPr>
-          <p:cNvPr id="2" name="TextBox 1"/>
-          <p:cNvSpPr txBox="1"/>
-          <p:nvPr/>
-        </p:nvSpPr>
-        <p:spPr>
-          <a:xfrm>
-            <a:off x="822960" y="2743200"/>
-            <a:ext cx="10515600" cy="1371600"/>
-          </a:xfrm>
-          <a:prstGeom prst="rect">
-            <a:avLst/>
-          </a:prstGeom>
-          <a:noFill/>
-        </p:spPr>
-        <p:txBody>
-          <a:bodyPr wrap="square">
-            <a:spAutoFit/>
-          </a:bodyPr>
-          <a:lstStyle/>
-          <a:p>
-            <a:pPr algn="l">
-              <a:lnSpc>
-                <a:spcPct val="150000"/>
-              </a:lnSpc>
-              <a:spcAft>
-                <a:spcPts val="600"/>
-              </a:spcAft>
-            </a:pPr>
-            <a:r>
-              <a:rPr sz="4600" b="1">
-                <a:solidFill>
-                  <a:srgbClr val="FFFFFF"/>
-                </a:solidFill>
-                <a:latin typeface="Calibri"/>
-              </a:rPr>
-              <a:t>6 · Future Work &amp; Deployment</a:t>
-            </a:r>
-          </a:p>
-        </p:txBody>
-      </p:sp>
-      <p:sp>
-        <p:nvSpPr>
-          <p:cNvPr id="3" name="Rectangle 2"/>
+          <p:cNvPr id="2" name="Rectangle 1"/>
           <p:cNvSpPr/>
           <p:nvPr/>
         </p:nvSpPr>
         <p:spPr>
           <a:xfrm>
-            <a:off x="868680" y="3886200"/>
-            <a:ext cx="2926080" cy="73152"/>
+            <a:off x="548640" y="457200"/>
+            <a:ext cx="164592" cy="822960"/>
           </a:xfrm>
           <a:prstGeom prst="rect">
             <a:avLst/>
           </a:prstGeom>
           <a:solidFill>
-            <a:srgbClr val="00A0E9"/>
+            <a:srgbClr val="005BAC"/>
           </a:solidFill>
           <a:ln>
             <a:noFill/>
@@ -7913,6 +7933,114 @@
           <a:lstStyle/>
           <a:p>
             <a:pPr algn="ctr"/>
+          </a:p>
+        </p:txBody>
+      </p:sp>
+      <p:sp>
+        <p:nvSpPr>
+          <p:cNvPr id="3" name="TextBox 2"/>
+          <p:cNvSpPr txBox="1"/>
+          <p:nvPr/>
+        </p:nvSpPr>
+        <p:spPr>
+          <a:xfrm>
+            <a:off x="868680" y="411480"/>
+            <a:ext cx="10789920" cy="914400"/>
+          </a:xfrm>
+          <a:prstGeom prst="rect">
+            <a:avLst/>
+          </a:prstGeom>
+          <a:noFill/>
+        </p:spPr>
+        <p:txBody>
+          <a:bodyPr wrap="square">
+            <a:spAutoFit/>
+          </a:bodyPr>
+          <a:lstStyle/>
+          <a:p>
+            <a:pPr algn="l">
+              <a:lnSpc>
+                <a:spcPct val="150000"/>
+              </a:lnSpc>
+              <a:spcAft>
+                <a:spcPts val="600"/>
+              </a:spcAft>
+            </a:pPr>
+            <a:r>
+              <a:rPr sz="3400" b="1">
+                <a:solidFill>
+                  <a:srgbClr val="003366"/>
+                </a:solidFill>
+                <a:latin typeface="Calibri"/>
+              </a:rPr>
+              <a:t>EKF Mechanism: Predict-Update Cycle</a:t>
+            </a:r>
+          </a:p>
+        </p:txBody>
+      </p:sp>
+      <p:pic>
+        <p:nvPicPr>
+          <p:cNvPr id="4" name="Picture 3" descr="fig_ekf_mechanism_concept.png"/>
+          <p:cNvPicPr>
+            <a:picLocks noChangeAspect="1"/>
+          </p:cNvPicPr>
+          <p:nvPr/>
+        </p:nvPicPr>
+        <p:blipFill>
+          <a:blip r:embed="rId2"/>
+          <a:stretch>
+            <a:fillRect/>
+          </a:stretch>
+        </p:blipFill>
+        <p:spPr>
+          <a:xfrm>
+            <a:off x="2011680" y="1645920"/>
+            <a:ext cx="7449641" cy="4206240"/>
+          </a:xfrm>
+          <a:prstGeom prst="rect">
+            <a:avLst/>
+          </a:prstGeom>
+        </p:spPr>
+      </p:pic>
+      <p:sp>
+        <p:nvSpPr>
+          <p:cNvPr id="5" name="TextBox 4"/>
+          <p:cNvSpPr txBox="1"/>
+          <p:nvPr/>
+        </p:nvSpPr>
+        <p:spPr>
+          <a:xfrm>
+            <a:off x="868680" y="5943600"/>
+            <a:ext cx="10789920" cy="731520"/>
+          </a:xfrm>
+          <a:prstGeom prst="rect">
+            <a:avLst/>
+          </a:prstGeom>
+          <a:noFill/>
+        </p:spPr>
+        <p:txBody>
+          <a:bodyPr wrap="square">
+            <a:spAutoFit/>
+          </a:bodyPr>
+          <a:lstStyle/>
+          <a:p>
+            <a:pPr algn="l">
+              <a:lnSpc>
+                <a:spcPct val="150000"/>
+              </a:lnSpc>
+              <a:spcAft>
+                <a:spcPts val="600"/>
+              </a:spcAft>
+            </a:pPr>
+            <a:r>
+              <a:rPr sz="1500" b="0">
+                <a:solidFill>
+                  <a:srgbClr val="5A5A5A"/>
+                </a:solidFill>
+                <a:latin typeface="Calibri"/>
+              </a:rPr>
+              <a:t>EKF architecture: GNSS measurement + adaptive noise R + motion model prediction.</a:t>
+            </a:r>
           </a:p>
         </p:txBody>
       </p:sp>
@@ -8022,7 +8150,7 @@
                 </a:solidFill>
                 <a:latin typeface="Calibri"/>
               </a:rPr>
-              <a:t>Real-data EKF: from simulation to deployed navigation</a:t>
+              <a:t>Synthetic Blockage Validation (Option A)</a:t>
             </a:r>
           </a:p>
         </p:txBody>
@@ -8060,11 +8188,30 @@
             <a:r>
               <a:rPr sz="2000" b="0">
                 <a:solidFill>
+                  <a:srgbClr val="005BAC"/>
+                </a:solidFill>
+                <a:latin typeface="Calibri"/>
+              </a:rPr>
+              <a:t>•  Controlled scenario: 300-epoch trajectory with simulated GNSS blockage (epochs 120–180).</a:t>
+            </a:r>
+          </a:p>
+          <a:p>
+            <a:pPr algn="l">
+              <a:lnSpc>
+                <a:spcPct val="150000"/>
+              </a:lnSpc>
+              <a:spcAft>
+                <a:spcPts val="1000"/>
+              </a:spcAft>
+            </a:pPr>
+            <a:r>
+              <a:rPr sz="2000" b="0">
+                <a:solidFill>
                   <a:srgbClr val="1A1A1A"/>
                 </a:solidFill>
                 <a:latin typeface="Calibri"/>
               </a:rPr>
-              <a:t>•  Current: adaptive EKF tested on controlled blockage simulation (33.8% RMSE gain).</a:t>
+              <a:t>•  Predictor (our model) warns from epoch 115, allowing EKF to adapt early (proactive).</a:t>
             </a:r>
           </a:p>
           <a:p>
@@ -8079,11 +8226,30 @@
             <a:r>
               <a:rPr sz="2000" b="0">
                 <a:solidFill>
+                  <a:srgbClr val="005BAC"/>
+                </a:solidFill>
+                <a:latin typeface="Calibri"/>
+              </a:rPr>
+              <a:t>•  Results on blockage segment (epochs 120–180):</a:t>
+            </a:r>
+          </a:p>
+          <a:p>
+            <a:pPr algn="l">
+              <a:lnSpc>
+                <a:spcPct val="150000"/>
+              </a:lnSpc>
+              <a:spcAft>
+                <a:spcPts val="1000"/>
+              </a:spcAft>
+            </a:pPr>
+            <a:r>
+              <a:rPr sz="2000" b="0">
+                <a:solidFill>
                   <a:srgbClr val="1A1A1A"/>
                 </a:solidFill>
                 <a:latin typeface="Calibri"/>
               </a:rPr>
-              <a:t>•  Next: integrate UrbanNav Tokyo ground-truth (reference.csv, cm-level SPAN-INS).</a:t>
+              <a:t>•    • Raw GNSS position RMSE: 54.4 m (noisy)</a:t>
             </a:r>
           </a:p>
           <a:p>
@@ -8102,7 +8268,7 @@
                 </a:solidFill>
                 <a:latin typeface="Calibri"/>
               </a:rPr>
-              <a:t>•  Compute rover single-point positions (RTKLIB SPP from rover.obs), align with reference.</a:t>
+              <a:t>•    • Fixed-R EKF: 45.6 m (standard filter, constant trust)</a:t>
             </a:r>
           </a:p>
           <a:p>
@@ -8121,7 +8287,7 @@
                 </a:solidFill>
                 <a:latin typeface="Calibri"/>
               </a:rPr>
-              <a:t>•  Real-data case study: demonstrate 5–15% RMSE gain on actual urban degradation events.</a:t>
+              <a:t>•    • Adaptive EKF (ours): 36.0 m (-33.8% vs raw GNSS)</a:t>
             </a:r>
           </a:p>
           <a:p>
@@ -8140,7 +8306,7 @@
                 </a:solidFill>
                 <a:latin typeface="Calibri"/>
               </a:rPr>
-              <a:t>•  Phase 2: per-receiver EKF tuning; multi-constellation (GPS+BeiDou+Galileo).</a:t>
+              <a:t>•  Key insight: Prediction-aware filter outperforms fixed filter by 21% on the same GNSS data.</a:t>
             </a:r>
           </a:p>
         </p:txBody>
@@ -8251,21 +8417,83 @@
                 </a:solidFill>
                 <a:latin typeface="Calibri"/>
               </a:rPr>
-              <a:t>Ensemble model deployment &amp; inference pipeline</a:t>
-            </a:r>
-          </a:p>
-        </p:txBody>
-      </p:sp>
-      <p:sp>
-        <p:nvSpPr>
-          <p:cNvPr id="4" name="TextBox 3"/>
+              <a:t>Synthetic Blockage Results</a:t>
+            </a:r>
+          </a:p>
+        </p:txBody>
+      </p:sp>
+      <p:sp>
+        <p:nvSpPr>
+          <p:cNvPr id="4" name="Rectangle 3"/>
+          <p:cNvSpPr/>
+          <p:nvPr/>
+        </p:nvSpPr>
+        <p:spPr>
+          <a:xfrm>
+            <a:off x="2286000" y="1828800"/>
+            <a:ext cx="7589520" cy="3657600"/>
+          </a:xfrm>
+          <a:prstGeom prst="rect">
+            <a:avLst/>
+          </a:prstGeom>
+          <a:solidFill>
+            <a:srgbClr val="E3ECF5"/>
+          </a:solidFill>
+          <a:ln>
+            <a:solidFill>
+              <a:srgbClr val="005BAC"/>
+            </a:solidFill>
+          </a:ln>
+        </p:spPr>
+        <p:style>
+          <a:lnRef idx="1">
+            <a:schemeClr val="accent1"/>
+          </a:lnRef>
+          <a:fillRef idx="3">
+            <a:schemeClr val="accent1"/>
+          </a:fillRef>
+          <a:effectRef idx="2">
+            <a:schemeClr val="accent1"/>
+          </a:effectRef>
+          <a:fontRef idx="minor">
+            <a:schemeClr val="lt1"/>
+          </a:fontRef>
+        </p:style>
+        <p:txBody>
+          <a:bodyPr rtlCol="0" anchor="ctr"/>
+          <a:lstStyle/>
+          <a:p>
+            <a:pPr algn="ctr">
+              <a:lnSpc>
+                <a:spcPct val="150000"/>
+              </a:lnSpc>
+              <a:spcAft>
+                <a:spcPts val="600"/>
+              </a:spcAft>
+            </a:pPr>
+            <a:r>
+              <a:rPr sz="2000" b="1">
+                <a:solidFill>
+                  <a:srgbClr val="005BAC"/>
+                </a:solidFill>
+                <a:latin typeface="Calibri"/>
+              </a:rPr>
+              <a:t>[ INSERT FIGURE ]
+fig20_ekf_option_a_synthetic.png</a:t>
+            </a:r>
+          </a:p>
+        </p:txBody>
+      </p:sp>
+      <p:sp>
+        <p:nvSpPr>
+          <p:cNvPr id="5" name="TextBox 4"/>
           <p:cNvSpPr txBox="1"/>
           <p:nvPr/>
         </p:nvSpPr>
         <p:spPr>
           <a:xfrm>
-            <a:off x="868680" y="1554480"/>
-            <a:ext cx="10607040" cy="4937760"/>
+            <a:off x="868680" y="5943600"/>
+            <a:ext cx="10789920" cy="731520"/>
           </a:xfrm>
           <a:prstGeom prst="rect">
             <a:avLst/>
@@ -8283,93 +8511,17 @@
                 <a:spcPct val="150000"/>
               </a:lnSpc>
               <a:spcAft>
-                <a:spcPts val="1000"/>
-              </a:spcAft>
-            </a:pPr>
-            <a:r>
-              <a:rPr sz="2000" b="0">
-                <a:solidFill>
-                  <a:srgbClr val="1A1A1A"/>
-                </a:solidFill>
-                <a:latin typeface="Calibri"/>
-              </a:rPr>
-              <a:t>•  Save trained XGBoost model (joblib) during training for reproducibility.</a:t>
-            </a:r>
-          </a:p>
-          <a:p>
-            <a:pPr algn="l">
-              <a:lnSpc>
-                <a:spcPct val="150000"/>
-              </a:lnSpc>
-              <a:spcAft>
-                <a:spcPts val="1000"/>
-              </a:spcAft>
-            </a:pPr>
-            <a:r>
-              <a:rPr sz="2000" b="0">
-                <a:solidFill>
-                  <a:srgbClr val="1A1A1A"/>
-                </a:solidFill>
-                <a:latin typeface="Calibri"/>
-              </a:rPr>
-              <a:t>•  inference.py supports --ensemble flag: load DL + XGB, soft-vote probabilities.</a:t>
-            </a:r>
-          </a:p>
-          <a:p>
-            <a:pPr algn="l">
-              <a:lnSpc>
-                <a:spcPct val="150000"/>
-              </a:lnSpc>
-              <a:spcAft>
-                <a:spcPts val="1000"/>
-              </a:spcAft>
-            </a:pPr>
-            <a:r>
-              <a:rPr sz="2000" b="0">
-                <a:solidFill>
-                  <a:srgbClr val="1A1A1A"/>
-                </a:solidFill>
-                <a:latin typeface="Calibri"/>
-              </a:rPr>
-              <a:t>•  End-to-end: NMEA stream → features → P(DEGRADED) +5/15/30s → EKF trajectory.</a:t>
-            </a:r>
-          </a:p>
-          <a:p>
-            <a:pPr algn="l">
-              <a:lnSpc>
-                <a:spcPct val="150000"/>
-              </a:lnSpc>
-              <a:spcAft>
-                <a:spcPts val="1000"/>
-              </a:spcAft>
-            </a:pPr>
-            <a:r>
-              <a:rPr sz="2000" b="0">
-                <a:solidFill>
-                  <a:srgbClr val="1A1A1A"/>
-                </a:solidFill>
-                <a:latin typeface="Calibri"/>
-              </a:rPr>
-              <a:t>•  Real-time capable: 0.045 ms/sample on GPU; 10 Hz stream at &lt;1% CPU.</a:t>
-            </a:r>
-          </a:p>
-          <a:p>
-            <a:pPr algn="l">
-              <a:lnSpc>
-                <a:spcPct val="150000"/>
-              </a:lnSpc>
-              <a:spcAft>
-                <a:spcPts val="1000"/>
-              </a:spcAft>
-            </a:pPr>
-            <a:r>
-              <a:rPr sz="2000" b="0">
-                <a:solidFill>
-                  <a:srgbClr val="005BAC"/>
-                </a:solidFill>
-                <a:latin typeface="Calibri"/>
-              </a:rPr>
-              <a:t>•  Phase 2b: raw per-satellite C/N₀ streams; +60s horizon retraining.</a:t>
+                <a:spcPts val="600"/>
+              </a:spcAft>
+            </a:pPr>
+            <a:r>
+              <a:rPr sz="1500" b="0">
+                <a:solidFill>
+                  <a:srgbClr val="5A5A5A"/>
+                </a:solidFill>
+                <a:latin typeface="Calibri"/>
+              </a:rPr>
+              <a:t>Trajectory during blockage: raw GNSS (noisy) vs. fixed-R EKF vs. adaptive EKF (ours).  (drop in results/figures/fig20_ekf_option_a_synthetic.png)</a:t>
             </a:r>
           </a:p>
         </p:txBody>
@@ -8617,7 +8769,7 @@
     <p:bg>
       <p:bgPr>
         <a:solidFill>
-          <a:srgbClr val="F5F8FC"/>
+          <a:srgbClr val="003366"/>
         </a:solidFill>
         <a:effectLst/>
       </p:bgPr>
@@ -8631,20 +8783,62 @@
       <p:grpSpPr/>
       <p:sp>
         <p:nvSpPr>
-          <p:cNvPr id="2" name="Rectangle 1"/>
+          <p:cNvPr id="2" name="TextBox 1"/>
+          <p:cNvSpPr txBox="1"/>
+          <p:nvPr/>
+        </p:nvSpPr>
+        <p:spPr>
+          <a:xfrm>
+            <a:off x="822960" y="2743200"/>
+            <a:ext cx="10515600" cy="1371600"/>
+          </a:xfrm>
+          <a:prstGeom prst="rect">
+            <a:avLst/>
+          </a:prstGeom>
+          <a:noFill/>
+        </p:spPr>
+        <p:txBody>
+          <a:bodyPr wrap="square">
+            <a:spAutoFit/>
+          </a:bodyPr>
+          <a:lstStyle/>
+          <a:p>
+            <a:pPr algn="l">
+              <a:lnSpc>
+                <a:spcPct val="150000"/>
+              </a:lnSpc>
+              <a:spcAft>
+                <a:spcPts val="600"/>
+              </a:spcAft>
+            </a:pPr>
+            <a:r>
+              <a:rPr sz="4600" b="1">
+                <a:solidFill>
+                  <a:srgbClr val="FFFFFF"/>
+                </a:solidFill>
+                <a:latin typeface="Calibri"/>
+              </a:rPr>
+              <a:t>6 · Roadmap &amp; Deliverables</a:t>
+            </a:r>
+          </a:p>
+        </p:txBody>
+      </p:sp>
+      <p:sp>
+        <p:nvSpPr>
+          <p:cNvPr id="3" name="Rectangle 2"/>
           <p:cNvSpPr/>
           <p:nvPr/>
         </p:nvSpPr>
         <p:spPr>
           <a:xfrm>
-            <a:off x="548640" y="457200"/>
-            <a:ext cx="164592" cy="822960"/>
+            <a:off x="868680" y="3886200"/>
+            <a:ext cx="2926080" cy="73152"/>
           </a:xfrm>
           <a:prstGeom prst="rect">
             <a:avLst/>
           </a:prstGeom>
           <a:solidFill>
-            <a:srgbClr val="005BAC"/>
+            <a:srgbClr val="00A0E9"/>
           </a:solidFill>
           <a:ln>
             <a:noFill/>
@@ -8669,166 +8863,6 @@
           <a:lstStyle/>
           <a:p>
             <a:pPr algn="ctr"/>
-          </a:p>
-        </p:txBody>
-      </p:sp>
-      <p:sp>
-        <p:nvSpPr>
-          <p:cNvPr id="3" name="TextBox 2"/>
-          <p:cNvSpPr txBox="1"/>
-          <p:nvPr/>
-        </p:nvSpPr>
-        <p:spPr>
-          <a:xfrm>
-            <a:off x="868680" y="411480"/>
-            <a:ext cx="10789920" cy="914400"/>
-          </a:xfrm>
-          <a:prstGeom prst="rect">
-            <a:avLst/>
-          </a:prstGeom>
-          <a:noFill/>
-        </p:spPr>
-        <p:txBody>
-          <a:bodyPr wrap="square">
-            <a:spAutoFit/>
-          </a:bodyPr>
-          <a:lstStyle/>
-          <a:p>
-            <a:pPr algn="l">
-              <a:lnSpc>
-                <a:spcPct val="150000"/>
-              </a:lnSpc>
-              <a:spcAft>
-                <a:spcPts val="600"/>
-              </a:spcAft>
-            </a:pPr>
-            <a:r>
-              <a:rPr sz="3400" b="1">
-                <a:solidFill>
-                  <a:srgbClr val="003366"/>
-                </a:solidFill>
-                <a:latin typeface="Calibri"/>
-              </a:rPr>
-              <a:t>Web dashboard (Next.js + FastAPI)</a:t>
-            </a:r>
-          </a:p>
-        </p:txBody>
-      </p:sp>
-      <p:sp>
-        <p:nvSpPr>
-          <p:cNvPr id="4" name="TextBox 3"/>
-          <p:cNvSpPr txBox="1"/>
-          <p:nvPr/>
-        </p:nvSpPr>
-        <p:spPr>
-          <a:xfrm>
-            <a:off x="868680" y="1554480"/>
-            <a:ext cx="10607040" cy="4937760"/>
-          </a:xfrm>
-          <a:prstGeom prst="rect">
-            <a:avLst/>
-          </a:prstGeom>
-          <a:noFill/>
-        </p:spPr>
-        <p:txBody>
-          <a:bodyPr wrap="square">
-            <a:spAutoFit/>
-          </a:bodyPr>
-          <a:lstStyle/>
-          <a:p>
-            <a:pPr algn="l">
-              <a:lnSpc>
-                <a:spcPct val="150000"/>
-              </a:lnSpc>
-              <a:spcAft>
-                <a:spcPts val="1000"/>
-              </a:spcAft>
-            </a:pPr>
-            <a:r>
-              <a:rPr sz="2000" b="0">
-                <a:solidFill>
-                  <a:srgbClr val="1A1A1A"/>
-                </a:solidFill>
-                <a:latin typeface="Calibri"/>
-              </a:rPr>
-              <a:t>•  Real-time monitor: C/N₀, DOP, sat count + live 3-horizon prediction bars.</a:t>
-            </a:r>
-          </a:p>
-          <a:p>
-            <a:pPr algn="l">
-              <a:lnSpc>
-                <a:spcPct val="150000"/>
-              </a:lnSpc>
-              <a:spcAft>
-                <a:spcPts val="1000"/>
-              </a:spcAft>
-            </a:pPr>
-            <a:r>
-              <a:rPr sz="2000" b="0">
-                <a:solidFill>
-                  <a:srgbClr val="1A1A1A"/>
-                </a:solidFill>
-                <a:latin typeface="Calibri"/>
-              </a:rPr>
-              <a:t>•  Route map (Mapbox): colour-coded predicted signal quality along the planned path.</a:t>
-            </a:r>
-          </a:p>
-          <a:p>
-            <a:pPr algn="l">
-              <a:lnSpc>
-                <a:spcPct val="150000"/>
-              </a:lnSpc>
-              <a:spcAft>
-                <a:spcPts val="1000"/>
-              </a:spcAft>
-            </a:pPr>
-            <a:r>
-              <a:rPr sz="2000" b="0">
-                <a:solidFill>
-                  <a:srgbClr val="1A1A1A"/>
-                </a:solidFill>
-                <a:latin typeface="Calibri"/>
-              </a:rPr>
-              <a:t>•  Prediction timeline with lead-time annotations; attention heatmap for interpretability.</a:t>
-            </a:r>
-          </a:p>
-          <a:p>
-            <a:pPr algn="l">
-              <a:lnSpc>
-                <a:spcPct val="150000"/>
-              </a:lnSpc>
-              <a:spcAft>
-                <a:spcPts val="1000"/>
-              </a:spcAft>
-            </a:pPr>
-            <a:r>
-              <a:rPr sz="2000" b="0">
-                <a:solidFill>
-                  <a:srgbClr val="1A1A1A"/>
-                </a:solidFill>
-                <a:latin typeface="Calibri"/>
-              </a:rPr>
-              <a:t>•  DL-vs-baseline comparison; dataset explorer (149k epochs); metrics/performance board.</a:t>
-            </a:r>
-          </a:p>
-          <a:p>
-            <a:pPr algn="l">
-              <a:lnSpc>
-                <a:spcPct val="150000"/>
-              </a:lnSpc>
-              <a:spcAft>
-                <a:spcPts val="1000"/>
-              </a:spcAft>
-            </a:pPr>
-            <a:r>
-              <a:rPr sz="2000" b="0">
-                <a:solidFill>
-                  <a:srgbClr val="005BAC"/>
-                </a:solidFill>
-                <a:latin typeface="Calibri"/>
-              </a:rPr>
-              <a:t>•  Phase 2: integrate actual vehicle IMU; Kalman-filter fusion visualization.</a:t>
-            </a:r>
           </a:p>
         </p:txBody>
       </p:sp>
@@ -8938,7 +8972,7 @@
                 </a:solidFill>
                 <a:latin typeface="Calibri"/>
               </a:rPr>
-              <a:t>Publication &amp; reproducibility</a:t>
+              <a:t>Publication plan — 2 papers + 1 conference</a:t>
             </a:r>
           </a:p>
         </p:txBody>
@@ -8980,7 +9014,7 @@
                 </a:solidFill>
                 <a:latin typeface="Calibri"/>
               </a:rPr>
-              <a:t>•  Paper A (GPS Solutions, Q1): method + multi-horizon + cross-receiver + cross-city.</a:t>
+              <a:t>•  Paper A (GPS Solutions, Q1): method + multi-horizon + cross-receiver + cross-city + EKF.</a:t>
             </a:r>
           </a:p>
           <a:p>
@@ -8999,7 +9033,7 @@
                 </a:solidFill>
                 <a:latin typeface="Calibri"/>
               </a:rPr>
-              <a:t>•  Paper B (Journal of Navigation): model comparison → ensemble selection → EKF integration.</a:t>
+              <a:t>•  Paper B (Scientific Data / Data in Brief): the benchmark / dataset descriptor.</a:t>
             </a:r>
           </a:p>
           <a:p>
@@ -9018,7 +9052,7 @@
                 </a:solidFill>
                 <a:latin typeface="Calibri"/>
               </a:rPr>
-              <a:t>•  Conference (ION GNSS+ 2026): cross-city generalization result as a systems paper.</a:t>
+              <a:t>•  Conference (ION GNSS+ 2026): cross-city result as a short paper, later extended.</a:t>
             </a:r>
           </a:p>
           <a:p>
@@ -9037,26 +9071,7 @@
                 </a:solidFill>
                 <a:latin typeface="Calibri"/>
               </a:rPr>
-              <a:t>•  Data + code release: GitHub + Zenodo (reproducible; citable DOI).</a:t>
-            </a:r>
-          </a:p>
-          <a:p>
-            <a:pPr algn="l">
-              <a:lnSpc>
-                <a:spcPct val="150000"/>
-              </a:lnSpc>
-              <a:spcAft>
-                <a:spcPts val="1000"/>
-              </a:spcAft>
-            </a:pPr>
-            <a:r>
-              <a:rPr sz="2000" b="0">
-                <a:solidFill>
-                  <a:srgbClr val="1A1A1A"/>
-                </a:solidFill>
-                <a:latin typeface="Calibri"/>
-              </a:rPr>
-              <a:t>•  All results / figures / models in results/ (zipped &amp; versioned).</a:t>
+              <a:t>•  Two substantial papers avoid salami-slicing and carry more impact than four thin ones.</a:t>
             </a:r>
           </a:p>
         </p:txBody>
@@ -9070,6 +9085,1147 @@
 </file>
 
 <file path=ppt/slides/slide32.xml><?xml version="1.0" encoding="utf-8"?>
+<p:sld xmlns:a="http://schemas.openxmlformats.org/drawingml/2006/main" xmlns:p="http://schemas.openxmlformats.org/presentationml/2006/main" xmlns:r="http://schemas.openxmlformats.org/officeDocument/2006/relationships">
+  <p:cSld>
+    <p:bg>
+      <p:bgPr>
+        <a:solidFill>
+          <a:srgbClr val="003366"/>
+        </a:solidFill>
+        <a:effectLst/>
+      </p:bgPr>
+    </p:bg>
+    <p:spTree>
+      <p:nvGrpSpPr>
+        <p:cNvPr id="1" name=""/>
+        <p:cNvGrpSpPr/>
+        <p:nvPr/>
+      </p:nvGrpSpPr>
+      <p:grpSpPr/>
+      <p:sp>
+        <p:nvSpPr>
+          <p:cNvPr id="2" name="TextBox 1"/>
+          <p:cNvSpPr txBox="1"/>
+          <p:nvPr/>
+        </p:nvSpPr>
+        <p:spPr>
+          <a:xfrm>
+            <a:off x="822960" y="2743200"/>
+            <a:ext cx="10515600" cy="1371600"/>
+          </a:xfrm>
+          <a:prstGeom prst="rect">
+            <a:avLst/>
+          </a:prstGeom>
+          <a:noFill/>
+        </p:spPr>
+        <p:txBody>
+          <a:bodyPr wrap="square">
+            <a:spAutoFit/>
+          </a:bodyPr>
+          <a:lstStyle/>
+          <a:p>
+            <a:pPr algn="l">
+              <a:lnSpc>
+                <a:spcPct val="150000"/>
+              </a:lnSpc>
+              <a:spcAft>
+                <a:spcPts val="600"/>
+              </a:spcAft>
+            </a:pPr>
+            <a:r>
+              <a:rPr sz="4600" b="1">
+                <a:solidFill>
+                  <a:srgbClr val="FFFFFF"/>
+                </a:solidFill>
+                <a:latin typeface="Calibri"/>
+              </a:rPr>
+              <a:t>6 · Future Work &amp; Deployment</a:t>
+            </a:r>
+          </a:p>
+        </p:txBody>
+      </p:sp>
+      <p:sp>
+        <p:nvSpPr>
+          <p:cNvPr id="3" name="Rectangle 2"/>
+          <p:cNvSpPr/>
+          <p:nvPr/>
+        </p:nvSpPr>
+        <p:spPr>
+          <a:xfrm>
+            <a:off x="868680" y="3886200"/>
+            <a:ext cx="2926080" cy="73152"/>
+          </a:xfrm>
+          <a:prstGeom prst="rect">
+            <a:avLst/>
+          </a:prstGeom>
+          <a:solidFill>
+            <a:srgbClr val="00A0E9"/>
+          </a:solidFill>
+          <a:ln>
+            <a:noFill/>
+          </a:ln>
+        </p:spPr>
+        <p:style>
+          <a:lnRef idx="1">
+            <a:schemeClr val="accent1"/>
+          </a:lnRef>
+          <a:fillRef idx="3">
+            <a:schemeClr val="accent1"/>
+          </a:fillRef>
+          <a:effectRef idx="2">
+            <a:schemeClr val="accent1"/>
+          </a:effectRef>
+          <a:fontRef idx="minor">
+            <a:schemeClr val="lt1"/>
+          </a:fontRef>
+        </p:style>
+        <p:txBody>
+          <a:bodyPr rtlCol="0" anchor="ctr"/>
+          <a:lstStyle/>
+          <a:p>
+            <a:pPr algn="ctr"/>
+          </a:p>
+        </p:txBody>
+      </p:sp>
+    </p:spTree>
+  </p:cSld>
+  <p:clrMapOvr>
+    <a:masterClrMapping/>
+  </p:clrMapOvr>
+</p:sld>
+</file>
+
+<file path=ppt/slides/slide33.xml><?xml version="1.0" encoding="utf-8"?>
+<p:sld xmlns:a="http://schemas.openxmlformats.org/drawingml/2006/main" xmlns:p="http://schemas.openxmlformats.org/presentationml/2006/main" xmlns:r="http://schemas.openxmlformats.org/officeDocument/2006/relationships">
+  <p:cSld>
+    <p:bg>
+      <p:bgPr>
+        <a:solidFill>
+          <a:srgbClr val="F5F8FC"/>
+        </a:solidFill>
+        <a:effectLst/>
+      </p:bgPr>
+    </p:bg>
+    <p:spTree>
+      <p:nvGrpSpPr>
+        <p:cNvPr id="1" name=""/>
+        <p:cNvGrpSpPr/>
+        <p:nvPr/>
+      </p:nvGrpSpPr>
+      <p:grpSpPr/>
+      <p:sp>
+        <p:nvSpPr>
+          <p:cNvPr id="2" name="Rectangle 1"/>
+          <p:cNvSpPr/>
+          <p:nvPr/>
+        </p:nvSpPr>
+        <p:spPr>
+          <a:xfrm>
+            <a:off x="548640" y="457200"/>
+            <a:ext cx="164592" cy="822960"/>
+          </a:xfrm>
+          <a:prstGeom prst="rect">
+            <a:avLst/>
+          </a:prstGeom>
+          <a:solidFill>
+            <a:srgbClr val="005BAC"/>
+          </a:solidFill>
+          <a:ln>
+            <a:noFill/>
+          </a:ln>
+        </p:spPr>
+        <p:style>
+          <a:lnRef idx="1">
+            <a:schemeClr val="accent1"/>
+          </a:lnRef>
+          <a:fillRef idx="3">
+            <a:schemeClr val="accent1"/>
+          </a:fillRef>
+          <a:effectRef idx="2">
+            <a:schemeClr val="accent1"/>
+          </a:effectRef>
+          <a:fontRef idx="minor">
+            <a:schemeClr val="lt1"/>
+          </a:fontRef>
+        </p:style>
+        <p:txBody>
+          <a:bodyPr rtlCol="0" anchor="ctr"/>
+          <a:lstStyle/>
+          <a:p>
+            <a:pPr algn="ctr"/>
+          </a:p>
+        </p:txBody>
+      </p:sp>
+      <p:sp>
+        <p:nvSpPr>
+          <p:cNvPr id="3" name="TextBox 2"/>
+          <p:cNvSpPr txBox="1"/>
+          <p:nvPr/>
+        </p:nvSpPr>
+        <p:spPr>
+          <a:xfrm>
+            <a:off x="868680" y="411480"/>
+            <a:ext cx="10789920" cy="914400"/>
+          </a:xfrm>
+          <a:prstGeom prst="rect">
+            <a:avLst/>
+          </a:prstGeom>
+          <a:noFill/>
+        </p:spPr>
+        <p:txBody>
+          <a:bodyPr wrap="square">
+            <a:spAutoFit/>
+          </a:bodyPr>
+          <a:lstStyle/>
+          <a:p>
+            <a:pPr algn="l">
+              <a:lnSpc>
+                <a:spcPct val="150000"/>
+              </a:lnSpc>
+              <a:spcAft>
+                <a:spcPts val="600"/>
+              </a:spcAft>
+            </a:pPr>
+            <a:r>
+              <a:rPr sz="3400" b="1">
+                <a:solidFill>
+                  <a:srgbClr val="003366"/>
+                </a:solidFill>
+                <a:latin typeface="Calibri"/>
+              </a:rPr>
+              <a:t>Real-data EKF: from simulation to deployed navigation (Option B, Phase 2a)</a:t>
+            </a:r>
+          </a:p>
+        </p:txBody>
+      </p:sp>
+      <p:sp>
+        <p:nvSpPr>
+          <p:cNvPr id="4" name="TextBox 3"/>
+          <p:cNvSpPr txBox="1"/>
+          <p:nvPr/>
+        </p:nvSpPr>
+        <p:spPr>
+          <a:xfrm>
+            <a:off x="868680" y="1554480"/>
+            <a:ext cx="10607040" cy="4937760"/>
+          </a:xfrm>
+          <a:prstGeom prst="rect">
+            <a:avLst/>
+          </a:prstGeom>
+          <a:noFill/>
+        </p:spPr>
+        <p:txBody>
+          <a:bodyPr wrap="square">
+            <a:spAutoFit/>
+          </a:bodyPr>
+          <a:lstStyle/>
+          <a:p>
+            <a:pPr algn="l">
+              <a:lnSpc>
+                <a:spcPct val="150000"/>
+              </a:lnSpc>
+              <a:spcAft>
+                <a:spcPts val="1000"/>
+              </a:spcAft>
+            </a:pPr>
+            <a:r>
+              <a:rPr sz="2000" b="0">
+                <a:solidFill>
+                  <a:srgbClr val="005BAC"/>
+                </a:solidFill>
+                <a:latin typeface="Calibri"/>
+              </a:rPr>
+              <a:t>•  Why UrbanNav Tokyo for validation?</a:t>
+            </a:r>
+          </a:p>
+          <a:p>
+            <a:pPr algn="l">
+              <a:lnSpc>
+                <a:spcPct val="150000"/>
+              </a:lnSpc>
+              <a:spcAft>
+                <a:spcPts val="1000"/>
+              </a:spcAft>
+            </a:pPr>
+            <a:r>
+              <a:rPr sz="2000" b="0">
+                <a:solidFill>
+                  <a:srgbClr val="1A1A1A"/>
+                </a:solidFill>
+                <a:latin typeface="Calibri"/>
+              </a:rPr>
+              <a:t>•    • UrbanNav provides cm-level ground truth (SPAN-INS post-processed trajectory in reference.csv)</a:t>
+            </a:r>
+          </a:p>
+          <a:p>
+            <a:pPr algn="l">
+              <a:lnSpc>
+                <a:spcPct val="150000"/>
+              </a:lnSpc>
+              <a:spcAft>
+                <a:spcPts val="1000"/>
+              </a:spcAft>
+            </a:pPr>
+            <a:r>
+              <a:rPr sz="2000" b="0">
+                <a:solidFill>
+                  <a:srgbClr val="1A1A1A"/>
+                </a:solidFill>
+                <a:latin typeface="Calibri"/>
+              </a:rPr>
+              <a:t>•    • Real GNSS data with actual urban blockage events (not synthetic)</a:t>
+            </a:r>
+          </a:p>
+          <a:p>
+            <a:pPr algn="l">
+              <a:lnSpc>
+                <a:spcPct val="150000"/>
+              </a:lnSpc>
+              <a:spcAft>
+                <a:spcPts val="1000"/>
+              </a:spcAft>
+            </a:pPr>
+            <a:r>
+              <a:rPr sz="2000" b="0">
+                <a:solidFill>
+                  <a:srgbClr val="1A1A1A"/>
+                </a:solidFill>
+                <a:latin typeface="Calibri"/>
+              </a:rPr>
+              <a:t>•    • Real IMU data (accelerometer + gyro) for 9-state EKF integration</a:t>
+            </a:r>
+          </a:p>
+          <a:p>
+            <a:pPr algn="l">
+              <a:lnSpc>
+                <a:spcPct val="150000"/>
+              </a:lnSpc>
+              <a:spcAft>
+                <a:spcPts val="1000"/>
+              </a:spcAft>
+            </a:pPr>
+            <a:r>
+              <a:rPr sz="2000" b="0">
+                <a:solidFill>
+                  <a:srgbClr val="1A1A1A"/>
+                </a:solidFill>
+                <a:latin typeface="Calibri"/>
+              </a:rPr>
+              <a:t>•    • Unseen city (cross-city test) — same as our model validation</a:t>
+            </a:r>
+          </a:p>
+          <a:p>
+            <a:pPr algn="l">
+              <a:lnSpc>
+                <a:spcPct val="150000"/>
+              </a:lnSpc>
+              <a:spcAft>
+                <a:spcPts val="1000"/>
+              </a:spcAft>
+            </a:pPr>
+            <a:r>
+              <a:rPr sz="2000" b="0">
+                <a:solidFill>
+                  <a:srgbClr val="005BAC"/>
+                </a:solidFill>
+                <a:latin typeface="Calibri"/>
+              </a:rPr>
+              <a:t>•  What we'll do:</a:t>
+            </a:r>
+          </a:p>
+          <a:p>
+            <a:pPr algn="l">
+              <a:lnSpc>
+                <a:spcPct val="150000"/>
+              </a:lnSpc>
+              <a:spcAft>
+                <a:spcPts val="1000"/>
+              </a:spcAft>
+            </a:pPr>
+            <a:r>
+              <a:rPr sz="2000" b="0">
+                <a:solidFill>
+                  <a:srgbClr val="1A1A1A"/>
+                </a:solidFill>
+                <a:latin typeface="Calibri"/>
+              </a:rPr>
+              <a:t>•    1. Parse rover GNSS (RINEX) → single-point positions</a:t>
+            </a:r>
+          </a:p>
+          <a:p>
+            <a:pPr algn="l">
+              <a:lnSpc>
+                <a:spcPct val="150000"/>
+              </a:lnSpc>
+              <a:spcAft>
+                <a:spcPts val="1000"/>
+              </a:spcAft>
+            </a:pPr>
+            <a:r>
+              <a:rPr sz="2000" b="0">
+                <a:solidFill>
+                  <a:srgbClr val="1A1A1A"/>
+                </a:solidFill>
+                <a:latin typeface="Calibri"/>
+              </a:rPr>
+              <a:t>•    2. Parse IMU (imu.csv) and reference trajectory (reference.csv)</a:t>
+            </a:r>
+          </a:p>
+          <a:p>
+            <a:pPr algn="l">
+              <a:lnSpc>
+                <a:spcPct val="150000"/>
+              </a:lnSpc>
+              <a:spcAft>
+                <a:spcPts val="1000"/>
+              </a:spcAft>
+            </a:pPr>
+            <a:r>
+              <a:rPr sz="2000" b="0">
+                <a:solidFill>
+                  <a:srgbClr val="1A1A1A"/>
+                </a:solidFill>
+                <a:latin typeface="Calibri"/>
+              </a:rPr>
+              <a:t>•    3. Run 9-state EKF (IMU-driven prediction, GNSS update) with adaptive R</a:t>
+            </a:r>
+          </a:p>
+          <a:p>
+            <a:pPr algn="l">
+              <a:lnSpc>
+                <a:spcPct val="150000"/>
+              </a:lnSpc>
+              <a:spcAft>
+                <a:spcPts val="1000"/>
+              </a:spcAft>
+            </a:pPr>
+            <a:r>
+              <a:rPr sz="2000" b="0">
+                <a:solidFill>
+                  <a:srgbClr val="1A1A1A"/>
+                </a:solidFill>
+                <a:latin typeface="Calibri"/>
+              </a:rPr>
+              <a:t>•    4. Compute real RMSE gain (expected: 15–30% during actual blockage)</a:t>
+            </a:r>
+          </a:p>
+          <a:p>
+            <a:pPr algn="l">
+              <a:lnSpc>
+                <a:spcPct val="150000"/>
+              </a:lnSpc>
+              <a:spcAft>
+                <a:spcPts val="1000"/>
+              </a:spcAft>
+            </a:pPr>
+            <a:r>
+              <a:rPr sz="2000" b="0">
+                <a:solidFill>
+                  <a:srgbClr val="1A1A1A"/>
+                </a:solidFill>
+                <a:latin typeface="Calibri"/>
+              </a:rPr>
+              <a:t>•  Result: honest real-world validation (no synthetic assumptions).</a:t>
+            </a:r>
+          </a:p>
+        </p:txBody>
+      </p:sp>
+    </p:spTree>
+  </p:cSld>
+  <p:clrMapOvr>
+    <a:masterClrMapping/>
+  </p:clrMapOvr>
+</p:sld>
+</file>
+
+<file path=ppt/slides/slide34.xml><?xml version="1.0" encoding="utf-8"?>
+<p:sld xmlns:a="http://schemas.openxmlformats.org/drawingml/2006/main" xmlns:p="http://schemas.openxmlformats.org/presentationml/2006/main" xmlns:r="http://schemas.openxmlformats.org/officeDocument/2006/relationships">
+  <p:cSld>
+    <p:bg>
+      <p:bgPr>
+        <a:solidFill>
+          <a:srgbClr val="F5F8FC"/>
+        </a:solidFill>
+        <a:effectLst/>
+      </p:bgPr>
+    </p:bg>
+    <p:spTree>
+      <p:nvGrpSpPr>
+        <p:cNvPr id="1" name=""/>
+        <p:cNvGrpSpPr/>
+        <p:nvPr/>
+      </p:nvGrpSpPr>
+      <p:grpSpPr/>
+      <p:sp>
+        <p:nvSpPr>
+          <p:cNvPr id="2" name="Rectangle 1"/>
+          <p:cNvSpPr/>
+          <p:nvPr/>
+        </p:nvSpPr>
+        <p:spPr>
+          <a:xfrm>
+            <a:off x="548640" y="457200"/>
+            <a:ext cx="164592" cy="822960"/>
+          </a:xfrm>
+          <a:prstGeom prst="rect">
+            <a:avLst/>
+          </a:prstGeom>
+          <a:solidFill>
+            <a:srgbClr val="005BAC"/>
+          </a:solidFill>
+          <a:ln>
+            <a:noFill/>
+          </a:ln>
+        </p:spPr>
+        <p:style>
+          <a:lnRef idx="1">
+            <a:schemeClr val="accent1"/>
+          </a:lnRef>
+          <a:fillRef idx="3">
+            <a:schemeClr val="accent1"/>
+          </a:fillRef>
+          <a:effectRef idx="2">
+            <a:schemeClr val="accent1"/>
+          </a:effectRef>
+          <a:fontRef idx="minor">
+            <a:schemeClr val="lt1"/>
+          </a:fontRef>
+        </p:style>
+        <p:txBody>
+          <a:bodyPr rtlCol="0" anchor="ctr"/>
+          <a:lstStyle/>
+          <a:p>
+            <a:pPr algn="ctr"/>
+          </a:p>
+        </p:txBody>
+      </p:sp>
+      <p:sp>
+        <p:nvSpPr>
+          <p:cNvPr id="3" name="TextBox 2"/>
+          <p:cNvSpPr txBox="1"/>
+          <p:nvPr/>
+        </p:nvSpPr>
+        <p:spPr>
+          <a:xfrm>
+            <a:off x="868680" y="411480"/>
+            <a:ext cx="10789920" cy="914400"/>
+          </a:xfrm>
+          <a:prstGeom prst="rect">
+            <a:avLst/>
+          </a:prstGeom>
+          <a:noFill/>
+        </p:spPr>
+        <p:txBody>
+          <a:bodyPr wrap="square">
+            <a:spAutoFit/>
+          </a:bodyPr>
+          <a:lstStyle/>
+          <a:p>
+            <a:pPr algn="l">
+              <a:lnSpc>
+                <a:spcPct val="150000"/>
+              </a:lnSpc>
+              <a:spcAft>
+                <a:spcPts val="600"/>
+              </a:spcAft>
+            </a:pPr>
+            <a:r>
+              <a:rPr sz="3400" b="1">
+                <a:solidFill>
+                  <a:srgbClr val="003366"/>
+                </a:solidFill>
+                <a:latin typeface="Calibri"/>
+              </a:rPr>
+              <a:t>Ensemble model deployment &amp; inference pipeline</a:t>
+            </a:r>
+          </a:p>
+        </p:txBody>
+      </p:sp>
+      <p:sp>
+        <p:nvSpPr>
+          <p:cNvPr id="4" name="TextBox 3"/>
+          <p:cNvSpPr txBox="1"/>
+          <p:nvPr/>
+        </p:nvSpPr>
+        <p:spPr>
+          <a:xfrm>
+            <a:off x="868680" y="1554480"/>
+            <a:ext cx="10607040" cy="4937760"/>
+          </a:xfrm>
+          <a:prstGeom prst="rect">
+            <a:avLst/>
+          </a:prstGeom>
+          <a:noFill/>
+        </p:spPr>
+        <p:txBody>
+          <a:bodyPr wrap="square">
+            <a:spAutoFit/>
+          </a:bodyPr>
+          <a:lstStyle/>
+          <a:p>
+            <a:pPr algn="l">
+              <a:lnSpc>
+                <a:spcPct val="150000"/>
+              </a:lnSpc>
+              <a:spcAft>
+                <a:spcPts val="1000"/>
+              </a:spcAft>
+            </a:pPr>
+            <a:r>
+              <a:rPr sz="2000" b="0">
+                <a:solidFill>
+                  <a:srgbClr val="1A1A1A"/>
+                </a:solidFill>
+                <a:latin typeface="Calibri"/>
+              </a:rPr>
+              <a:t>•  Save trained XGBoost model (joblib) during training for reproducibility.</a:t>
+            </a:r>
+          </a:p>
+          <a:p>
+            <a:pPr algn="l">
+              <a:lnSpc>
+                <a:spcPct val="150000"/>
+              </a:lnSpc>
+              <a:spcAft>
+                <a:spcPts val="1000"/>
+              </a:spcAft>
+            </a:pPr>
+            <a:r>
+              <a:rPr sz="2000" b="0">
+                <a:solidFill>
+                  <a:srgbClr val="1A1A1A"/>
+                </a:solidFill>
+                <a:latin typeface="Calibri"/>
+              </a:rPr>
+              <a:t>•  inference.py supports --ensemble flag: load DL + XGB, soft-vote probabilities.</a:t>
+            </a:r>
+          </a:p>
+          <a:p>
+            <a:pPr algn="l">
+              <a:lnSpc>
+                <a:spcPct val="150000"/>
+              </a:lnSpc>
+              <a:spcAft>
+                <a:spcPts val="1000"/>
+              </a:spcAft>
+            </a:pPr>
+            <a:r>
+              <a:rPr sz="2000" b="0">
+                <a:solidFill>
+                  <a:srgbClr val="1A1A1A"/>
+                </a:solidFill>
+                <a:latin typeface="Calibri"/>
+              </a:rPr>
+              <a:t>•  End-to-end: NMEA stream → features → P(DEGRADED) +5/15/30s → EKF trajectory.</a:t>
+            </a:r>
+          </a:p>
+          <a:p>
+            <a:pPr algn="l">
+              <a:lnSpc>
+                <a:spcPct val="150000"/>
+              </a:lnSpc>
+              <a:spcAft>
+                <a:spcPts val="1000"/>
+              </a:spcAft>
+            </a:pPr>
+            <a:r>
+              <a:rPr sz="2000" b="0">
+                <a:solidFill>
+                  <a:srgbClr val="1A1A1A"/>
+                </a:solidFill>
+                <a:latin typeface="Calibri"/>
+              </a:rPr>
+              <a:t>•  Real-time capable: 0.045 ms/sample on GPU; 10 Hz stream at &lt;1% CPU.</a:t>
+            </a:r>
+          </a:p>
+          <a:p>
+            <a:pPr algn="l">
+              <a:lnSpc>
+                <a:spcPct val="150000"/>
+              </a:lnSpc>
+              <a:spcAft>
+                <a:spcPts val="1000"/>
+              </a:spcAft>
+            </a:pPr>
+            <a:r>
+              <a:rPr sz="2000" b="0">
+                <a:solidFill>
+                  <a:srgbClr val="005BAC"/>
+                </a:solidFill>
+                <a:latin typeface="Calibri"/>
+              </a:rPr>
+              <a:t>•  Phase 2b: raw per-satellite C/N₀ streams; +60s horizon retraining.</a:t>
+            </a:r>
+          </a:p>
+        </p:txBody>
+      </p:sp>
+    </p:spTree>
+  </p:cSld>
+  <p:clrMapOvr>
+    <a:masterClrMapping/>
+  </p:clrMapOvr>
+</p:sld>
+</file>
+
+<file path=ppt/slides/slide35.xml><?xml version="1.0" encoding="utf-8"?>
+<p:sld xmlns:a="http://schemas.openxmlformats.org/drawingml/2006/main" xmlns:p="http://schemas.openxmlformats.org/presentationml/2006/main" xmlns:r="http://schemas.openxmlformats.org/officeDocument/2006/relationships">
+  <p:cSld>
+    <p:bg>
+      <p:bgPr>
+        <a:solidFill>
+          <a:srgbClr val="F5F8FC"/>
+        </a:solidFill>
+        <a:effectLst/>
+      </p:bgPr>
+    </p:bg>
+    <p:spTree>
+      <p:nvGrpSpPr>
+        <p:cNvPr id="1" name=""/>
+        <p:cNvGrpSpPr/>
+        <p:nvPr/>
+      </p:nvGrpSpPr>
+      <p:grpSpPr/>
+      <p:sp>
+        <p:nvSpPr>
+          <p:cNvPr id="2" name="Rectangle 1"/>
+          <p:cNvSpPr/>
+          <p:nvPr/>
+        </p:nvSpPr>
+        <p:spPr>
+          <a:xfrm>
+            <a:off x="548640" y="457200"/>
+            <a:ext cx="164592" cy="822960"/>
+          </a:xfrm>
+          <a:prstGeom prst="rect">
+            <a:avLst/>
+          </a:prstGeom>
+          <a:solidFill>
+            <a:srgbClr val="005BAC"/>
+          </a:solidFill>
+          <a:ln>
+            <a:noFill/>
+          </a:ln>
+        </p:spPr>
+        <p:style>
+          <a:lnRef idx="1">
+            <a:schemeClr val="accent1"/>
+          </a:lnRef>
+          <a:fillRef idx="3">
+            <a:schemeClr val="accent1"/>
+          </a:fillRef>
+          <a:effectRef idx="2">
+            <a:schemeClr val="accent1"/>
+          </a:effectRef>
+          <a:fontRef idx="minor">
+            <a:schemeClr val="lt1"/>
+          </a:fontRef>
+        </p:style>
+        <p:txBody>
+          <a:bodyPr rtlCol="0" anchor="ctr"/>
+          <a:lstStyle/>
+          <a:p>
+            <a:pPr algn="ctr"/>
+          </a:p>
+        </p:txBody>
+      </p:sp>
+      <p:sp>
+        <p:nvSpPr>
+          <p:cNvPr id="3" name="TextBox 2"/>
+          <p:cNvSpPr txBox="1"/>
+          <p:nvPr/>
+        </p:nvSpPr>
+        <p:spPr>
+          <a:xfrm>
+            <a:off x="868680" y="411480"/>
+            <a:ext cx="10789920" cy="914400"/>
+          </a:xfrm>
+          <a:prstGeom prst="rect">
+            <a:avLst/>
+          </a:prstGeom>
+          <a:noFill/>
+        </p:spPr>
+        <p:txBody>
+          <a:bodyPr wrap="square">
+            <a:spAutoFit/>
+          </a:bodyPr>
+          <a:lstStyle/>
+          <a:p>
+            <a:pPr algn="l">
+              <a:lnSpc>
+                <a:spcPct val="150000"/>
+              </a:lnSpc>
+              <a:spcAft>
+                <a:spcPts val="600"/>
+              </a:spcAft>
+            </a:pPr>
+            <a:r>
+              <a:rPr sz="3400" b="1">
+                <a:solidFill>
+                  <a:srgbClr val="003366"/>
+                </a:solidFill>
+                <a:latin typeface="Calibri"/>
+              </a:rPr>
+              <a:t>Web dashboard (Next.js + FastAPI)</a:t>
+            </a:r>
+          </a:p>
+        </p:txBody>
+      </p:sp>
+      <p:sp>
+        <p:nvSpPr>
+          <p:cNvPr id="4" name="TextBox 3"/>
+          <p:cNvSpPr txBox="1"/>
+          <p:nvPr/>
+        </p:nvSpPr>
+        <p:spPr>
+          <a:xfrm>
+            <a:off x="868680" y="1554480"/>
+            <a:ext cx="10607040" cy="4937760"/>
+          </a:xfrm>
+          <a:prstGeom prst="rect">
+            <a:avLst/>
+          </a:prstGeom>
+          <a:noFill/>
+        </p:spPr>
+        <p:txBody>
+          <a:bodyPr wrap="square">
+            <a:spAutoFit/>
+          </a:bodyPr>
+          <a:lstStyle/>
+          <a:p>
+            <a:pPr algn="l">
+              <a:lnSpc>
+                <a:spcPct val="150000"/>
+              </a:lnSpc>
+              <a:spcAft>
+                <a:spcPts val="1000"/>
+              </a:spcAft>
+            </a:pPr>
+            <a:r>
+              <a:rPr sz="2000" b="0">
+                <a:solidFill>
+                  <a:srgbClr val="1A1A1A"/>
+                </a:solidFill>
+                <a:latin typeface="Calibri"/>
+              </a:rPr>
+              <a:t>•  Real-time monitor: C/N₀, DOP, sat count + live 3-horizon prediction bars.</a:t>
+            </a:r>
+          </a:p>
+          <a:p>
+            <a:pPr algn="l">
+              <a:lnSpc>
+                <a:spcPct val="150000"/>
+              </a:lnSpc>
+              <a:spcAft>
+                <a:spcPts val="1000"/>
+              </a:spcAft>
+            </a:pPr>
+            <a:r>
+              <a:rPr sz="2000" b="0">
+                <a:solidFill>
+                  <a:srgbClr val="1A1A1A"/>
+                </a:solidFill>
+                <a:latin typeface="Calibri"/>
+              </a:rPr>
+              <a:t>•  Route map (Mapbox): colour-coded predicted signal quality along the planned path.</a:t>
+            </a:r>
+          </a:p>
+          <a:p>
+            <a:pPr algn="l">
+              <a:lnSpc>
+                <a:spcPct val="150000"/>
+              </a:lnSpc>
+              <a:spcAft>
+                <a:spcPts val="1000"/>
+              </a:spcAft>
+            </a:pPr>
+            <a:r>
+              <a:rPr sz="2000" b="0">
+                <a:solidFill>
+                  <a:srgbClr val="1A1A1A"/>
+                </a:solidFill>
+                <a:latin typeface="Calibri"/>
+              </a:rPr>
+              <a:t>•  Prediction timeline with lead-time annotations; attention heatmap for interpretability.</a:t>
+            </a:r>
+          </a:p>
+          <a:p>
+            <a:pPr algn="l">
+              <a:lnSpc>
+                <a:spcPct val="150000"/>
+              </a:lnSpc>
+              <a:spcAft>
+                <a:spcPts val="1000"/>
+              </a:spcAft>
+            </a:pPr>
+            <a:r>
+              <a:rPr sz="2000" b="0">
+                <a:solidFill>
+                  <a:srgbClr val="1A1A1A"/>
+                </a:solidFill>
+                <a:latin typeface="Calibri"/>
+              </a:rPr>
+              <a:t>•  DL-vs-baseline comparison; dataset explorer (149k epochs); metrics/performance board.</a:t>
+            </a:r>
+          </a:p>
+          <a:p>
+            <a:pPr algn="l">
+              <a:lnSpc>
+                <a:spcPct val="150000"/>
+              </a:lnSpc>
+              <a:spcAft>
+                <a:spcPts val="1000"/>
+              </a:spcAft>
+            </a:pPr>
+            <a:r>
+              <a:rPr sz="2000" b="0">
+                <a:solidFill>
+                  <a:srgbClr val="005BAC"/>
+                </a:solidFill>
+                <a:latin typeface="Calibri"/>
+              </a:rPr>
+              <a:t>•  Phase 2: integrate actual vehicle IMU; Kalman-filter fusion visualization.</a:t>
+            </a:r>
+          </a:p>
+        </p:txBody>
+      </p:sp>
+    </p:spTree>
+  </p:cSld>
+  <p:clrMapOvr>
+    <a:masterClrMapping/>
+  </p:clrMapOvr>
+</p:sld>
+</file>
+
+<file path=ppt/slides/slide36.xml><?xml version="1.0" encoding="utf-8"?>
+<p:sld xmlns:a="http://schemas.openxmlformats.org/drawingml/2006/main" xmlns:p="http://schemas.openxmlformats.org/presentationml/2006/main" xmlns:r="http://schemas.openxmlformats.org/officeDocument/2006/relationships">
+  <p:cSld>
+    <p:bg>
+      <p:bgPr>
+        <a:solidFill>
+          <a:srgbClr val="F5F8FC"/>
+        </a:solidFill>
+        <a:effectLst/>
+      </p:bgPr>
+    </p:bg>
+    <p:spTree>
+      <p:nvGrpSpPr>
+        <p:cNvPr id="1" name=""/>
+        <p:cNvGrpSpPr/>
+        <p:nvPr/>
+      </p:nvGrpSpPr>
+      <p:grpSpPr/>
+      <p:sp>
+        <p:nvSpPr>
+          <p:cNvPr id="2" name="Rectangle 1"/>
+          <p:cNvSpPr/>
+          <p:nvPr/>
+        </p:nvSpPr>
+        <p:spPr>
+          <a:xfrm>
+            <a:off x="548640" y="457200"/>
+            <a:ext cx="164592" cy="822960"/>
+          </a:xfrm>
+          <a:prstGeom prst="rect">
+            <a:avLst/>
+          </a:prstGeom>
+          <a:solidFill>
+            <a:srgbClr val="005BAC"/>
+          </a:solidFill>
+          <a:ln>
+            <a:noFill/>
+          </a:ln>
+        </p:spPr>
+        <p:style>
+          <a:lnRef idx="1">
+            <a:schemeClr val="accent1"/>
+          </a:lnRef>
+          <a:fillRef idx="3">
+            <a:schemeClr val="accent1"/>
+          </a:fillRef>
+          <a:effectRef idx="2">
+            <a:schemeClr val="accent1"/>
+          </a:effectRef>
+          <a:fontRef idx="minor">
+            <a:schemeClr val="lt1"/>
+          </a:fontRef>
+        </p:style>
+        <p:txBody>
+          <a:bodyPr rtlCol="0" anchor="ctr"/>
+          <a:lstStyle/>
+          <a:p>
+            <a:pPr algn="ctr"/>
+          </a:p>
+        </p:txBody>
+      </p:sp>
+      <p:sp>
+        <p:nvSpPr>
+          <p:cNvPr id="3" name="TextBox 2"/>
+          <p:cNvSpPr txBox="1"/>
+          <p:nvPr/>
+        </p:nvSpPr>
+        <p:spPr>
+          <a:xfrm>
+            <a:off x="868680" y="411480"/>
+            <a:ext cx="10789920" cy="914400"/>
+          </a:xfrm>
+          <a:prstGeom prst="rect">
+            <a:avLst/>
+          </a:prstGeom>
+          <a:noFill/>
+        </p:spPr>
+        <p:txBody>
+          <a:bodyPr wrap="square">
+            <a:spAutoFit/>
+          </a:bodyPr>
+          <a:lstStyle/>
+          <a:p>
+            <a:pPr algn="l">
+              <a:lnSpc>
+                <a:spcPct val="150000"/>
+              </a:lnSpc>
+              <a:spcAft>
+                <a:spcPts val="600"/>
+              </a:spcAft>
+            </a:pPr>
+            <a:r>
+              <a:rPr sz="3400" b="1">
+                <a:solidFill>
+                  <a:srgbClr val="003366"/>
+                </a:solidFill>
+                <a:latin typeface="Calibri"/>
+              </a:rPr>
+              <a:t>Publication &amp; reproducibility</a:t>
+            </a:r>
+          </a:p>
+        </p:txBody>
+      </p:sp>
+      <p:sp>
+        <p:nvSpPr>
+          <p:cNvPr id="4" name="TextBox 3"/>
+          <p:cNvSpPr txBox="1"/>
+          <p:nvPr/>
+        </p:nvSpPr>
+        <p:spPr>
+          <a:xfrm>
+            <a:off x="868680" y="1554480"/>
+            <a:ext cx="10607040" cy="4937760"/>
+          </a:xfrm>
+          <a:prstGeom prst="rect">
+            <a:avLst/>
+          </a:prstGeom>
+          <a:noFill/>
+        </p:spPr>
+        <p:txBody>
+          <a:bodyPr wrap="square">
+            <a:spAutoFit/>
+          </a:bodyPr>
+          <a:lstStyle/>
+          <a:p>
+            <a:pPr algn="l">
+              <a:lnSpc>
+                <a:spcPct val="150000"/>
+              </a:lnSpc>
+              <a:spcAft>
+                <a:spcPts val="1000"/>
+              </a:spcAft>
+            </a:pPr>
+            <a:r>
+              <a:rPr sz="2000" b="0">
+                <a:solidFill>
+                  <a:srgbClr val="005BAC"/>
+                </a:solidFill>
+                <a:latin typeface="Calibri"/>
+              </a:rPr>
+              <a:t>•  Paper A (GPS Solutions, Q1): method + multi-horizon + cross-receiver + cross-city.</a:t>
+            </a:r>
+          </a:p>
+          <a:p>
+            <a:pPr algn="l">
+              <a:lnSpc>
+                <a:spcPct val="150000"/>
+              </a:lnSpc>
+              <a:spcAft>
+                <a:spcPts val="1000"/>
+              </a:spcAft>
+            </a:pPr>
+            <a:r>
+              <a:rPr sz="2000" b="0">
+                <a:solidFill>
+                  <a:srgbClr val="1A1A1A"/>
+                </a:solidFill>
+                <a:latin typeface="Calibri"/>
+              </a:rPr>
+              <a:t>•  Paper B (Journal of Navigation): model comparison → ensemble selection → EKF integration.</a:t>
+            </a:r>
+          </a:p>
+          <a:p>
+            <a:pPr algn="l">
+              <a:lnSpc>
+                <a:spcPct val="150000"/>
+              </a:lnSpc>
+              <a:spcAft>
+                <a:spcPts val="1000"/>
+              </a:spcAft>
+            </a:pPr>
+            <a:r>
+              <a:rPr sz="2000" b="0">
+                <a:solidFill>
+                  <a:srgbClr val="1A1A1A"/>
+                </a:solidFill>
+                <a:latin typeface="Calibri"/>
+              </a:rPr>
+              <a:t>•  Conference (ION GNSS+ 2026): cross-city generalization result as a systems paper.</a:t>
+            </a:r>
+          </a:p>
+          <a:p>
+            <a:pPr algn="l">
+              <a:lnSpc>
+                <a:spcPct val="150000"/>
+              </a:lnSpc>
+              <a:spcAft>
+                <a:spcPts val="1000"/>
+              </a:spcAft>
+            </a:pPr>
+            <a:r>
+              <a:rPr sz="2000" b="0">
+                <a:solidFill>
+                  <a:srgbClr val="1A1A1A"/>
+                </a:solidFill>
+                <a:latin typeface="Calibri"/>
+              </a:rPr>
+              <a:t>•  Data + code release: GitHub + Zenodo (reproducible; citable DOI).</a:t>
+            </a:r>
+          </a:p>
+          <a:p>
+            <a:pPr algn="l">
+              <a:lnSpc>
+                <a:spcPct val="150000"/>
+              </a:lnSpc>
+              <a:spcAft>
+                <a:spcPts val="1000"/>
+              </a:spcAft>
+            </a:pPr>
+            <a:r>
+              <a:rPr sz="2000" b="0">
+                <a:solidFill>
+                  <a:srgbClr val="1A1A1A"/>
+                </a:solidFill>
+                <a:latin typeface="Calibri"/>
+              </a:rPr>
+              <a:t>•  All results / figures / models in results/ (zipped &amp; versioned).</a:t>
+            </a:r>
+          </a:p>
+        </p:txBody>
+      </p:sp>
+    </p:spTree>
+  </p:cSld>
+  <p:clrMapOvr>
+    <a:masterClrMapping/>
+  </p:clrMapOvr>
+</p:sld>
+</file>
+
+<file path=ppt/slides/slide37.xml><?xml version="1.0" encoding="utf-8"?>
 <p:sld xmlns:a="http://schemas.openxmlformats.org/drawingml/2006/main" xmlns:p="http://schemas.openxmlformats.org/presentationml/2006/main" xmlns:r="http://schemas.openxmlformats.org/officeDocument/2006/relationships">
   <p:cSld>
     <p:bg>

--- a/proposal/Presentations/SENTINEL_GNSS_Proposal_v4.pptx
+++ b/proposal/Presentations/SENTINEL_GNSS_Proposal_v4.pptx
@@ -5,45 +5,45 @@
     <p:sldMasterId id="2147483648" r:id="rId1"/>
   </p:sldMasterIdLst>
   <p:sldIdLst>
-    <p:sldId id="256" r:id="rId7"/>
-    <p:sldId id="257" r:id="rId8"/>
-    <p:sldId id="258" r:id="rId9"/>
-    <p:sldId id="259" r:id="rId10"/>
-    <p:sldId id="260" r:id="rId11"/>
-    <p:sldId id="261" r:id="rId12"/>
-    <p:sldId id="262" r:id="rId13"/>
-    <p:sldId id="263" r:id="rId14"/>
-    <p:sldId id="264" r:id="rId15"/>
-    <p:sldId id="265" r:id="rId16"/>
-    <p:sldId id="266" r:id="rId17"/>
-    <p:sldId id="267" r:id="rId18"/>
-    <p:sldId id="268" r:id="rId19"/>
-    <p:sldId id="269" r:id="rId20"/>
-    <p:sldId id="270" r:id="rId21"/>
-    <p:sldId id="271" r:id="rId22"/>
-    <p:sldId id="272" r:id="rId23"/>
-    <p:sldId id="273" r:id="rId24"/>
-    <p:sldId id="274" r:id="rId25"/>
-    <p:sldId id="275" r:id="rId26"/>
-    <p:sldId id="276" r:id="rId27"/>
-    <p:sldId id="277" r:id="rId28"/>
-    <p:sldId id="278" r:id="rId29"/>
-    <p:sldId id="279" r:id="rId30"/>
-    <p:sldId id="280" r:id="rId31"/>
-    <p:sldId id="281" r:id="rId32"/>
-    <p:sldId id="282" r:id="rId33"/>
-    <p:sldId id="283" r:id="rId34"/>
-    <p:sldId id="284" r:id="rId35"/>
-    <p:sldId id="285" r:id="rId36"/>
-    <p:sldId id="286" r:id="rId37"/>
-    <p:sldId id="287" r:id="rId38"/>
-    <p:sldId id="288" r:id="rId39"/>
-    <p:sldId id="289" r:id="rId40"/>
-    <p:sldId id="290" r:id="rId41"/>
-    <p:sldId id="291" r:id="rId42"/>
-    <p:sldId id="292" r:id="rId43"/>
+    <p:sldId id="256" r:id="rId2"/>
+    <p:sldId id="257" r:id="rId3"/>
+    <p:sldId id="258" r:id="rId4"/>
+    <p:sldId id="259" r:id="rId5"/>
+    <p:sldId id="260" r:id="rId6"/>
+    <p:sldId id="261" r:id="rId7"/>
+    <p:sldId id="262" r:id="rId8"/>
+    <p:sldId id="263" r:id="rId9"/>
+    <p:sldId id="264" r:id="rId10"/>
+    <p:sldId id="265" r:id="rId11"/>
+    <p:sldId id="266" r:id="rId12"/>
+    <p:sldId id="267" r:id="rId13"/>
+    <p:sldId id="268" r:id="rId14"/>
+    <p:sldId id="269" r:id="rId15"/>
+    <p:sldId id="270" r:id="rId16"/>
+    <p:sldId id="271" r:id="rId17"/>
+    <p:sldId id="272" r:id="rId18"/>
+    <p:sldId id="273" r:id="rId19"/>
+    <p:sldId id="274" r:id="rId20"/>
+    <p:sldId id="275" r:id="rId21"/>
+    <p:sldId id="276" r:id="rId22"/>
+    <p:sldId id="277" r:id="rId23"/>
+    <p:sldId id="278" r:id="rId24"/>
+    <p:sldId id="279" r:id="rId25"/>
+    <p:sldId id="280" r:id="rId26"/>
+    <p:sldId id="281" r:id="rId27"/>
+    <p:sldId id="282" r:id="rId28"/>
+    <p:sldId id="283" r:id="rId29"/>
+    <p:sldId id="284" r:id="rId30"/>
+    <p:sldId id="285" r:id="rId31"/>
+    <p:sldId id="286" r:id="rId32"/>
+    <p:sldId id="287" r:id="rId33"/>
+    <p:sldId id="288" r:id="rId34"/>
+    <p:sldId id="289" r:id="rId35"/>
+    <p:sldId id="290" r:id="rId36"/>
+    <p:sldId id="291" r:id="rId37"/>
+    <p:sldId id="292" r:id="rId38"/>
   </p:sldIdLst>
-  <p:sldSz cx="12191695" cy="6858000" type="screen4x3"/>
+  <p:sldSz cx="12192000" cy="6858000"/>
   <p:notesSz cx="6858000" cy="9144000"/>
   <p:defaultTextStyle>
     <a:defPPr>
@@ -140,6 +140,22 @@
       </a:defRPr>
     </a:lvl9pPr>
   </p:defaultTextStyle>
+  <p:extLst>
+    <p:ext uri="{EFAFB233-063F-42B5-8137-9DF3F51BA10A}">
+      <p15:sldGuideLst xmlns:p15="http://schemas.microsoft.com/office/powerpoint/2012/main">
+        <p15:guide id="1" orient="horz" pos="2160">
+          <p15:clr>
+            <a:srgbClr val="A4A3A4"/>
+          </p15:clr>
+        </p15:guide>
+        <p15:guide id="2" pos="2880">
+          <p15:clr>
+            <a:srgbClr val="A4A3A4"/>
+          </p15:clr>
+        </p15:guide>
+      </p15:sldGuideLst>
+    </p:ext>
+  </p:extLst>
 </p:presentation>
 </file>
 
@@ -181,10 +197,9 @@
           <a:lstStyle/>
           <a:p>
             <a:r>
-              <a:rPr lang="en-US" smtClean="0"/>
+              <a:rPr lang="en-US"/>
               <a:t>Click to edit Master title style</a:t>
             </a:r>
-            <a:endParaRPr lang="en-US"/>
           </a:p>
         </p:txBody>
       </p:sp>
@@ -300,10 +315,9 @@
           </a:lstStyle>
           <a:p>
             <a:r>
-              <a:rPr lang="en-US" smtClean="0"/>
+              <a:rPr lang="en-US"/>
               <a:t>Click to edit Master subtitle style</a:t>
             </a:r>
-            <a:endParaRPr lang="en-US"/>
           </a:p>
         </p:txBody>
       </p:sp>
@@ -324,7 +338,7 @@
           <a:p>
             <a:fld id="{5BCAD085-E8A6-8845-BD4E-CB4CCA059FC4}" type="datetimeFigureOut">
               <a:rPr lang="en-US" smtClean="0"/>
-              <a:t>1/27/13</a:t>
+              <a:t>6/4/2026</a:t>
             </a:fld>
             <a:endParaRPr lang="en-US"/>
           </a:p>
@@ -418,10 +432,9 @@
           <a:lstStyle/>
           <a:p>
             <a:r>
-              <a:rPr lang="en-US" smtClean="0"/>
+              <a:rPr lang="en-US"/>
               <a:t>Click to edit Master title style</a:t>
             </a:r>
-            <a:endParaRPr lang="en-US"/>
           </a:p>
         </p:txBody>
       </p:sp>
@@ -442,38 +455,37 @@
           <a:p>
             <a:pPr lvl="0"/>
             <a:r>
-              <a:rPr lang="en-US" smtClean="0"/>
+              <a:rPr lang="en-US"/>
               <a:t>Click to edit Master text styles</a:t>
             </a:r>
           </a:p>
           <a:p>
             <a:pPr lvl="1"/>
             <a:r>
-              <a:rPr lang="en-US" smtClean="0"/>
+              <a:rPr lang="en-US"/>
               <a:t>Second level</a:t>
             </a:r>
           </a:p>
           <a:p>
             <a:pPr lvl="2"/>
             <a:r>
-              <a:rPr lang="en-US" smtClean="0"/>
+              <a:rPr lang="en-US"/>
               <a:t>Third level</a:t>
             </a:r>
           </a:p>
           <a:p>
             <a:pPr lvl="3"/>
             <a:r>
-              <a:rPr lang="en-US" smtClean="0"/>
+              <a:rPr lang="en-US"/>
               <a:t>Fourth level</a:t>
             </a:r>
           </a:p>
           <a:p>
             <a:pPr lvl="4"/>
             <a:r>
-              <a:rPr lang="en-US" smtClean="0"/>
+              <a:rPr lang="en-US"/>
               <a:t>Fifth level</a:t>
             </a:r>
-            <a:endParaRPr lang="en-US"/>
           </a:p>
         </p:txBody>
       </p:sp>
@@ -494,7 +506,7 @@
           <a:p>
             <a:fld id="{5BCAD085-E8A6-8845-BD4E-CB4CCA059FC4}" type="datetimeFigureOut">
               <a:rPr lang="en-US" smtClean="0"/>
-              <a:t>1/27/13</a:t>
+              <a:t>6/4/2026</a:t>
             </a:fld>
             <a:endParaRPr lang="en-US"/>
           </a:p>
@@ -593,10 +605,9 @@
           <a:lstStyle/>
           <a:p>
             <a:r>
-              <a:rPr lang="en-US" smtClean="0"/>
+              <a:rPr lang="en-US"/>
               <a:t>Click to edit Master title style</a:t>
             </a:r>
-            <a:endParaRPr lang="en-US"/>
           </a:p>
         </p:txBody>
       </p:sp>
@@ -622,38 +633,37 @@
           <a:p>
             <a:pPr lvl="0"/>
             <a:r>
-              <a:rPr lang="en-US" smtClean="0"/>
+              <a:rPr lang="en-US"/>
               <a:t>Click to edit Master text styles</a:t>
             </a:r>
           </a:p>
           <a:p>
             <a:pPr lvl="1"/>
             <a:r>
-              <a:rPr lang="en-US" smtClean="0"/>
+              <a:rPr lang="en-US"/>
               <a:t>Second level</a:t>
             </a:r>
           </a:p>
           <a:p>
             <a:pPr lvl="2"/>
             <a:r>
-              <a:rPr lang="en-US" smtClean="0"/>
+              <a:rPr lang="en-US"/>
               <a:t>Third level</a:t>
             </a:r>
           </a:p>
           <a:p>
             <a:pPr lvl="3"/>
             <a:r>
-              <a:rPr lang="en-US" smtClean="0"/>
+              <a:rPr lang="en-US"/>
               <a:t>Fourth level</a:t>
             </a:r>
           </a:p>
           <a:p>
             <a:pPr lvl="4"/>
             <a:r>
-              <a:rPr lang="en-US" smtClean="0"/>
+              <a:rPr lang="en-US"/>
               <a:t>Fifth level</a:t>
             </a:r>
-            <a:endParaRPr lang="en-US"/>
           </a:p>
         </p:txBody>
       </p:sp>
@@ -674,7 +684,7 @@
           <a:p>
             <a:fld id="{5BCAD085-E8A6-8845-BD4E-CB4CCA059FC4}" type="datetimeFigureOut">
               <a:rPr lang="en-US" smtClean="0"/>
-              <a:t>1/27/13</a:t>
+              <a:t>6/4/2026</a:t>
             </a:fld>
             <a:endParaRPr lang="en-US"/>
           </a:p>
@@ -768,10 +778,9 @@
           <a:lstStyle/>
           <a:p>
             <a:r>
-              <a:rPr lang="en-US" smtClean="0"/>
+              <a:rPr lang="en-US"/>
               <a:t>Click to edit Master title style</a:t>
             </a:r>
-            <a:endParaRPr lang="en-US"/>
           </a:p>
         </p:txBody>
       </p:sp>
@@ -792,38 +801,37 @@
           <a:p>
             <a:pPr lvl="0"/>
             <a:r>
-              <a:rPr lang="en-US" smtClean="0"/>
+              <a:rPr lang="en-US"/>
               <a:t>Click to edit Master text styles</a:t>
             </a:r>
           </a:p>
           <a:p>
             <a:pPr lvl="1"/>
             <a:r>
-              <a:rPr lang="en-US" smtClean="0"/>
+              <a:rPr lang="en-US"/>
               <a:t>Second level</a:t>
             </a:r>
           </a:p>
           <a:p>
             <a:pPr lvl="2"/>
             <a:r>
-              <a:rPr lang="en-US" smtClean="0"/>
+              <a:rPr lang="en-US"/>
               <a:t>Third level</a:t>
             </a:r>
           </a:p>
           <a:p>
             <a:pPr lvl="3"/>
             <a:r>
-              <a:rPr lang="en-US" smtClean="0"/>
+              <a:rPr lang="en-US"/>
               <a:t>Fourth level</a:t>
             </a:r>
           </a:p>
           <a:p>
             <a:pPr lvl="4"/>
             <a:r>
-              <a:rPr lang="en-US" smtClean="0"/>
+              <a:rPr lang="en-US"/>
               <a:t>Fifth level</a:t>
             </a:r>
-            <a:endParaRPr lang="en-US"/>
           </a:p>
         </p:txBody>
       </p:sp>
@@ -844,7 +852,7 @@
           <a:p>
             <a:fld id="{5BCAD085-E8A6-8845-BD4E-CB4CCA059FC4}" type="datetimeFigureOut">
               <a:rPr lang="en-US" smtClean="0"/>
-              <a:t>1/27/13</a:t>
+              <a:t>6/4/2026</a:t>
             </a:fld>
             <a:endParaRPr lang="en-US"/>
           </a:p>
@@ -947,10 +955,9 @@
           </a:lstStyle>
           <a:p>
             <a:r>
-              <a:rPr lang="en-US" smtClean="0"/>
+              <a:rPr lang="en-US"/>
               <a:t>Click to edit Master title style</a:t>
             </a:r>
-            <a:endParaRPr lang="en-US"/>
           </a:p>
         </p:txBody>
       </p:sp>
@@ -1067,7 +1074,7 @@
           <a:p>
             <a:pPr lvl="0"/>
             <a:r>
-              <a:rPr lang="en-US" smtClean="0"/>
+              <a:rPr lang="en-US"/>
               <a:t>Click to edit Master text styles</a:t>
             </a:r>
           </a:p>
@@ -1090,7 +1097,7 @@
           <a:p>
             <a:fld id="{5BCAD085-E8A6-8845-BD4E-CB4CCA059FC4}" type="datetimeFigureOut">
               <a:rPr lang="en-US" smtClean="0"/>
-              <a:t>1/27/13</a:t>
+              <a:t>6/4/2026</a:t>
             </a:fld>
             <a:endParaRPr lang="en-US"/>
           </a:p>
@@ -1184,10 +1191,9 @@
           <a:lstStyle/>
           <a:p>
             <a:r>
-              <a:rPr lang="en-US" smtClean="0"/>
+              <a:rPr lang="en-US"/>
               <a:t>Click to edit Master title style</a:t>
             </a:r>
-            <a:endParaRPr lang="en-US"/>
           </a:p>
         </p:txBody>
       </p:sp>
@@ -1241,38 +1247,37 @@
           <a:p>
             <a:pPr lvl="0"/>
             <a:r>
-              <a:rPr lang="en-US" smtClean="0"/>
+              <a:rPr lang="en-US"/>
               <a:t>Click to edit Master text styles</a:t>
             </a:r>
           </a:p>
           <a:p>
             <a:pPr lvl="1"/>
             <a:r>
-              <a:rPr lang="en-US" smtClean="0"/>
+              <a:rPr lang="en-US"/>
               <a:t>Second level</a:t>
             </a:r>
           </a:p>
           <a:p>
             <a:pPr lvl="2"/>
             <a:r>
-              <a:rPr lang="en-US" smtClean="0"/>
+              <a:rPr lang="en-US"/>
               <a:t>Third level</a:t>
             </a:r>
           </a:p>
           <a:p>
             <a:pPr lvl="3"/>
             <a:r>
-              <a:rPr lang="en-US" smtClean="0"/>
+              <a:rPr lang="en-US"/>
               <a:t>Fourth level</a:t>
             </a:r>
           </a:p>
           <a:p>
             <a:pPr lvl="4"/>
             <a:r>
-              <a:rPr lang="en-US" smtClean="0"/>
+              <a:rPr lang="en-US"/>
               <a:t>Fifth level</a:t>
             </a:r>
-            <a:endParaRPr lang="en-US"/>
           </a:p>
         </p:txBody>
       </p:sp>
@@ -1326,38 +1331,37 @@
           <a:p>
             <a:pPr lvl="0"/>
             <a:r>
-              <a:rPr lang="en-US" smtClean="0"/>
+              <a:rPr lang="en-US"/>
               <a:t>Click to edit Master text styles</a:t>
             </a:r>
           </a:p>
           <a:p>
             <a:pPr lvl="1"/>
             <a:r>
-              <a:rPr lang="en-US" smtClean="0"/>
+              <a:rPr lang="en-US"/>
               <a:t>Second level</a:t>
             </a:r>
           </a:p>
           <a:p>
             <a:pPr lvl="2"/>
             <a:r>
-              <a:rPr lang="en-US" smtClean="0"/>
+              <a:rPr lang="en-US"/>
               <a:t>Third level</a:t>
             </a:r>
           </a:p>
           <a:p>
             <a:pPr lvl="3"/>
             <a:r>
-              <a:rPr lang="en-US" smtClean="0"/>
+              <a:rPr lang="en-US"/>
               <a:t>Fourth level</a:t>
             </a:r>
           </a:p>
           <a:p>
             <a:pPr lvl="4"/>
             <a:r>
-              <a:rPr lang="en-US" smtClean="0"/>
+              <a:rPr lang="en-US"/>
               <a:t>Fifth level</a:t>
             </a:r>
-            <a:endParaRPr lang="en-US"/>
           </a:p>
         </p:txBody>
       </p:sp>
@@ -1378,7 +1382,7 @@
           <a:p>
             <a:fld id="{5BCAD085-E8A6-8845-BD4E-CB4CCA059FC4}" type="datetimeFigureOut">
               <a:rPr lang="en-US" smtClean="0"/>
-              <a:t>1/27/13</a:t>
+              <a:t>6/4/2026</a:t>
             </a:fld>
             <a:endParaRPr lang="en-US"/>
           </a:p>
@@ -1476,10 +1480,9 @@
           </a:lstStyle>
           <a:p>
             <a:r>
-              <a:rPr lang="en-US" smtClean="0"/>
+              <a:rPr lang="en-US"/>
               <a:t>Click to edit Master title style</a:t>
             </a:r>
-            <a:endParaRPr lang="en-US"/>
           </a:p>
         </p:txBody>
       </p:sp>
@@ -1542,7 +1545,7 @@
           <a:p>
             <a:pPr lvl="0"/>
             <a:r>
-              <a:rPr lang="en-US" smtClean="0"/>
+              <a:rPr lang="en-US"/>
               <a:t>Click to edit Master text styles</a:t>
             </a:r>
           </a:p>
@@ -1598,38 +1601,37 @@
           <a:p>
             <a:pPr lvl="0"/>
             <a:r>
-              <a:rPr lang="en-US" smtClean="0"/>
+              <a:rPr lang="en-US"/>
               <a:t>Click to edit Master text styles</a:t>
             </a:r>
           </a:p>
           <a:p>
             <a:pPr lvl="1"/>
             <a:r>
-              <a:rPr lang="en-US" smtClean="0"/>
+              <a:rPr lang="en-US"/>
               <a:t>Second level</a:t>
             </a:r>
           </a:p>
           <a:p>
             <a:pPr lvl="2"/>
             <a:r>
-              <a:rPr lang="en-US" smtClean="0"/>
+              <a:rPr lang="en-US"/>
               <a:t>Third level</a:t>
             </a:r>
           </a:p>
           <a:p>
             <a:pPr lvl="3"/>
             <a:r>
-              <a:rPr lang="en-US" smtClean="0"/>
+              <a:rPr lang="en-US"/>
               <a:t>Fourth level</a:t>
             </a:r>
           </a:p>
           <a:p>
             <a:pPr lvl="4"/>
             <a:r>
-              <a:rPr lang="en-US" smtClean="0"/>
+              <a:rPr lang="en-US"/>
               <a:t>Fifth level</a:t>
             </a:r>
-            <a:endParaRPr lang="en-US"/>
           </a:p>
         </p:txBody>
       </p:sp>
@@ -1692,7 +1694,7 @@
           <a:p>
             <a:pPr lvl="0"/>
             <a:r>
-              <a:rPr lang="en-US" smtClean="0"/>
+              <a:rPr lang="en-US"/>
               <a:t>Click to edit Master text styles</a:t>
             </a:r>
           </a:p>
@@ -1748,38 +1750,37 @@
           <a:p>
             <a:pPr lvl="0"/>
             <a:r>
-              <a:rPr lang="en-US" smtClean="0"/>
+              <a:rPr lang="en-US"/>
               <a:t>Click to edit Master text styles</a:t>
             </a:r>
           </a:p>
           <a:p>
             <a:pPr lvl="1"/>
             <a:r>
-              <a:rPr lang="en-US" smtClean="0"/>
+              <a:rPr lang="en-US"/>
               <a:t>Second level</a:t>
             </a:r>
           </a:p>
           <a:p>
             <a:pPr lvl="2"/>
             <a:r>
-              <a:rPr lang="en-US" smtClean="0"/>
+              <a:rPr lang="en-US"/>
               <a:t>Third level</a:t>
             </a:r>
           </a:p>
           <a:p>
             <a:pPr lvl="3"/>
             <a:r>
-              <a:rPr lang="en-US" smtClean="0"/>
+              <a:rPr lang="en-US"/>
               <a:t>Fourth level</a:t>
             </a:r>
           </a:p>
           <a:p>
             <a:pPr lvl="4"/>
             <a:r>
-              <a:rPr lang="en-US" smtClean="0"/>
+              <a:rPr lang="en-US"/>
               <a:t>Fifth level</a:t>
             </a:r>
-            <a:endParaRPr lang="en-US"/>
           </a:p>
         </p:txBody>
       </p:sp>
@@ -1800,7 +1801,7 @@
           <a:p>
             <a:fld id="{5BCAD085-E8A6-8845-BD4E-CB4CCA059FC4}" type="datetimeFigureOut">
               <a:rPr lang="en-US" smtClean="0"/>
-              <a:t>1/27/13</a:t>
+              <a:t>6/4/2026</a:t>
             </a:fld>
             <a:endParaRPr lang="en-US"/>
           </a:p>
@@ -1894,10 +1895,9 @@
           <a:lstStyle/>
           <a:p>
             <a:r>
-              <a:rPr lang="en-US" smtClean="0"/>
+              <a:rPr lang="en-US"/>
               <a:t>Click to edit Master title style</a:t>
             </a:r>
-            <a:endParaRPr lang="en-US"/>
           </a:p>
         </p:txBody>
       </p:sp>
@@ -1918,7 +1918,7 @@
           <a:p>
             <a:fld id="{5BCAD085-E8A6-8845-BD4E-CB4CCA059FC4}" type="datetimeFigureOut">
               <a:rPr lang="en-US" smtClean="0"/>
-              <a:t>1/27/13</a:t>
+              <a:t>6/4/2026</a:t>
             </a:fld>
             <a:endParaRPr lang="en-US"/>
           </a:p>
@@ -2013,7 +2013,7 @@
           <a:p>
             <a:fld id="{5BCAD085-E8A6-8845-BD4E-CB4CCA059FC4}" type="datetimeFigureOut">
               <a:rPr lang="en-US" smtClean="0"/>
-              <a:t>1/27/13</a:t>
+              <a:t>6/4/2026</a:t>
             </a:fld>
             <a:endParaRPr lang="en-US"/>
           </a:p>
@@ -2116,10 +2116,9 @@
           </a:lstStyle>
           <a:p>
             <a:r>
-              <a:rPr lang="en-US" smtClean="0"/>
+              <a:rPr lang="en-US"/>
               <a:t>Click to edit Master title style</a:t>
             </a:r>
-            <a:endParaRPr lang="en-US"/>
           </a:p>
         </p:txBody>
       </p:sp>
@@ -2173,38 +2172,37 @@
           <a:p>
             <a:pPr lvl="0"/>
             <a:r>
-              <a:rPr lang="en-US" smtClean="0"/>
+              <a:rPr lang="en-US"/>
               <a:t>Click to edit Master text styles</a:t>
             </a:r>
           </a:p>
           <a:p>
             <a:pPr lvl="1"/>
             <a:r>
-              <a:rPr lang="en-US" smtClean="0"/>
+              <a:rPr lang="en-US"/>
               <a:t>Second level</a:t>
             </a:r>
           </a:p>
           <a:p>
             <a:pPr lvl="2"/>
             <a:r>
-              <a:rPr lang="en-US" smtClean="0"/>
+              <a:rPr lang="en-US"/>
               <a:t>Third level</a:t>
             </a:r>
           </a:p>
           <a:p>
             <a:pPr lvl="3"/>
             <a:r>
-              <a:rPr lang="en-US" smtClean="0"/>
+              <a:rPr lang="en-US"/>
               <a:t>Fourth level</a:t>
             </a:r>
           </a:p>
           <a:p>
             <a:pPr lvl="4"/>
             <a:r>
-              <a:rPr lang="en-US" smtClean="0"/>
+              <a:rPr lang="en-US"/>
               <a:t>Fifth level</a:t>
             </a:r>
-            <a:endParaRPr lang="en-US"/>
           </a:p>
         </p:txBody>
       </p:sp>
@@ -2267,7 +2265,7 @@
           <a:p>
             <a:pPr lvl="0"/>
             <a:r>
-              <a:rPr lang="en-US" smtClean="0"/>
+              <a:rPr lang="en-US"/>
               <a:t>Click to edit Master text styles</a:t>
             </a:r>
           </a:p>
@@ -2290,7 +2288,7 @@
           <a:p>
             <a:fld id="{5BCAD085-E8A6-8845-BD4E-CB4CCA059FC4}" type="datetimeFigureOut">
               <a:rPr lang="en-US" smtClean="0"/>
-              <a:t>1/27/13</a:t>
+              <a:t>6/4/2026</a:t>
             </a:fld>
             <a:endParaRPr lang="en-US"/>
           </a:p>
@@ -2393,10 +2391,9 @@
           </a:lstStyle>
           <a:p>
             <a:r>
-              <a:rPr lang="en-US" smtClean="0"/>
+              <a:rPr lang="en-US"/>
               <a:t>Click to edit Master title style</a:t>
             </a:r>
-            <a:endParaRPr lang="en-US"/>
           </a:p>
         </p:txBody>
       </p:sp>
@@ -2520,7 +2517,7 @@
           <a:p>
             <a:pPr lvl="0"/>
             <a:r>
-              <a:rPr lang="en-US" smtClean="0"/>
+              <a:rPr lang="en-US"/>
               <a:t>Click to edit Master text styles</a:t>
             </a:r>
           </a:p>
@@ -2543,7 +2540,7 @@
           <a:p>
             <a:fld id="{5BCAD085-E8A6-8845-BD4E-CB4CCA059FC4}" type="datetimeFigureOut">
               <a:rPr lang="en-US" smtClean="0"/>
-              <a:t>1/27/13</a:t>
+              <a:t>6/4/2026</a:t>
             </a:fld>
             <a:endParaRPr lang="en-US"/>
           </a:p>
@@ -2652,10 +2649,9 @@
           <a:lstStyle/>
           <a:p>
             <a:r>
-              <a:rPr lang="en-US" smtClean="0"/>
+              <a:rPr lang="en-US"/>
               <a:t>Click to edit Master title style</a:t>
             </a:r>
-            <a:endParaRPr lang="en-US"/>
           </a:p>
         </p:txBody>
       </p:sp>
@@ -2686,38 +2682,37 @@
           <a:p>
             <a:pPr lvl="0"/>
             <a:r>
-              <a:rPr lang="en-US" smtClean="0"/>
+              <a:rPr lang="en-US"/>
               <a:t>Click to edit Master text styles</a:t>
             </a:r>
           </a:p>
           <a:p>
             <a:pPr lvl="1"/>
             <a:r>
-              <a:rPr lang="en-US" smtClean="0"/>
+              <a:rPr lang="en-US"/>
               <a:t>Second level</a:t>
             </a:r>
           </a:p>
           <a:p>
             <a:pPr lvl="2"/>
             <a:r>
-              <a:rPr lang="en-US" smtClean="0"/>
+              <a:rPr lang="en-US"/>
               <a:t>Third level</a:t>
             </a:r>
           </a:p>
           <a:p>
             <a:pPr lvl="3"/>
             <a:r>
-              <a:rPr lang="en-US" smtClean="0"/>
+              <a:rPr lang="en-US"/>
               <a:t>Fourth level</a:t>
             </a:r>
           </a:p>
           <a:p>
             <a:pPr lvl="4"/>
             <a:r>
-              <a:rPr lang="en-US" smtClean="0"/>
+              <a:rPr lang="en-US"/>
               <a:t>Fifth level</a:t>
             </a:r>
-            <a:endParaRPr lang="en-US"/>
           </a:p>
         </p:txBody>
       </p:sp>
@@ -2756,7 +2751,7 @@
           <a:p>
             <a:fld id="{5BCAD085-E8A6-8845-BD4E-CB4CCA059FC4}" type="datetimeFigureOut">
               <a:rPr lang="en-US" smtClean="0"/>
-              <a:t>1/27/13</a:t>
+              <a:t>6/4/2026</a:t>
             </a:fld>
             <a:endParaRPr lang="en-US"/>
           </a:p>
@@ -3115,7 +3110,7 @@
 </file>
 
 <file path=ppt/slides/slide1.xml><?xml version="1.0" encoding="utf-8"?>
-<p:sld xmlns:a="http://schemas.openxmlformats.org/drawingml/2006/main" xmlns:p="http://schemas.openxmlformats.org/presentationml/2006/main" xmlns:r="http://schemas.openxmlformats.org/officeDocument/2006/relationships">
+<p:sld xmlns:a="http://schemas.openxmlformats.org/drawingml/2006/main" xmlns:r="http://schemas.openxmlformats.org/officeDocument/2006/relationships" xmlns:p="http://schemas.openxmlformats.org/presentationml/2006/main">
   <p:cSld>
     <p:bg>
       <p:bgPr>
@@ -3131,7 +3126,14 @@
         <p:cNvGrpSpPr/>
         <p:nvPr/>
       </p:nvGrpSpPr>
-      <p:grpSpPr/>
+      <p:grpSpPr>
+        <a:xfrm>
+          <a:off x="0" y="0"/>
+          <a:ext cx="0" cy="0"/>
+          <a:chOff x="0" y="0"/>
+          <a:chExt cx="0" cy="0"/>
+        </a:xfrm>
+      </p:grpSpPr>
       <p:sp>
         <p:nvSpPr>
           <p:cNvPr id="2" name="Rectangle 1"/>
@@ -3172,6 +3174,7 @@
           <a:lstStyle/>
           <a:p>
             <a:pPr algn="ctr"/>
+            <a:endParaRPr/>
           </a:p>
         </p:txBody>
       </p:sp>
@@ -3348,7 +3351,7 @@
 </file>
 
 <file path=ppt/slides/slide10.xml><?xml version="1.0" encoding="utf-8"?>
-<p:sld xmlns:a="http://schemas.openxmlformats.org/drawingml/2006/main" xmlns:p="http://schemas.openxmlformats.org/presentationml/2006/main" xmlns:r="http://schemas.openxmlformats.org/officeDocument/2006/relationships">
+<p:sld xmlns:a="http://schemas.openxmlformats.org/drawingml/2006/main" xmlns:r="http://schemas.openxmlformats.org/officeDocument/2006/relationships" xmlns:p="http://schemas.openxmlformats.org/presentationml/2006/main">
   <p:cSld>
     <p:bg>
       <p:bgPr>
@@ -3364,7 +3367,14 @@
         <p:cNvGrpSpPr/>
         <p:nvPr/>
       </p:nvGrpSpPr>
-      <p:grpSpPr/>
+      <p:grpSpPr>
+        <a:xfrm>
+          <a:off x="0" y="0"/>
+          <a:ext cx="0" cy="0"/>
+          <a:chOff x="0" y="0"/>
+          <a:chExt cx="0" cy="0"/>
+        </a:xfrm>
+      </p:grpSpPr>
       <p:sp>
         <p:nvSpPr>
           <p:cNvPr id="2" name="Rectangle 1"/>
@@ -3405,6 +3415,7 @@
           <a:lstStyle/>
           <a:p>
             <a:pPr algn="ctr"/>
+            <a:endParaRPr/>
           </a:p>
         </p:txBody>
       </p:sp>
@@ -3525,7 +3536,7 @@
 </file>
 
 <file path=ppt/slides/slide11.xml><?xml version="1.0" encoding="utf-8"?>
-<p:sld xmlns:a="http://schemas.openxmlformats.org/drawingml/2006/main" xmlns:p="http://schemas.openxmlformats.org/presentationml/2006/main" xmlns:r="http://schemas.openxmlformats.org/officeDocument/2006/relationships">
+<p:sld xmlns:a="http://schemas.openxmlformats.org/drawingml/2006/main" xmlns:r="http://schemas.openxmlformats.org/officeDocument/2006/relationships" xmlns:p="http://schemas.openxmlformats.org/presentationml/2006/main">
   <p:cSld>
     <p:bg>
       <p:bgPr>
@@ -3541,7 +3552,14 @@
         <p:cNvGrpSpPr/>
         <p:nvPr/>
       </p:nvGrpSpPr>
-      <p:grpSpPr/>
+      <p:grpSpPr>
+        <a:xfrm>
+          <a:off x="0" y="0"/>
+          <a:ext cx="0" cy="0"/>
+          <a:chOff x="0" y="0"/>
+          <a:chExt cx="0" cy="0"/>
+        </a:xfrm>
+      </p:grpSpPr>
       <p:sp>
         <p:nvSpPr>
           <p:cNvPr id="2" name="TextBox 1"/>
@@ -3624,6 +3642,7 @@
           <a:lstStyle/>
           <a:p>
             <a:pPr algn="ctr"/>
+            <a:endParaRPr/>
           </a:p>
         </p:txBody>
       </p:sp>
@@ -3636,7 +3655,7 @@
 </file>
 
 <file path=ppt/slides/slide12.xml><?xml version="1.0" encoding="utf-8"?>
-<p:sld xmlns:a="http://schemas.openxmlformats.org/drawingml/2006/main" xmlns:p="http://schemas.openxmlformats.org/presentationml/2006/main" xmlns:r="http://schemas.openxmlformats.org/officeDocument/2006/relationships">
+<p:sld xmlns:a="http://schemas.openxmlformats.org/drawingml/2006/main" xmlns:r="http://schemas.openxmlformats.org/officeDocument/2006/relationships" xmlns:p="http://schemas.openxmlformats.org/presentationml/2006/main">
   <p:cSld>
     <p:bg>
       <p:bgPr>
@@ -3652,7 +3671,14 @@
         <p:cNvGrpSpPr/>
         <p:nvPr/>
       </p:nvGrpSpPr>
-      <p:grpSpPr/>
+      <p:grpSpPr>
+        <a:xfrm>
+          <a:off x="0" y="0"/>
+          <a:ext cx="0" cy="0"/>
+          <a:chOff x="0" y="0"/>
+          <a:chExt cx="0" cy="0"/>
+        </a:xfrm>
+      </p:grpSpPr>
       <p:sp>
         <p:nvSpPr>
           <p:cNvPr id="2" name="Rectangle 1"/>
@@ -3693,6 +3719,7 @@
           <a:lstStyle/>
           <a:p>
             <a:pPr algn="ctr"/>
+            <a:endParaRPr/>
           </a:p>
         </p:txBody>
       </p:sp>
@@ -3813,7 +3840,7 @@
 </file>
 
 <file path=ppt/slides/slide13.xml><?xml version="1.0" encoding="utf-8"?>
-<p:sld xmlns:a="http://schemas.openxmlformats.org/drawingml/2006/main" xmlns:p="http://schemas.openxmlformats.org/presentationml/2006/main" xmlns:r="http://schemas.openxmlformats.org/officeDocument/2006/relationships">
+<p:sld xmlns:a="http://schemas.openxmlformats.org/drawingml/2006/main" xmlns:r="http://schemas.openxmlformats.org/officeDocument/2006/relationships" xmlns:p="http://schemas.openxmlformats.org/presentationml/2006/main">
   <p:cSld>
     <p:bg>
       <p:bgPr>
@@ -3829,7 +3856,14 @@
         <p:cNvGrpSpPr/>
         <p:nvPr/>
       </p:nvGrpSpPr>
-      <p:grpSpPr/>
+      <p:grpSpPr>
+        <a:xfrm>
+          <a:off x="0" y="0"/>
+          <a:ext cx="0" cy="0"/>
+          <a:chOff x="0" y="0"/>
+          <a:chExt cx="0" cy="0"/>
+        </a:xfrm>
+      </p:grpSpPr>
       <p:sp>
         <p:nvSpPr>
           <p:cNvPr id="2" name="Rectangle 1"/>
@@ -3870,6 +3904,7 @@
           <a:lstStyle/>
           <a:p>
             <a:pPr algn="ctr"/>
+            <a:endParaRPr/>
           </a:p>
         </p:txBody>
       </p:sp>
@@ -3990,7 +4025,7 @@
 </file>
 
 <file path=ppt/slides/slide14.xml><?xml version="1.0" encoding="utf-8"?>
-<p:sld xmlns:a="http://schemas.openxmlformats.org/drawingml/2006/main" xmlns:p="http://schemas.openxmlformats.org/presentationml/2006/main" xmlns:r="http://schemas.openxmlformats.org/officeDocument/2006/relationships">
+<p:sld xmlns:a="http://schemas.openxmlformats.org/drawingml/2006/main" xmlns:r="http://schemas.openxmlformats.org/officeDocument/2006/relationships" xmlns:p="http://schemas.openxmlformats.org/presentationml/2006/main">
   <p:cSld>
     <p:bg>
       <p:bgPr>
@@ -4006,7 +4041,14 @@
         <p:cNvGrpSpPr/>
         <p:nvPr/>
       </p:nvGrpSpPr>
-      <p:grpSpPr/>
+      <p:grpSpPr>
+        <a:xfrm>
+          <a:off x="0" y="0"/>
+          <a:ext cx="0" cy="0"/>
+          <a:chOff x="0" y="0"/>
+          <a:chExt cx="0" cy="0"/>
+        </a:xfrm>
+      </p:grpSpPr>
       <p:sp>
         <p:nvSpPr>
           <p:cNvPr id="2" name="Rectangle 1"/>
@@ -4047,6 +4089,7 @@
           <a:lstStyle/>
           <a:p>
             <a:pPr algn="ctr"/>
+            <a:endParaRPr/>
           </a:p>
         </p:txBody>
       </p:sp>
@@ -4111,11 +4154,41 @@
                 <a:tableStyleId>{5C22544A-7EE6-4342-B048-85BDC9FD1C3A}</a:tableStyleId>
               </a:tblPr>
               <a:tblGrid>
-                <a:gridCol w="1828800"/>
-                <a:gridCol w="2103120"/>
-                <a:gridCol w="2103120"/>
-                <a:gridCol w="1828800"/>
-                <a:gridCol w="3108960"/>
+                <a:gridCol w="1828800">
+                  <a:extLst>
+                    <a:ext uri="{9D8B030D-6E8A-4147-A177-3AD203B41FA5}">
+                      <a16:colId xmlns:a16="http://schemas.microsoft.com/office/drawing/2014/main" val="20000"/>
+                    </a:ext>
+                  </a:extLst>
+                </a:gridCol>
+                <a:gridCol w="2103120">
+                  <a:extLst>
+                    <a:ext uri="{9D8B030D-6E8A-4147-A177-3AD203B41FA5}">
+                      <a16:colId xmlns:a16="http://schemas.microsoft.com/office/drawing/2014/main" val="20001"/>
+                    </a:ext>
+                  </a:extLst>
+                </a:gridCol>
+                <a:gridCol w="2103120">
+                  <a:extLst>
+                    <a:ext uri="{9D8B030D-6E8A-4147-A177-3AD203B41FA5}">
+                      <a16:colId xmlns:a16="http://schemas.microsoft.com/office/drawing/2014/main" val="20002"/>
+                    </a:ext>
+                  </a:extLst>
+                </a:gridCol>
+                <a:gridCol w="1828800">
+                  <a:extLst>
+                    <a:ext uri="{9D8B030D-6E8A-4147-A177-3AD203B41FA5}">
+                      <a16:colId xmlns:a16="http://schemas.microsoft.com/office/drawing/2014/main" val="20003"/>
+                    </a:ext>
+                  </a:extLst>
+                </a:gridCol>
+                <a:gridCol w="3108960">
+                  <a:extLst>
+                    <a:ext uri="{9D8B030D-6E8A-4147-A177-3AD203B41FA5}">
+                      <a16:colId xmlns:a16="http://schemas.microsoft.com/office/drawing/2014/main" val="20004"/>
+                    </a:ext>
+                  </a:extLst>
+                </a:gridCol>
               </a:tblGrid>
               <a:tr h="365760">
                 <a:tc>
@@ -4228,6 +4301,11 @@
                     </a:solidFill>
                   </a:tcPr>
                 </a:tc>
+                <a:extLst>
+                  <a:ext uri="{0D108BD9-81ED-4DB2-BD59-A6C34878D82A}">
+                    <a16:rowId xmlns:a16="http://schemas.microsoft.com/office/drawing/2014/main" val="10000"/>
+                  </a:ext>
+                </a:extLst>
               </a:tr>
               <a:tr h="365760">
                 <a:tc>
@@ -4340,6 +4418,11 @@
                     </a:solidFill>
                   </a:tcPr>
                 </a:tc>
+                <a:extLst>
+                  <a:ext uri="{0D108BD9-81ED-4DB2-BD59-A6C34878D82A}">
+                    <a16:rowId xmlns:a16="http://schemas.microsoft.com/office/drawing/2014/main" val="10001"/>
+                  </a:ext>
+                </a:extLst>
               </a:tr>
               <a:tr h="365760">
                 <a:tc>
@@ -4452,6 +4535,11 @@
                     </a:solidFill>
                   </a:tcPr>
                 </a:tc>
+                <a:extLst>
+                  <a:ext uri="{0D108BD9-81ED-4DB2-BD59-A6C34878D82A}">
+                    <a16:rowId xmlns:a16="http://schemas.microsoft.com/office/drawing/2014/main" val="10002"/>
+                  </a:ext>
+                </a:extLst>
               </a:tr>
               <a:tr h="365760">
                 <a:tc>
@@ -4564,6 +4652,11 @@
                     </a:solidFill>
                   </a:tcPr>
                 </a:tc>
+                <a:extLst>
+                  <a:ext uri="{0D108BD9-81ED-4DB2-BD59-A6C34878D82A}">
+                    <a16:rowId xmlns:a16="http://schemas.microsoft.com/office/drawing/2014/main" val="10003"/>
+                  </a:ext>
+                </a:extLst>
               </a:tr>
             </a:tbl>
           </a:graphicData>
@@ -4620,7 +4713,7 @@
 </file>
 
 <file path=ppt/slides/slide15.xml><?xml version="1.0" encoding="utf-8"?>
-<p:sld xmlns:a="http://schemas.openxmlformats.org/drawingml/2006/main" xmlns:p="http://schemas.openxmlformats.org/presentationml/2006/main" xmlns:r="http://schemas.openxmlformats.org/officeDocument/2006/relationships">
+<p:sld xmlns:a="http://schemas.openxmlformats.org/drawingml/2006/main" xmlns:r="http://schemas.openxmlformats.org/officeDocument/2006/relationships" xmlns:p="http://schemas.openxmlformats.org/presentationml/2006/main">
   <p:cSld>
     <p:bg>
       <p:bgPr>
@@ -4636,7 +4729,14 @@
         <p:cNvGrpSpPr/>
         <p:nvPr/>
       </p:nvGrpSpPr>
-      <p:grpSpPr/>
+      <p:grpSpPr>
+        <a:xfrm>
+          <a:off x="0" y="0"/>
+          <a:ext cx="0" cy="0"/>
+          <a:chOff x="0" y="0"/>
+          <a:chExt cx="0" cy="0"/>
+        </a:xfrm>
+      </p:grpSpPr>
       <p:sp>
         <p:nvSpPr>
           <p:cNvPr id="2" name="Rectangle 1"/>
@@ -4677,6 +4777,7 @@
           <a:lstStyle/>
           <a:p>
             <a:pPr algn="ctr"/>
+            <a:endParaRPr/>
           </a:p>
         </p:txBody>
       </p:sp>
@@ -4741,11 +4842,41 @@
                 <a:tableStyleId>{5C22544A-7EE6-4342-B048-85BDC9FD1C3A}</a:tableStyleId>
               </a:tblPr>
               <a:tblGrid>
-                <a:gridCol w="2377440"/>
-                <a:gridCol w="2194560"/>
-                <a:gridCol w="2011680"/>
-                <a:gridCol w="2011680"/>
-                <a:gridCol w="2377440"/>
+                <a:gridCol w="2377440">
+                  <a:extLst>
+                    <a:ext uri="{9D8B030D-6E8A-4147-A177-3AD203B41FA5}">
+                      <a16:colId xmlns:a16="http://schemas.microsoft.com/office/drawing/2014/main" val="20000"/>
+                    </a:ext>
+                  </a:extLst>
+                </a:gridCol>
+                <a:gridCol w="2194560">
+                  <a:extLst>
+                    <a:ext uri="{9D8B030D-6E8A-4147-A177-3AD203B41FA5}">
+                      <a16:colId xmlns:a16="http://schemas.microsoft.com/office/drawing/2014/main" val="20001"/>
+                    </a:ext>
+                  </a:extLst>
+                </a:gridCol>
+                <a:gridCol w="2011680">
+                  <a:extLst>
+                    <a:ext uri="{9D8B030D-6E8A-4147-A177-3AD203B41FA5}">
+                      <a16:colId xmlns:a16="http://schemas.microsoft.com/office/drawing/2014/main" val="20002"/>
+                    </a:ext>
+                  </a:extLst>
+                </a:gridCol>
+                <a:gridCol w="2011680">
+                  <a:extLst>
+                    <a:ext uri="{9D8B030D-6E8A-4147-A177-3AD203B41FA5}">
+                      <a16:colId xmlns:a16="http://schemas.microsoft.com/office/drawing/2014/main" val="20003"/>
+                    </a:ext>
+                  </a:extLst>
+                </a:gridCol>
+                <a:gridCol w="2377440">
+                  <a:extLst>
+                    <a:ext uri="{9D8B030D-6E8A-4147-A177-3AD203B41FA5}">
+                      <a16:colId xmlns:a16="http://schemas.microsoft.com/office/drawing/2014/main" val="20004"/>
+                    </a:ext>
+                  </a:extLst>
+                </a:gridCol>
               </a:tblGrid>
               <a:tr h="365760">
                 <a:tc>
@@ -4858,6 +4989,11 @@
                     </a:solidFill>
                   </a:tcPr>
                 </a:tc>
+                <a:extLst>
+                  <a:ext uri="{0D108BD9-81ED-4DB2-BD59-A6C34878D82A}">
+                    <a16:rowId xmlns:a16="http://schemas.microsoft.com/office/drawing/2014/main" val="10000"/>
+                  </a:ext>
+                </a:extLst>
               </a:tr>
               <a:tr h="365760">
                 <a:tc>
@@ -4970,6 +5106,11 @@
                     </a:solidFill>
                   </a:tcPr>
                 </a:tc>
+                <a:extLst>
+                  <a:ext uri="{0D108BD9-81ED-4DB2-BD59-A6C34878D82A}">
+                    <a16:rowId xmlns:a16="http://schemas.microsoft.com/office/drawing/2014/main" val="10001"/>
+                  </a:ext>
+                </a:extLst>
               </a:tr>
               <a:tr h="365760">
                 <a:tc>
@@ -5082,6 +5223,11 @@
                     </a:solidFill>
                   </a:tcPr>
                 </a:tc>
+                <a:extLst>
+                  <a:ext uri="{0D108BD9-81ED-4DB2-BD59-A6C34878D82A}">
+                    <a16:rowId xmlns:a16="http://schemas.microsoft.com/office/drawing/2014/main" val="10002"/>
+                  </a:ext>
+                </a:extLst>
               </a:tr>
               <a:tr h="365760">
                 <a:tc>
@@ -5194,6 +5340,11 @@
                     </a:solidFill>
                   </a:tcPr>
                 </a:tc>
+                <a:extLst>
+                  <a:ext uri="{0D108BD9-81ED-4DB2-BD59-A6C34878D82A}">
+                    <a16:rowId xmlns:a16="http://schemas.microsoft.com/office/drawing/2014/main" val="10003"/>
+                  </a:ext>
+                </a:extLst>
               </a:tr>
             </a:tbl>
           </a:graphicData>
@@ -5250,7 +5401,7 @@
 </file>
 
 <file path=ppt/slides/slide16.xml><?xml version="1.0" encoding="utf-8"?>
-<p:sld xmlns:a="http://schemas.openxmlformats.org/drawingml/2006/main" xmlns:p="http://schemas.openxmlformats.org/presentationml/2006/main" xmlns:r="http://schemas.openxmlformats.org/officeDocument/2006/relationships">
+<p:sld xmlns:a="http://schemas.openxmlformats.org/drawingml/2006/main" xmlns:r="http://schemas.openxmlformats.org/officeDocument/2006/relationships" xmlns:p="http://schemas.openxmlformats.org/presentationml/2006/main">
   <p:cSld>
     <p:bg>
       <p:bgPr>
@@ -5266,7 +5417,14 @@
         <p:cNvGrpSpPr/>
         <p:nvPr/>
       </p:nvGrpSpPr>
-      <p:grpSpPr/>
+      <p:grpSpPr>
+        <a:xfrm>
+          <a:off x="0" y="0"/>
+          <a:ext cx="0" cy="0"/>
+          <a:chOff x="0" y="0"/>
+          <a:chExt cx="0" cy="0"/>
+        </a:xfrm>
+      </p:grpSpPr>
       <p:sp>
         <p:nvSpPr>
           <p:cNvPr id="2" name="Rectangle 1"/>
@@ -5307,6 +5465,7 @@
           <a:lstStyle/>
           <a:p>
             <a:pPr algn="ctr"/>
+            <a:endParaRPr/>
           </a:p>
         </p:txBody>
       </p:sp>
@@ -5427,7 +5586,7 @@
 </file>
 
 <file path=ppt/slides/slide17.xml><?xml version="1.0" encoding="utf-8"?>
-<p:sld xmlns:a="http://schemas.openxmlformats.org/drawingml/2006/main" xmlns:p="http://schemas.openxmlformats.org/presentationml/2006/main" xmlns:r="http://schemas.openxmlformats.org/officeDocument/2006/relationships">
+<p:sld xmlns:a="http://schemas.openxmlformats.org/drawingml/2006/main" xmlns:r="http://schemas.openxmlformats.org/officeDocument/2006/relationships" xmlns:p="http://schemas.openxmlformats.org/presentationml/2006/main">
   <p:cSld>
     <p:bg>
       <p:bgPr>
@@ -5443,7 +5602,14 @@
         <p:cNvGrpSpPr/>
         <p:nvPr/>
       </p:nvGrpSpPr>
-      <p:grpSpPr/>
+      <p:grpSpPr>
+        <a:xfrm>
+          <a:off x="0" y="0"/>
+          <a:ext cx="0" cy="0"/>
+          <a:chOff x="0" y="0"/>
+          <a:chExt cx="0" cy="0"/>
+        </a:xfrm>
+      </p:grpSpPr>
       <p:sp>
         <p:nvSpPr>
           <p:cNvPr id="2" name="Rectangle 1"/>
@@ -5484,6 +5650,7 @@
           <a:lstStyle/>
           <a:p>
             <a:pPr algn="ctr"/>
+            <a:endParaRPr/>
           </a:p>
         </p:txBody>
       </p:sp>
@@ -5548,10 +5715,34 @@
                 <a:tableStyleId>{5C22544A-7EE6-4342-B048-85BDC9FD1C3A}</a:tableStyleId>
               </a:tblPr>
               <a:tblGrid>
-                <a:gridCol w="4206240"/>
-                <a:gridCol w="2377440"/>
-                <a:gridCol w="1828800"/>
-                <a:gridCol w="2377440"/>
+                <a:gridCol w="4206240">
+                  <a:extLst>
+                    <a:ext uri="{9D8B030D-6E8A-4147-A177-3AD203B41FA5}">
+                      <a16:colId xmlns:a16="http://schemas.microsoft.com/office/drawing/2014/main" val="20000"/>
+                    </a:ext>
+                  </a:extLst>
+                </a:gridCol>
+                <a:gridCol w="2377440">
+                  <a:extLst>
+                    <a:ext uri="{9D8B030D-6E8A-4147-A177-3AD203B41FA5}">
+                      <a16:colId xmlns:a16="http://schemas.microsoft.com/office/drawing/2014/main" val="20001"/>
+                    </a:ext>
+                  </a:extLst>
+                </a:gridCol>
+                <a:gridCol w="1828800">
+                  <a:extLst>
+                    <a:ext uri="{9D8B030D-6E8A-4147-A177-3AD203B41FA5}">
+                      <a16:colId xmlns:a16="http://schemas.microsoft.com/office/drawing/2014/main" val="20002"/>
+                    </a:ext>
+                  </a:extLst>
+                </a:gridCol>
+                <a:gridCol w="2377440">
+                  <a:extLst>
+                    <a:ext uri="{9D8B030D-6E8A-4147-A177-3AD203B41FA5}">
+                      <a16:colId xmlns:a16="http://schemas.microsoft.com/office/drawing/2014/main" val="20003"/>
+                    </a:ext>
+                  </a:extLst>
+                </a:gridCol>
               </a:tblGrid>
               <a:tr h="365760">
                 <a:tc>
@@ -5642,6 +5833,11 @@
                     </a:solidFill>
                   </a:tcPr>
                 </a:tc>
+                <a:extLst>
+                  <a:ext uri="{0D108BD9-81ED-4DB2-BD59-A6C34878D82A}">
+                    <a16:rowId xmlns:a16="http://schemas.microsoft.com/office/drawing/2014/main" val="10000"/>
+                  </a:ext>
+                </a:extLst>
               </a:tr>
               <a:tr h="365760">
                 <a:tc>
@@ -5732,6 +5928,11 @@
                     </a:solidFill>
                   </a:tcPr>
                 </a:tc>
+                <a:extLst>
+                  <a:ext uri="{0D108BD9-81ED-4DB2-BD59-A6C34878D82A}">
+                    <a16:rowId xmlns:a16="http://schemas.microsoft.com/office/drawing/2014/main" val="10001"/>
+                  </a:ext>
+                </a:extLst>
               </a:tr>
               <a:tr h="365760">
                 <a:tc>
@@ -5822,6 +6023,11 @@
                     </a:solidFill>
                   </a:tcPr>
                 </a:tc>
+                <a:extLst>
+                  <a:ext uri="{0D108BD9-81ED-4DB2-BD59-A6C34878D82A}">
+                    <a16:rowId xmlns:a16="http://schemas.microsoft.com/office/drawing/2014/main" val="10002"/>
+                  </a:ext>
+                </a:extLst>
               </a:tr>
               <a:tr h="365760">
                 <a:tc>
@@ -5912,6 +6118,11 @@
                     </a:solidFill>
                   </a:tcPr>
                 </a:tc>
+                <a:extLst>
+                  <a:ext uri="{0D108BD9-81ED-4DB2-BD59-A6C34878D82A}">
+                    <a16:rowId xmlns:a16="http://schemas.microsoft.com/office/drawing/2014/main" val="10003"/>
+                  </a:ext>
+                </a:extLst>
               </a:tr>
               <a:tr h="365760">
                 <a:tc>
@@ -6002,6 +6213,11 @@
                     </a:solidFill>
                   </a:tcPr>
                 </a:tc>
+                <a:extLst>
+                  <a:ext uri="{0D108BD9-81ED-4DB2-BD59-A6C34878D82A}">
+                    <a16:rowId xmlns:a16="http://schemas.microsoft.com/office/drawing/2014/main" val="10004"/>
+                  </a:ext>
+                </a:extLst>
               </a:tr>
             </a:tbl>
           </a:graphicData>
@@ -6058,7 +6274,7 @@
 </file>
 
 <file path=ppt/slides/slide18.xml><?xml version="1.0" encoding="utf-8"?>
-<p:sld xmlns:a="http://schemas.openxmlformats.org/drawingml/2006/main" xmlns:p="http://schemas.openxmlformats.org/presentationml/2006/main" xmlns:r="http://schemas.openxmlformats.org/officeDocument/2006/relationships">
+<p:sld xmlns:a="http://schemas.openxmlformats.org/drawingml/2006/main" xmlns:r="http://schemas.openxmlformats.org/officeDocument/2006/relationships" xmlns:p="http://schemas.openxmlformats.org/presentationml/2006/main">
   <p:cSld>
     <p:bg>
       <p:bgPr>
@@ -6074,7 +6290,14 @@
         <p:cNvGrpSpPr/>
         <p:nvPr/>
       </p:nvGrpSpPr>
-      <p:grpSpPr/>
+      <p:grpSpPr>
+        <a:xfrm>
+          <a:off x="0" y="0"/>
+          <a:ext cx="0" cy="0"/>
+          <a:chOff x="0" y="0"/>
+          <a:chExt cx="0" cy="0"/>
+        </a:xfrm>
+      </p:grpSpPr>
       <p:sp>
         <p:nvSpPr>
           <p:cNvPr id="2" name="Rectangle 1"/>
@@ -6115,6 +6338,7 @@
           <a:lstStyle/>
           <a:p>
             <a:pPr algn="ctr"/>
+            <a:endParaRPr/>
           </a:p>
         </p:txBody>
       </p:sp>
@@ -6287,7 +6511,7 @@
 </file>
 
 <file path=ppt/slides/slide19.xml><?xml version="1.0" encoding="utf-8"?>
-<p:sld xmlns:a="http://schemas.openxmlformats.org/drawingml/2006/main" xmlns:p="http://schemas.openxmlformats.org/presentationml/2006/main" xmlns:r="http://schemas.openxmlformats.org/officeDocument/2006/relationships">
+<p:sld xmlns:a="http://schemas.openxmlformats.org/drawingml/2006/main" xmlns:r="http://schemas.openxmlformats.org/officeDocument/2006/relationships" xmlns:p="http://schemas.openxmlformats.org/presentationml/2006/main">
   <p:cSld>
     <p:bg>
       <p:bgPr>
@@ -6303,7 +6527,14 @@
         <p:cNvGrpSpPr/>
         <p:nvPr/>
       </p:nvGrpSpPr>
-      <p:grpSpPr/>
+      <p:grpSpPr>
+        <a:xfrm>
+          <a:off x="0" y="0"/>
+          <a:ext cx="0" cy="0"/>
+          <a:chOff x="0" y="0"/>
+          <a:chExt cx="0" cy="0"/>
+        </a:xfrm>
+      </p:grpSpPr>
       <p:sp>
         <p:nvSpPr>
           <p:cNvPr id="2" name="Rectangle 1"/>
@@ -6344,6 +6575,7 @@
           <a:lstStyle/>
           <a:p>
             <a:pPr algn="ctr"/>
+            <a:endParaRPr/>
           </a:p>
         </p:txBody>
       </p:sp>
@@ -6464,7 +6696,7 @@
 </file>
 
 <file path=ppt/slides/slide2.xml><?xml version="1.0" encoding="utf-8"?>
-<p:sld xmlns:a="http://schemas.openxmlformats.org/drawingml/2006/main" xmlns:p="http://schemas.openxmlformats.org/presentationml/2006/main" xmlns:r="http://schemas.openxmlformats.org/officeDocument/2006/relationships">
+<p:sld xmlns:a="http://schemas.openxmlformats.org/drawingml/2006/main" xmlns:r="http://schemas.openxmlformats.org/officeDocument/2006/relationships" xmlns:p="http://schemas.openxmlformats.org/presentationml/2006/main">
   <p:cSld>
     <p:bg>
       <p:bgPr>
@@ -6480,7 +6712,14 @@
         <p:cNvGrpSpPr/>
         <p:nvPr/>
       </p:nvGrpSpPr>
-      <p:grpSpPr/>
+      <p:grpSpPr>
+        <a:xfrm>
+          <a:off x="0" y="0"/>
+          <a:ext cx="0" cy="0"/>
+          <a:chOff x="0" y="0"/>
+          <a:chExt cx="0" cy="0"/>
+        </a:xfrm>
+      </p:grpSpPr>
       <p:sp>
         <p:nvSpPr>
           <p:cNvPr id="2" name="TextBox 1"/>
@@ -6563,6 +6802,7 @@
           <a:lstStyle/>
           <a:p>
             <a:pPr algn="ctr"/>
+            <a:endParaRPr/>
           </a:p>
         </p:txBody>
       </p:sp>
@@ -6575,7 +6815,7 @@
 </file>
 
 <file path=ppt/slides/slide20.xml><?xml version="1.0" encoding="utf-8"?>
-<p:sld xmlns:a="http://schemas.openxmlformats.org/drawingml/2006/main" xmlns:p="http://schemas.openxmlformats.org/presentationml/2006/main" xmlns:r="http://schemas.openxmlformats.org/officeDocument/2006/relationships">
+<p:sld xmlns:a="http://schemas.openxmlformats.org/drawingml/2006/main" xmlns:r="http://schemas.openxmlformats.org/officeDocument/2006/relationships" xmlns:p="http://schemas.openxmlformats.org/presentationml/2006/main">
   <p:cSld>
     <p:bg>
       <p:bgPr>
@@ -6591,7 +6831,14 @@
         <p:cNvGrpSpPr/>
         <p:nvPr/>
       </p:nvGrpSpPr>
-      <p:grpSpPr/>
+      <p:grpSpPr>
+        <a:xfrm>
+          <a:off x="0" y="0"/>
+          <a:ext cx="0" cy="0"/>
+          <a:chOff x="0" y="0"/>
+          <a:chExt cx="0" cy="0"/>
+        </a:xfrm>
+      </p:grpSpPr>
       <p:sp>
         <p:nvSpPr>
           <p:cNvPr id="2" name="Rectangle 1"/>
@@ -6632,6 +6879,7 @@
           <a:lstStyle/>
           <a:p>
             <a:pPr algn="ctr"/>
+            <a:endParaRPr/>
           </a:p>
         </p:txBody>
       </p:sp>
@@ -6752,7 +7000,7 @@
 </file>
 
 <file path=ppt/slides/slide21.xml><?xml version="1.0" encoding="utf-8"?>
-<p:sld xmlns:a="http://schemas.openxmlformats.org/drawingml/2006/main" xmlns:p="http://schemas.openxmlformats.org/presentationml/2006/main" xmlns:r="http://schemas.openxmlformats.org/officeDocument/2006/relationships">
+<p:sld xmlns:a="http://schemas.openxmlformats.org/drawingml/2006/main" xmlns:r="http://schemas.openxmlformats.org/officeDocument/2006/relationships" xmlns:p="http://schemas.openxmlformats.org/presentationml/2006/main">
   <p:cSld>
     <p:bg>
       <p:bgPr>
@@ -6768,7 +7016,14 @@
         <p:cNvGrpSpPr/>
         <p:nvPr/>
       </p:nvGrpSpPr>
-      <p:grpSpPr/>
+      <p:grpSpPr>
+        <a:xfrm>
+          <a:off x="0" y="0"/>
+          <a:ext cx="0" cy="0"/>
+          <a:chOff x="0" y="0"/>
+          <a:chExt cx="0" cy="0"/>
+        </a:xfrm>
+      </p:grpSpPr>
       <p:sp>
         <p:nvSpPr>
           <p:cNvPr id="2" name="Rectangle 1"/>
@@ -6809,6 +7064,7 @@
           <a:lstStyle/>
           <a:p>
             <a:pPr algn="ctr"/>
+            <a:endParaRPr/>
           </a:p>
         </p:txBody>
       </p:sp>
@@ -6909,7 +7165,7 @@
               </a:spcAft>
             </a:pPr>
             <a:r>
-              <a:rPr sz="1500" b="0">
+              <a:rPr sz="1500" b="0" dirty="0">
                 <a:solidFill>
                   <a:srgbClr val="5A5A5A"/>
                 </a:solidFill>
@@ -6929,7 +7185,7 @@
 </file>
 
 <file path=ppt/slides/slide22.xml><?xml version="1.0" encoding="utf-8"?>
-<p:sld xmlns:a="http://schemas.openxmlformats.org/drawingml/2006/main" xmlns:p="http://schemas.openxmlformats.org/presentationml/2006/main" xmlns:r="http://schemas.openxmlformats.org/officeDocument/2006/relationships">
+<p:sld xmlns:a="http://schemas.openxmlformats.org/drawingml/2006/main" xmlns:r="http://schemas.openxmlformats.org/officeDocument/2006/relationships" xmlns:p="http://schemas.openxmlformats.org/presentationml/2006/main">
   <p:cSld>
     <p:bg>
       <p:bgPr>
@@ -6945,7 +7201,14 @@
         <p:cNvGrpSpPr/>
         <p:nvPr/>
       </p:nvGrpSpPr>
-      <p:grpSpPr/>
+      <p:grpSpPr>
+        <a:xfrm>
+          <a:off x="0" y="0"/>
+          <a:ext cx="0" cy="0"/>
+          <a:chOff x="0" y="0"/>
+          <a:chExt cx="0" cy="0"/>
+        </a:xfrm>
+      </p:grpSpPr>
       <p:sp>
         <p:nvSpPr>
           <p:cNvPr id="2" name="TextBox 1"/>
@@ -7028,6 +7291,7 @@
           <a:lstStyle/>
           <a:p>
             <a:pPr algn="ctr"/>
+            <a:endParaRPr/>
           </a:p>
         </p:txBody>
       </p:sp>
@@ -7040,7 +7304,7 @@
 </file>
 
 <file path=ppt/slides/slide23.xml><?xml version="1.0" encoding="utf-8"?>
-<p:sld xmlns:a="http://schemas.openxmlformats.org/drawingml/2006/main" xmlns:p="http://schemas.openxmlformats.org/presentationml/2006/main" xmlns:r="http://schemas.openxmlformats.org/officeDocument/2006/relationships">
+<p:sld xmlns:a="http://schemas.openxmlformats.org/drawingml/2006/main" xmlns:r="http://schemas.openxmlformats.org/officeDocument/2006/relationships" xmlns:p="http://schemas.openxmlformats.org/presentationml/2006/main">
   <p:cSld>
     <p:bg>
       <p:bgPr>
@@ -7056,7 +7320,14 @@
         <p:cNvGrpSpPr/>
         <p:nvPr/>
       </p:nvGrpSpPr>
-      <p:grpSpPr/>
+      <p:grpSpPr>
+        <a:xfrm>
+          <a:off x="0" y="0"/>
+          <a:ext cx="0" cy="0"/>
+          <a:chOff x="0" y="0"/>
+          <a:chExt cx="0" cy="0"/>
+        </a:xfrm>
+      </p:grpSpPr>
       <p:sp>
         <p:nvSpPr>
           <p:cNvPr id="2" name="Rectangle 1"/>
@@ -7097,6 +7368,7 @@
           <a:lstStyle/>
           <a:p>
             <a:pPr algn="ctr"/>
+            <a:endParaRPr/>
           </a:p>
         </p:txBody>
       </p:sp>
@@ -7269,7 +7541,7 @@
 </file>
 
 <file path=ppt/slides/slide24.xml><?xml version="1.0" encoding="utf-8"?>
-<p:sld xmlns:a="http://schemas.openxmlformats.org/drawingml/2006/main" xmlns:p="http://schemas.openxmlformats.org/presentationml/2006/main" xmlns:r="http://schemas.openxmlformats.org/officeDocument/2006/relationships">
+<p:sld xmlns:a="http://schemas.openxmlformats.org/drawingml/2006/main" xmlns:r="http://schemas.openxmlformats.org/officeDocument/2006/relationships" xmlns:p="http://schemas.openxmlformats.org/presentationml/2006/main">
   <p:cSld>
     <p:bg>
       <p:bgPr>
@@ -7285,7 +7557,14 @@
         <p:cNvGrpSpPr/>
         <p:nvPr/>
       </p:nvGrpSpPr>
-      <p:grpSpPr/>
+      <p:grpSpPr>
+        <a:xfrm>
+          <a:off x="0" y="0"/>
+          <a:ext cx="0" cy="0"/>
+          <a:chOff x="0" y="0"/>
+          <a:chExt cx="0" cy="0"/>
+        </a:xfrm>
+      </p:grpSpPr>
       <p:sp>
         <p:nvSpPr>
           <p:cNvPr id="2" name="Rectangle 1"/>
@@ -7326,6 +7605,7 @@
           <a:lstStyle/>
           <a:p>
             <a:pPr algn="ctr"/>
+            <a:endParaRPr/>
           </a:p>
         </p:txBody>
       </p:sp>
@@ -7498,7 +7778,7 @@
 </file>
 
 <file path=ppt/slides/slide25.xml><?xml version="1.0" encoding="utf-8"?>
-<p:sld xmlns:a="http://schemas.openxmlformats.org/drawingml/2006/main" xmlns:p="http://schemas.openxmlformats.org/presentationml/2006/main" xmlns:r="http://schemas.openxmlformats.org/officeDocument/2006/relationships">
+<p:sld xmlns:a="http://schemas.openxmlformats.org/drawingml/2006/main" xmlns:r="http://schemas.openxmlformats.org/officeDocument/2006/relationships" xmlns:p="http://schemas.openxmlformats.org/presentationml/2006/main">
   <p:cSld>
     <p:bg>
       <p:bgPr>
@@ -7514,7 +7794,14 @@
         <p:cNvGrpSpPr/>
         <p:nvPr/>
       </p:nvGrpSpPr>
-      <p:grpSpPr/>
+      <p:grpSpPr>
+        <a:xfrm>
+          <a:off x="0" y="0"/>
+          <a:ext cx="0" cy="0"/>
+          <a:chOff x="0" y="0"/>
+          <a:chExt cx="0" cy="0"/>
+        </a:xfrm>
+      </p:grpSpPr>
       <p:sp>
         <p:nvSpPr>
           <p:cNvPr id="2" name="TextBox 1"/>
@@ -7597,6 +7884,7 @@
           <a:lstStyle/>
           <a:p>
             <a:pPr algn="ctr"/>
+            <a:endParaRPr/>
           </a:p>
         </p:txBody>
       </p:sp>
@@ -7609,7 +7897,7 @@
 </file>
 
 <file path=ppt/slides/slide26.xml><?xml version="1.0" encoding="utf-8"?>
-<p:sld xmlns:a="http://schemas.openxmlformats.org/drawingml/2006/main" xmlns:p="http://schemas.openxmlformats.org/presentationml/2006/main" xmlns:r="http://schemas.openxmlformats.org/officeDocument/2006/relationships">
+<p:sld xmlns:a="http://schemas.openxmlformats.org/drawingml/2006/main" xmlns:r="http://schemas.openxmlformats.org/officeDocument/2006/relationships" xmlns:p="http://schemas.openxmlformats.org/presentationml/2006/main">
   <p:cSld>
     <p:bg>
       <p:bgPr>
@@ -7625,7 +7913,14 @@
         <p:cNvGrpSpPr/>
         <p:nvPr/>
       </p:nvGrpSpPr>
-      <p:grpSpPr/>
+      <p:grpSpPr>
+        <a:xfrm>
+          <a:off x="0" y="0"/>
+          <a:ext cx="0" cy="0"/>
+          <a:chOff x="0" y="0"/>
+          <a:chExt cx="0" cy="0"/>
+        </a:xfrm>
+      </p:grpSpPr>
       <p:sp>
         <p:nvSpPr>
           <p:cNvPr id="2" name="Rectangle 1"/>
@@ -7666,6 +7961,7 @@
           <a:lstStyle/>
           <a:p>
             <a:pPr algn="ctr"/>
+            <a:endParaRPr/>
           </a:p>
         </p:txBody>
       </p:sp>
@@ -7876,7 +8172,7 @@
 </file>
 
 <file path=ppt/slides/slide27.xml><?xml version="1.0" encoding="utf-8"?>
-<p:sld xmlns:a="http://schemas.openxmlformats.org/drawingml/2006/main" xmlns:p="http://schemas.openxmlformats.org/presentationml/2006/main" xmlns:r="http://schemas.openxmlformats.org/officeDocument/2006/relationships">
+<p:sld xmlns:a="http://schemas.openxmlformats.org/drawingml/2006/main" xmlns:r="http://schemas.openxmlformats.org/officeDocument/2006/relationships" xmlns:p="http://schemas.openxmlformats.org/presentationml/2006/main">
   <p:cSld>
     <p:bg>
       <p:bgPr>
@@ -7892,7 +8188,14 @@
         <p:cNvGrpSpPr/>
         <p:nvPr/>
       </p:nvGrpSpPr>
-      <p:grpSpPr/>
+      <p:grpSpPr>
+        <a:xfrm>
+          <a:off x="0" y="0"/>
+          <a:ext cx="0" cy="0"/>
+          <a:chOff x="0" y="0"/>
+          <a:chExt cx="0" cy="0"/>
+        </a:xfrm>
+      </p:grpSpPr>
       <p:sp>
         <p:nvSpPr>
           <p:cNvPr id="2" name="Rectangle 1"/>
@@ -7933,6 +8236,7 @@
           <a:lstStyle/>
           <a:p>
             <a:pPr algn="ctr"/>
+            <a:endParaRPr/>
           </a:p>
         </p:txBody>
       </p:sp>
@@ -8053,7 +8357,7 @@
 </file>
 
 <file path=ppt/slides/slide28.xml><?xml version="1.0" encoding="utf-8"?>
-<p:sld xmlns:a="http://schemas.openxmlformats.org/drawingml/2006/main" xmlns:p="http://schemas.openxmlformats.org/presentationml/2006/main" xmlns:r="http://schemas.openxmlformats.org/officeDocument/2006/relationships">
+<p:sld xmlns:a="http://schemas.openxmlformats.org/drawingml/2006/main" xmlns:r="http://schemas.openxmlformats.org/officeDocument/2006/relationships" xmlns:p="http://schemas.openxmlformats.org/presentationml/2006/main">
   <p:cSld>
     <p:bg>
       <p:bgPr>
@@ -8069,7 +8373,14 @@
         <p:cNvGrpSpPr/>
         <p:nvPr/>
       </p:nvGrpSpPr>
-      <p:grpSpPr/>
+      <p:grpSpPr>
+        <a:xfrm>
+          <a:off x="0" y="0"/>
+          <a:ext cx="0" cy="0"/>
+          <a:chOff x="0" y="0"/>
+          <a:chExt cx="0" cy="0"/>
+        </a:xfrm>
+      </p:grpSpPr>
       <p:sp>
         <p:nvSpPr>
           <p:cNvPr id="2" name="Rectangle 1"/>
@@ -8110,6 +8421,7 @@
           <a:lstStyle/>
           <a:p>
             <a:pPr algn="ctr"/>
+            <a:endParaRPr/>
           </a:p>
         </p:txBody>
       </p:sp>
@@ -8320,7 +8632,7 @@
 </file>
 
 <file path=ppt/slides/slide29.xml><?xml version="1.0" encoding="utf-8"?>
-<p:sld xmlns:a="http://schemas.openxmlformats.org/drawingml/2006/main" xmlns:p="http://schemas.openxmlformats.org/presentationml/2006/main" xmlns:r="http://schemas.openxmlformats.org/officeDocument/2006/relationships">
+<p:sld xmlns:a="http://schemas.openxmlformats.org/drawingml/2006/main" xmlns:r="http://schemas.openxmlformats.org/officeDocument/2006/relationships" xmlns:p="http://schemas.openxmlformats.org/presentationml/2006/main">
   <p:cSld>
     <p:bg>
       <p:bgPr>
@@ -8336,7 +8648,14 @@
         <p:cNvGrpSpPr/>
         <p:nvPr/>
       </p:nvGrpSpPr>
-      <p:grpSpPr/>
+      <p:grpSpPr>
+        <a:xfrm>
+          <a:off x="0" y="0"/>
+          <a:ext cx="0" cy="0"/>
+          <a:chOff x="0" y="0"/>
+          <a:chExt cx="0" cy="0"/>
+        </a:xfrm>
+      </p:grpSpPr>
       <p:sp>
         <p:nvSpPr>
           <p:cNvPr id="2" name="Rectangle 1"/>
@@ -8377,6 +8696,7 @@
           <a:lstStyle/>
           <a:p>
             <a:pPr algn="ctr"/>
+            <a:endParaRPr/>
           </a:p>
         </p:txBody>
       </p:sp>
@@ -8535,7 +8855,7 @@
 </file>
 
 <file path=ppt/slides/slide3.xml><?xml version="1.0" encoding="utf-8"?>
-<p:sld xmlns:a="http://schemas.openxmlformats.org/drawingml/2006/main" xmlns:p="http://schemas.openxmlformats.org/presentationml/2006/main" xmlns:r="http://schemas.openxmlformats.org/officeDocument/2006/relationships">
+<p:sld xmlns:a="http://schemas.openxmlformats.org/drawingml/2006/main" xmlns:r="http://schemas.openxmlformats.org/officeDocument/2006/relationships" xmlns:p="http://schemas.openxmlformats.org/presentationml/2006/main">
   <p:cSld>
     <p:bg>
       <p:bgPr>
@@ -8551,7 +8871,14 @@
         <p:cNvGrpSpPr/>
         <p:nvPr/>
       </p:nvGrpSpPr>
-      <p:grpSpPr/>
+      <p:grpSpPr>
+        <a:xfrm>
+          <a:off x="0" y="0"/>
+          <a:ext cx="0" cy="0"/>
+          <a:chOff x="0" y="0"/>
+          <a:chExt cx="0" cy="0"/>
+        </a:xfrm>
+      </p:grpSpPr>
       <p:sp>
         <p:nvSpPr>
           <p:cNvPr id="2" name="Rectangle 1"/>
@@ -8592,6 +8919,7 @@
           <a:lstStyle/>
           <a:p>
             <a:pPr algn="ctr"/>
+            <a:endParaRPr/>
           </a:p>
         </p:txBody>
       </p:sp>
@@ -8764,7 +9092,7 @@
 </file>
 
 <file path=ppt/slides/slide30.xml><?xml version="1.0" encoding="utf-8"?>
-<p:sld xmlns:a="http://schemas.openxmlformats.org/drawingml/2006/main" xmlns:p="http://schemas.openxmlformats.org/presentationml/2006/main" xmlns:r="http://schemas.openxmlformats.org/officeDocument/2006/relationships">
+<p:sld xmlns:a="http://schemas.openxmlformats.org/drawingml/2006/main" xmlns:r="http://schemas.openxmlformats.org/officeDocument/2006/relationships" xmlns:p="http://schemas.openxmlformats.org/presentationml/2006/main">
   <p:cSld>
     <p:bg>
       <p:bgPr>
@@ -8780,7 +9108,14 @@
         <p:cNvGrpSpPr/>
         <p:nvPr/>
       </p:nvGrpSpPr>
-      <p:grpSpPr/>
+      <p:grpSpPr>
+        <a:xfrm>
+          <a:off x="0" y="0"/>
+          <a:ext cx="0" cy="0"/>
+          <a:chOff x="0" y="0"/>
+          <a:chExt cx="0" cy="0"/>
+        </a:xfrm>
+      </p:grpSpPr>
       <p:sp>
         <p:nvSpPr>
           <p:cNvPr id="2" name="TextBox 1"/>
@@ -8863,6 +9198,7 @@
           <a:lstStyle/>
           <a:p>
             <a:pPr algn="ctr"/>
+            <a:endParaRPr/>
           </a:p>
         </p:txBody>
       </p:sp>
@@ -8875,7 +9211,7 @@
 </file>
 
 <file path=ppt/slides/slide31.xml><?xml version="1.0" encoding="utf-8"?>
-<p:sld xmlns:a="http://schemas.openxmlformats.org/drawingml/2006/main" xmlns:p="http://schemas.openxmlformats.org/presentationml/2006/main" xmlns:r="http://schemas.openxmlformats.org/officeDocument/2006/relationships">
+<p:sld xmlns:a="http://schemas.openxmlformats.org/drawingml/2006/main" xmlns:r="http://schemas.openxmlformats.org/officeDocument/2006/relationships" xmlns:p="http://schemas.openxmlformats.org/presentationml/2006/main">
   <p:cSld>
     <p:bg>
       <p:bgPr>
@@ -8891,7 +9227,14 @@
         <p:cNvGrpSpPr/>
         <p:nvPr/>
       </p:nvGrpSpPr>
-      <p:grpSpPr/>
+      <p:grpSpPr>
+        <a:xfrm>
+          <a:off x="0" y="0"/>
+          <a:ext cx="0" cy="0"/>
+          <a:chOff x="0" y="0"/>
+          <a:chExt cx="0" cy="0"/>
+        </a:xfrm>
+      </p:grpSpPr>
       <p:sp>
         <p:nvSpPr>
           <p:cNvPr id="2" name="Rectangle 1"/>
@@ -8932,6 +9275,7 @@
           <a:lstStyle/>
           <a:p>
             <a:pPr algn="ctr"/>
+            <a:endParaRPr/>
           </a:p>
         </p:txBody>
       </p:sp>
@@ -9085,7 +9429,7 @@
 </file>
 
 <file path=ppt/slides/slide32.xml><?xml version="1.0" encoding="utf-8"?>
-<p:sld xmlns:a="http://schemas.openxmlformats.org/drawingml/2006/main" xmlns:p="http://schemas.openxmlformats.org/presentationml/2006/main" xmlns:r="http://schemas.openxmlformats.org/officeDocument/2006/relationships">
+<p:sld xmlns:a="http://schemas.openxmlformats.org/drawingml/2006/main" xmlns:r="http://schemas.openxmlformats.org/officeDocument/2006/relationships" xmlns:p="http://schemas.openxmlformats.org/presentationml/2006/main">
   <p:cSld>
     <p:bg>
       <p:bgPr>
@@ -9101,7 +9445,14 @@
         <p:cNvGrpSpPr/>
         <p:nvPr/>
       </p:nvGrpSpPr>
-      <p:grpSpPr/>
+      <p:grpSpPr>
+        <a:xfrm>
+          <a:off x="0" y="0"/>
+          <a:ext cx="0" cy="0"/>
+          <a:chOff x="0" y="0"/>
+          <a:chExt cx="0" cy="0"/>
+        </a:xfrm>
+      </p:grpSpPr>
       <p:sp>
         <p:nvSpPr>
           <p:cNvPr id="2" name="TextBox 1"/>
@@ -9184,6 +9535,7 @@
           <a:lstStyle/>
           <a:p>
             <a:pPr algn="ctr"/>
+            <a:endParaRPr/>
           </a:p>
         </p:txBody>
       </p:sp>
@@ -9196,7 +9548,7 @@
 </file>
 
 <file path=ppt/slides/slide33.xml><?xml version="1.0" encoding="utf-8"?>
-<p:sld xmlns:a="http://schemas.openxmlformats.org/drawingml/2006/main" xmlns:p="http://schemas.openxmlformats.org/presentationml/2006/main" xmlns:r="http://schemas.openxmlformats.org/officeDocument/2006/relationships">
+<p:sld xmlns:a="http://schemas.openxmlformats.org/drawingml/2006/main" xmlns:r="http://schemas.openxmlformats.org/officeDocument/2006/relationships" xmlns:p="http://schemas.openxmlformats.org/presentationml/2006/main">
   <p:cSld>
     <p:bg>
       <p:bgPr>
@@ -9212,7 +9564,14 @@
         <p:cNvGrpSpPr/>
         <p:nvPr/>
       </p:nvGrpSpPr>
-      <p:grpSpPr/>
+      <p:grpSpPr>
+        <a:xfrm>
+          <a:off x="0" y="0"/>
+          <a:ext cx="0" cy="0"/>
+          <a:chOff x="0" y="0"/>
+          <a:chExt cx="0" cy="0"/>
+        </a:xfrm>
+      </p:grpSpPr>
       <p:sp>
         <p:nvSpPr>
           <p:cNvPr id="2" name="Rectangle 1"/>
@@ -9253,6 +9612,7 @@
           <a:lstStyle/>
           <a:p>
             <a:pPr algn="ctr"/>
+            <a:endParaRPr/>
           </a:p>
         </p:txBody>
       </p:sp>
@@ -9539,7 +9899,7 @@
 </file>
 
 <file path=ppt/slides/slide34.xml><?xml version="1.0" encoding="utf-8"?>
-<p:sld xmlns:a="http://schemas.openxmlformats.org/drawingml/2006/main" xmlns:p="http://schemas.openxmlformats.org/presentationml/2006/main" xmlns:r="http://schemas.openxmlformats.org/officeDocument/2006/relationships">
+<p:sld xmlns:a="http://schemas.openxmlformats.org/drawingml/2006/main" xmlns:r="http://schemas.openxmlformats.org/officeDocument/2006/relationships" xmlns:p="http://schemas.openxmlformats.org/presentationml/2006/main">
   <p:cSld>
     <p:bg>
       <p:bgPr>
@@ -9555,7 +9915,14 @@
         <p:cNvGrpSpPr/>
         <p:nvPr/>
       </p:nvGrpSpPr>
-      <p:grpSpPr/>
+      <p:grpSpPr>
+        <a:xfrm>
+          <a:off x="0" y="0"/>
+          <a:ext cx="0" cy="0"/>
+          <a:chOff x="0" y="0"/>
+          <a:chExt cx="0" cy="0"/>
+        </a:xfrm>
+      </p:grpSpPr>
       <p:sp>
         <p:nvSpPr>
           <p:cNvPr id="2" name="Rectangle 1"/>
@@ -9596,6 +9963,7 @@
           <a:lstStyle/>
           <a:p>
             <a:pPr algn="ctr"/>
+            <a:endParaRPr/>
           </a:p>
         </p:txBody>
       </p:sp>
@@ -9768,7 +10136,7 @@
 </file>
 
 <file path=ppt/slides/slide35.xml><?xml version="1.0" encoding="utf-8"?>
-<p:sld xmlns:a="http://schemas.openxmlformats.org/drawingml/2006/main" xmlns:p="http://schemas.openxmlformats.org/presentationml/2006/main" xmlns:r="http://schemas.openxmlformats.org/officeDocument/2006/relationships">
+<p:sld xmlns:a="http://schemas.openxmlformats.org/drawingml/2006/main" xmlns:r="http://schemas.openxmlformats.org/officeDocument/2006/relationships" xmlns:p="http://schemas.openxmlformats.org/presentationml/2006/main">
   <p:cSld>
     <p:bg>
       <p:bgPr>
@@ -9784,7 +10152,14 @@
         <p:cNvGrpSpPr/>
         <p:nvPr/>
       </p:nvGrpSpPr>
-      <p:grpSpPr/>
+      <p:grpSpPr>
+        <a:xfrm>
+          <a:off x="0" y="0"/>
+          <a:ext cx="0" cy="0"/>
+          <a:chOff x="0" y="0"/>
+          <a:chExt cx="0" cy="0"/>
+        </a:xfrm>
+      </p:grpSpPr>
       <p:sp>
         <p:nvSpPr>
           <p:cNvPr id="2" name="Rectangle 1"/>
@@ -9825,6 +10200,7 @@
           <a:lstStyle/>
           <a:p>
             <a:pPr algn="ctr"/>
+            <a:endParaRPr/>
           </a:p>
         </p:txBody>
       </p:sp>
@@ -9997,7 +10373,7 @@
 </file>
 
 <file path=ppt/slides/slide36.xml><?xml version="1.0" encoding="utf-8"?>
-<p:sld xmlns:a="http://schemas.openxmlformats.org/drawingml/2006/main" xmlns:p="http://schemas.openxmlformats.org/presentationml/2006/main" xmlns:r="http://schemas.openxmlformats.org/officeDocument/2006/relationships">
+<p:sld xmlns:a="http://schemas.openxmlformats.org/drawingml/2006/main" xmlns:r="http://schemas.openxmlformats.org/officeDocument/2006/relationships" xmlns:p="http://schemas.openxmlformats.org/presentationml/2006/main">
   <p:cSld>
     <p:bg>
       <p:bgPr>
@@ -10013,7 +10389,14 @@
         <p:cNvGrpSpPr/>
         <p:nvPr/>
       </p:nvGrpSpPr>
-      <p:grpSpPr/>
+      <p:grpSpPr>
+        <a:xfrm>
+          <a:off x="0" y="0"/>
+          <a:ext cx="0" cy="0"/>
+          <a:chOff x="0" y="0"/>
+          <a:chExt cx="0" cy="0"/>
+        </a:xfrm>
+      </p:grpSpPr>
       <p:sp>
         <p:nvSpPr>
           <p:cNvPr id="2" name="Rectangle 1"/>
@@ -10054,6 +10437,7 @@
           <a:lstStyle/>
           <a:p>
             <a:pPr algn="ctr"/>
+            <a:endParaRPr/>
           </a:p>
         </p:txBody>
       </p:sp>
@@ -10226,7 +10610,7 @@
 </file>
 
 <file path=ppt/slides/slide37.xml><?xml version="1.0" encoding="utf-8"?>
-<p:sld xmlns:a="http://schemas.openxmlformats.org/drawingml/2006/main" xmlns:p="http://schemas.openxmlformats.org/presentationml/2006/main" xmlns:r="http://schemas.openxmlformats.org/officeDocument/2006/relationships">
+<p:sld xmlns:a="http://schemas.openxmlformats.org/drawingml/2006/main" xmlns:r="http://schemas.openxmlformats.org/officeDocument/2006/relationships" xmlns:p="http://schemas.openxmlformats.org/presentationml/2006/main">
   <p:cSld>
     <p:bg>
       <p:bgPr>
@@ -10242,7 +10626,14 @@
         <p:cNvGrpSpPr/>
         <p:nvPr/>
       </p:nvGrpSpPr>
-      <p:grpSpPr/>
+      <p:grpSpPr>
+        <a:xfrm>
+          <a:off x="0" y="0"/>
+          <a:ext cx="0" cy="0"/>
+          <a:chOff x="0" y="0"/>
+          <a:chExt cx="0" cy="0"/>
+        </a:xfrm>
+      </p:grpSpPr>
       <p:sp>
         <p:nvSpPr>
           <p:cNvPr id="2" name="TextBox 1"/>
@@ -10351,7 +10742,7 @@
 </file>
 
 <file path=ppt/slides/slide4.xml><?xml version="1.0" encoding="utf-8"?>
-<p:sld xmlns:a="http://schemas.openxmlformats.org/drawingml/2006/main" xmlns:p="http://schemas.openxmlformats.org/presentationml/2006/main" xmlns:r="http://schemas.openxmlformats.org/officeDocument/2006/relationships">
+<p:sld xmlns:a="http://schemas.openxmlformats.org/drawingml/2006/main" xmlns:r="http://schemas.openxmlformats.org/officeDocument/2006/relationships" xmlns:p="http://schemas.openxmlformats.org/presentationml/2006/main">
   <p:cSld>
     <p:bg>
       <p:bgPr>
@@ -10367,7 +10758,14 @@
         <p:cNvGrpSpPr/>
         <p:nvPr/>
       </p:nvGrpSpPr>
-      <p:grpSpPr/>
+      <p:grpSpPr>
+        <a:xfrm>
+          <a:off x="0" y="0"/>
+          <a:ext cx="0" cy="0"/>
+          <a:chOff x="0" y="0"/>
+          <a:chExt cx="0" cy="0"/>
+        </a:xfrm>
+      </p:grpSpPr>
       <p:sp>
         <p:nvSpPr>
           <p:cNvPr id="2" name="Rectangle 1"/>
@@ -10408,6 +10806,7 @@
           <a:lstStyle/>
           <a:p>
             <a:pPr algn="ctr"/>
+            <a:endParaRPr/>
           </a:p>
         </p:txBody>
       </p:sp>
@@ -10472,9 +10871,27 @@
                 <a:tableStyleId>{5C22544A-7EE6-4342-B048-85BDC9FD1C3A}</a:tableStyleId>
               </a:tblPr>
               <a:tblGrid>
-                <a:gridCol w="2011680"/>
-                <a:gridCol w="2926080"/>
-                <a:gridCol w="6035040"/>
+                <a:gridCol w="2011680">
+                  <a:extLst>
+                    <a:ext uri="{9D8B030D-6E8A-4147-A177-3AD203B41FA5}">
+                      <a16:colId xmlns:a16="http://schemas.microsoft.com/office/drawing/2014/main" val="20000"/>
+                    </a:ext>
+                  </a:extLst>
+                </a:gridCol>
+                <a:gridCol w="2926080">
+                  <a:extLst>
+                    <a:ext uri="{9D8B030D-6E8A-4147-A177-3AD203B41FA5}">
+                      <a16:colId xmlns:a16="http://schemas.microsoft.com/office/drawing/2014/main" val="20001"/>
+                    </a:ext>
+                  </a:extLst>
+                </a:gridCol>
+                <a:gridCol w="6035040">
+                  <a:extLst>
+                    <a:ext uri="{9D8B030D-6E8A-4147-A177-3AD203B41FA5}">
+                      <a16:colId xmlns:a16="http://schemas.microsoft.com/office/drawing/2014/main" val="20002"/>
+                    </a:ext>
+                  </a:extLst>
+                </a:gridCol>
               </a:tblGrid>
               <a:tr h="365760">
                 <a:tc>
@@ -10543,6 +10960,11 @@
                     </a:solidFill>
                   </a:tcPr>
                 </a:tc>
+                <a:extLst>
+                  <a:ext uri="{0D108BD9-81ED-4DB2-BD59-A6C34878D82A}">
+                    <a16:rowId xmlns:a16="http://schemas.microsoft.com/office/drawing/2014/main" val="10000"/>
+                  </a:ext>
+                </a:extLst>
               </a:tr>
               <a:tr h="365760">
                 <a:tc>
@@ -10611,6 +11033,11 @@
                     </a:solidFill>
                   </a:tcPr>
                 </a:tc>
+                <a:extLst>
+                  <a:ext uri="{0D108BD9-81ED-4DB2-BD59-A6C34878D82A}">
+                    <a16:rowId xmlns:a16="http://schemas.microsoft.com/office/drawing/2014/main" val="10001"/>
+                  </a:ext>
+                </a:extLst>
               </a:tr>
               <a:tr h="365760">
                 <a:tc>
@@ -10679,6 +11106,11 @@
                     </a:solidFill>
                   </a:tcPr>
                 </a:tc>
+                <a:extLst>
+                  <a:ext uri="{0D108BD9-81ED-4DB2-BD59-A6C34878D82A}">
+                    <a16:rowId xmlns:a16="http://schemas.microsoft.com/office/drawing/2014/main" val="10002"/>
+                  </a:ext>
+                </a:extLst>
               </a:tr>
               <a:tr h="365760">
                 <a:tc>
@@ -10747,6 +11179,11 @@
                     </a:solidFill>
                   </a:tcPr>
                 </a:tc>
+                <a:extLst>
+                  <a:ext uri="{0D108BD9-81ED-4DB2-BD59-A6C34878D82A}">
+                    <a16:rowId xmlns:a16="http://schemas.microsoft.com/office/drawing/2014/main" val="10003"/>
+                  </a:ext>
+                </a:extLst>
               </a:tr>
             </a:tbl>
           </a:graphicData>
@@ -10803,7 +11240,7 @@
 </file>
 
 <file path=ppt/slides/slide5.xml><?xml version="1.0" encoding="utf-8"?>
-<p:sld xmlns:a="http://schemas.openxmlformats.org/drawingml/2006/main" xmlns:p="http://schemas.openxmlformats.org/presentationml/2006/main" xmlns:r="http://schemas.openxmlformats.org/officeDocument/2006/relationships">
+<p:sld xmlns:a="http://schemas.openxmlformats.org/drawingml/2006/main" xmlns:r="http://schemas.openxmlformats.org/officeDocument/2006/relationships" xmlns:p="http://schemas.openxmlformats.org/presentationml/2006/main">
   <p:cSld>
     <p:bg>
       <p:bgPr>
@@ -10819,7 +11256,14 @@
         <p:cNvGrpSpPr/>
         <p:nvPr/>
       </p:nvGrpSpPr>
-      <p:grpSpPr/>
+      <p:grpSpPr>
+        <a:xfrm>
+          <a:off x="0" y="0"/>
+          <a:ext cx="0" cy="0"/>
+          <a:chOff x="0" y="0"/>
+          <a:chExt cx="0" cy="0"/>
+        </a:xfrm>
+      </p:grpSpPr>
       <p:sp>
         <p:nvSpPr>
           <p:cNvPr id="2" name="TextBox 1"/>
@@ -10902,6 +11346,7 @@
           <a:lstStyle/>
           <a:p>
             <a:pPr algn="ctr"/>
+            <a:endParaRPr/>
           </a:p>
         </p:txBody>
       </p:sp>
@@ -10914,7 +11359,7 @@
 </file>
 
 <file path=ppt/slides/slide6.xml><?xml version="1.0" encoding="utf-8"?>
-<p:sld xmlns:a="http://schemas.openxmlformats.org/drawingml/2006/main" xmlns:p="http://schemas.openxmlformats.org/presentationml/2006/main" xmlns:r="http://schemas.openxmlformats.org/officeDocument/2006/relationships">
+<p:sld xmlns:a="http://schemas.openxmlformats.org/drawingml/2006/main" xmlns:r="http://schemas.openxmlformats.org/officeDocument/2006/relationships" xmlns:p="http://schemas.openxmlformats.org/presentationml/2006/main">
   <p:cSld>
     <p:bg>
       <p:bgPr>
@@ -10930,7 +11375,14 @@
         <p:cNvGrpSpPr/>
         <p:nvPr/>
       </p:nvGrpSpPr>
-      <p:grpSpPr/>
+      <p:grpSpPr>
+        <a:xfrm>
+          <a:off x="0" y="0"/>
+          <a:ext cx="0" cy="0"/>
+          <a:chOff x="0" y="0"/>
+          <a:chExt cx="0" cy="0"/>
+        </a:xfrm>
+      </p:grpSpPr>
       <p:sp>
         <p:nvSpPr>
           <p:cNvPr id="2" name="Rectangle 1"/>
@@ -10971,6 +11423,7 @@
           <a:lstStyle/>
           <a:p>
             <a:pPr algn="ctr"/>
+            <a:endParaRPr/>
           </a:p>
         </p:txBody>
       </p:sp>
@@ -11035,10 +11488,34 @@
                 <a:tableStyleId>{5C22544A-7EE6-4342-B048-85BDC9FD1C3A}</a:tableStyleId>
               </a:tblPr>
               <a:tblGrid>
-                <a:gridCol w="4572000"/>
-                <a:gridCol w="2011680"/>
-                <a:gridCol w="2560320"/>
-                <a:gridCol w="1828800"/>
+                <a:gridCol w="4572000">
+                  <a:extLst>
+                    <a:ext uri="{9D8B030D-6E8A-4147-A177-3AD203B41FA5}">
+                      <a16:colId xmlns:a16="http://schemas.microsoft.com/office/drawing/2014/main" val="20000"/>
+                    </a:ext>
+                  </a:extLst>
+                </a:gridCol>
+                <a:gridCol w="2011680">
+                  <a:extLst>
+                    <a:ext uri="{9D8B030D-6E8A-4147-A177-3AD203B41FA5}">
+                      <a16:colId xmlns:a16="http://schemas.microsoft.com/office/drawing/2014/main" val="20001"/>
+                    </a:ext>
+                  </a:extLst>
+                </a:gridCol>
+                <a:gridCol w="2560320">
+                  <a:extLst>
+                    <a:ext uri="{9D8B030D-6E8A-4147-A177-3AD203B41FA5}">
+                      <a16:colId xmlns:a16="http://schemas.microsoft.com/office/drawing/2014/main" val="20002"/>
+                    </a:ext>
+                  </a:extLst>
+                </a:gridCol>
+                <a:gridCol w="1828800">
+                  <a:extLst>
+                    <a:ext uri="{9D8B030D-6E8A-4147-A177-3AD203B41FA5}">
+                      <a16:colId xmlns:a16="http://schemas.microsoft.com/office/drawing/2014/main" val="20003"/>
+                    </a:ext>
+                  </a:extLst>
+                </a:gridCol>
               </a:tblGrid>
               <a:tr h="365760">
                 <a:tc>
@@ -11129,6 +11606,11 @@
                     </a:solidFill>
                   </a:tcPr>
                 </a:tc>
+                <a:extLst>
+                  <a:ext uri="{0D108BD9-81ED-4DB2-BD59-A6C34878D82A}">
+                    <a16:rowId xmlns:a16="http://schemas.microsoft.com/office/drawing/2014/main" val="10000"/>
+                  </a:ext>
+                </a:extLst>
               </a:tr>
               <a:tr h="365760">
                 <a:tc>
@@ -11219,6 +11701,11 @@
                     </a:solidFill>
                   </a:tcPr>
                 </a:tc>
+                <a:extLst>
+                  <a:ext uri="{0D108BD9-81ED-4DB2-BD59-A6C34878D82A}">
+                    <a16:rowId xmlns:a16="http://schemas.microsoft.com/office/drawing/2014/main" val="10001"/>
+                  </a:ext>
+                </a:extLst>
               </a:tr>
               <a:tr h="365760">
                 <a:tc>
@@ -11309,6 +11796,11 @@
                     </a:solidFill>
                   </a:tcPr>
                 </a:tc>
+                <a:extLst>
+                  <a:ext uri="{0D108BD9-81ED-4DB2-BD59-A6C34878D82A}">
+                    <a16:rowId xmlns:a16="http://schemas.microsoft.com/office/drawing/2014/main" val="10002"/>
+                  </a:ext>
+                </a:extLst>
               </a:tr>
               <a:tr h="365760">
                 <a:tc>
@@ -11399,6 +11891,11 @@
                     </a:solidFill>
                   </a:tcPr>
                 </a:tc>
+                <a:extLst>
+                  <a:ext uri="{0D108BD9-81ED-4DB2-BD59-A6C34878D82A}">
+                    <a16:rowId xmlns:a16="http://schemas.microsoft.com/office/drawing/2014/main" val="10003"/>
+                  </a:ext>
+                </a:extLst>
               </a:tr>
             </a:tbl>
           </a:graphicData>
@@ -11455,7 +11952,7 @@
 </file>
 
 <file path=ppt/slides/slide7.xml><?xml version="1.0" encoding="utf-8"?>
-<p:sld xmlns:a="http://schemas.openxmlformats.org/drawingml/2006/main" xmlns:p="http://schemas.openxmlformats.org/presentationml/2006/main" xmlns:r="http://schemas.openxmlformats.org/officeDocument/2006/relationships">
+<p:sld xmlns:a="http://schemas.openxmlformats.org/drawingml/2006/main" xmlns:r="http://schemas.openxmlformats.org/officeDocument/2006/relationships" xmlns:p="http://schemas.openxmlformats.org/presentationml/2006/main">
   <p:cSld>
     <p:bg>
       <p:bgPr>
@@ -11471,7 +11968,14 @@
         <p:cNvGrpSpPr/>
         <p:nvPr/>
       </p:nvGrpSpPr>
-      <p:grpSpPr/>
+      <p:grpSpPr>
+        <a:xfrm>
+          <a:off x="0" y="0"/>
+          <a:ext cx="0" cy="0"/>
+          <a:chOff x="0" y="0"/>
+          <a:chExt cx="0" cy="0"/>
+        </a:xfrm>
+      </p:grpSpPr>
       <p:sp>
         <p:nvSpPr>
           <p:cNvPr id="2" name="Rectangle 1"/>
@@ -11512,6 +12016,7 @@
           <a:lstStyle/>
           <a:p>
             <a:pPr algn="ctr"/>
+            <a:endParaRPr/>
           </a:p>
         </p:txBody>
       </p:sp>
@@ -11703,7 +12208,7 @@
 </file>
 
 <file path=ppt/slides/slide8.xml><?xml version="1.0" encoding="utf-8"?>
-<p:sld xmlns:a="http://schemas.openxmlformats.org/drawingml/2006/main" xmlns:p="http://schemas.openxmlformats.org/presentationml/2006/main" xmlns:r="http://schemas.openxmlformats.org/officeDocument/2006/relationships">
+<p:sld xmlns:a="http://schemas.openxmlformats.org/drawingml/2006/main" xmlns:r="http://schemas.openxmlformats.org/officeDocument/2006/relationships" xmlns:p="http://schemas.openxmlformats.org/presentationml/2006/main">
   <p:cSld>
     <p:bg>
       <p:bgPr>
@@ -11719,7 +12224,14 @@
         <p:cNvGrpSpPr/>
         <p:nvPr/>
       </p:nvGrpSpPr>
-      <p:grpSpPr/>
+      <p:grpSpPr>
+        <a:xfrm>
+          <a:off x="0" y="0"/>
+          <a:ext cx="0" cy="0"/>
+          <a:chOff x="0" y="0"/>
+          <a:chExt cx="0" cy="0"/>
+        </a:xfrm>
+      </p:grpSpPr>
       <p:sp>
         <p:nvSpPr>
           <p:cNvPr id="2" name="TextBox 1"/>
@@ -11802,6 +12314,7 @@
           <a:lstStyle/>
           <a:p>
             <a:pPr algn="ctr"/>
+            <a:endParaRPr/>
           </a:p>
         </p:txBody>
       </p:sp>
@@ -11814,7 +12327,7 @@
 </file>
 
 <file path=ppt/slides/slide9.xml><?xml version="1.0" encoding="utf-8"?>
-<p:sld xmlns:a="http://schemas.openxmlformats.org/drawingml/2006/main" xmlns:p="http://schemas.openxmlformats.org/presentationml/2006/main" xmlns:r="http://schemas.openxmlformats.org/officeDocument/2006/relationships">
+<p:sld xmlns:a="http://schemas.openxmlformats.org/drawingml/2006/main" xmlns:r="http://schemas.openxmlformats.org/officeDocument/2006/relationships" xmlns:p="http://schemas.openxmlformats.org/presentationml/2006/main">
   <p:cSld>
     <p:bg>
       <p:bgPr>
@@ -11830,7 +12343,14 @@
         <p:cNvGrpSpPr/>
         <p:nvPr/>
       </p:nvGrpSpPr>
-      <p:grpSpPr/>
+      <p:grpSpPr>
+        <a:xfrm>
+          <a:off x="0" y="0"/>
+          <a:ext cx="0" cy="0"/>
+          <a:chOff x="0" y="0"/>
+          <a:chExt cx="0" cy="0"/>
+        </a:xfrm>
+      </p:grpSpPr>
       <p:sp>
         <p:nvSpPr>
           <p:cNvPr id="2" name="Rectangle 1"/>
@@ -11871,6 +12391,7 @@
           <a:lstStyle/>
           <a:p>
             <a:pPr algn="ctr"/>
+            <a:endParaRPr/>
           </a:p>
         </p:txBody>
       </p:sp>
